--- a/那些人較易結婚或離婚.pptx
+++ b/那些人較易結婚或離婚.pptx
@@ -4401,7 +4401,7 @@
           <a:p>
             <a:fld id="{48A87A34-81AB-432B-8DAE-1953F412C126}" type="datetimeFigureOut">
               <a:rPr lang="en-US" dirty="0"/>
-              <a:t>4/1/2026</a:t>
+              <a:t>4/7/2026</a:t>
             </a:fld>
             <a:endParaRPr lang="en-US" dirty="0"/>
           </a:p>
@@ -4663,7 +4663,7 @@
           <a:p>
             <a:fld id="{48A87A34-81AB-432B-8DAE-1953F412C126}" type="datetimeFigureOut">
               <a:rPr lang="en-US" dirty="0"/>
-              <a:t>4/1/2026</a:t>
+              <a:t>4/7/2026</a:t>
             </a:fld>
             <a:endParaRPr lang="en-US" dirty="0"/>
           </a:p>
@@ -4854,7 +4854,7 @@
           <a:p>
             <a:fld id="{48A87A34-81AB-432B-8DAE-1953F412C126}" type="datetimeFigureOut">
               <a:rPr lang="en-US" dirty="0"/>
-              <a:t>4/1/2026</a:t>
+              <a:t>4/7/2026</a:t>
             </a:fld>
             <a:endParaRPr lang="en-US" dirty="0"/>
           </a:p>
@@ -5112,7 +5112,7 @@
           <a:p>
             <a:fld id="{48A87A34-81AB-432B-8DAE-1953F412C126}" type="datetimeFigureOut">
               <a:rPr lang="en-US" dirty="0"/>
-              <a:t>4/1/2026</a:t>
+              <a:t>4/7/2026</a:t>
             </a:fld>
             <a:endParaRPr lang="en-US" dirty="0"/>
           </a:p>
@@ -5541,7 +5541,7 @@
           <a:p>
             <a:fld id="{48A87A34-81AB-432B-8DAE-1953F412C126}" type="datetimeFigureOut">
               <a:rPr lang="en-US" dirty="0"/>
-              <a:t>4/1/2026</a:t>
+              <a:t>4/7/2026</a:t>
             </a:fld>
             <a:endParaRPr lang="en-US" dirty="0"/>
           </a:p>
@@ -6082,7 +6082,7 @@
           <a:p>
             <a:fld id="{48A87A34-81AB-432B-8DAE-1953F412C126}" type="datetimeFigureOut">
               <a:rPr lang="en-US" dirty="0"/>
-              <a:t>4/1/2026</a:t>
+              <a:t>4/7/2026</a:t>
             </a:fld>
             <a:endParaRPr lang="en-US" dirty="0"/>
           </a:p>
@@ -6797,7 +6797,7 @@
           <a:p>
             <a:fld id="{48A87A34-81AB-432B-8DAE-1953F412C126}" type="datetimeFigureOut">
               <a:rPr lang="en-US" dirty="0"/>
-              <a:t>4/1/2026</a:t>
+              <a:t>4/7/2026</a:t>
             </a:fld>
             <a:endParaRPr lang="en-US" dirty="0"/>
           </a:p>
@@ -6962,7 +6962,7 @@
           <a:p>
             <a:fld id="{48A87A34-81AB-432B-8DAE-1953F412C126}" type="datetimeFigureOut">
               <a:rPr lang="en-US" dirty="0"/>
-              <a:t>4/1/2026</a:t>
+              <a:t>4/7/2026</a:t>
             </a:fld>
             <a:endParaRPr lang="en-US" dirty="0"/>
           </a:p>
@@ -7137,7 +7137,7 @@
           <a:p>
             <a:fld id="{48A87A34-81AB-432B-8DAE-1953F412C126}" type="datetimeFigureOut">
               <a:rPr lang="en-US" dirty="0"/>
-              <a:t>4/1/2026</a:t>
+              <a:t>4/7/2026</a:t>
             </a:fld>
             <a:endParaRPr lang="en-US" dirty="0"/>
           </a:p>
@@ -7302,7 +7302,7 @@
           <a:p>
             <a:fld id="{48A87A34-81AB-432B-8DAE-1953F412C126}" type="datetimeFigureOut">
               <a:rPr lang="en-US" dirty="0"/>
-              <a:t>4/1/2026</a:t>
+              <a:t>4/7/2026</a:t>
             </a:fld>
             <a:endParaRPr lang="en-US" dirty="0"/>
           </a:p>
@@ -7547,7 +7547,7 @@
           <a:p>
             <a:fld id="{48A87A34-81AB-432B-8DAE-1953F412C126}" type="datetimeFigureOut">
               <a:rPr lang="en-US" dirty="0"/>
-              <a:t>4/1/2026</a:t>
+              <a:t>4/7/2026</a:t>
             </a:fld>
             <a:endParaRPr lang="en-US" dirty="0"/>
           </a:p>
@@ -7774,7 +7774,7 @@
           <a:p>
             <a:fld id="{48A87A34-81AB-432B-8DAE-1953F412C126}" type="datetimeFigureOut">
               <a:rPr lang="en-US" dirty="0"/>
-              <a:t>4/1/2026</a:t>
+              <a:t>4/7/2026</a:t>
             </a:fld>
             <a:endParaRPr lang="en-US" dirty="0"/>
           </a:p>
@@ -8150,7 +8150,7 @@
           <a:p>
             <a:fld id="{48A87A34-81AB-432B-8DAE-1953F412C126}" type="datetimeFigureOut">
               <a:rPr lang="en-US" dirty="0"/>
-              <a:t>4/1/2026</a:t>
+              <a:t>4/7/2026</a:t>
             </a:fld>
             <a:endParaRPr lang="en-US" dirty="0"/>
           </a:p>
@@ -8263,7 +8263,7 @@
           <a:p>
             <a:fld id="{48A87A34-81AB-432B-8DAE-1953F412C126}" type="datetimeFigureOut">
               <a:rPr lang="en-US" dirty="0"/>
-              <a:t>4/1/2026</a:t>
+              <a:t>4/7/2026</a:t>
             </a:fld>
             <a:endParaRPr lang="en-US" dirty="0"/>
           </a:p>
@@ -8353,7 +8353,7 @@
           <a:p>
             <a:fld id="{48A87A34-81AB-432B-8DAE-1953F412C126}" type="datetimeFigureOut">
               <a:rPr lang="en-US" dirty="0"/>
-              <a:t>4/1/2026</a:t>
+              <a:t>4/7/2026</a:t>
             </a:fld>
             <a:endParaRPr lang="en-US" dirty="0"/>
           </a:p>
@@ -8597,7 +8597,7 @@
           <a:p>
             <a:fld id="{48A87A34-81AB-432B-8DAE-1953F412C126}" type="datetimeFigureOut">
               <a:rPr lang="en-US" dirty="0"/>
-              <a:t>4/1/2026</a:t>
+              <a:t>4/7/2026</a:t>
             </a:fld>
             <a:endParaRPr lang="en-US" dirty="0"/>
           </a:p>
@@ -8872,7 +8872,7 @@
           <a:p>
             <a:fld id="{48A87A34-81AB-432B-8DAE-1953F412C126}" type="datetimeFigureOut">
               <a:rPr lang="en-US" dirty="0"/>
-              <a:t>4/1/2026</a:t>
+              <a:t>4/7/2026</a:t>
             </a:fld>
             <a:endParaRPr lang="en-US" dirty="0"/>
           </a:p>
@@ -11945,7 +11945,7 @@
             <a:fld id="{48A87A34-81AB-432B-8DAE-1953F412C126}" type="datetimeFigureOut">
               <a:rPr lang="en-US" dirty="0"/>
               <a:pPr/>
-              <a:t>4/1/2026</a:t>
+              <a:t>4/7/2026</a:t>
             </a:fld>
             <a:endParaRPr lang="en-US" dirty="0"/>
           </a:p>
@@ -12495,10 +12495,10 @@
       </p:sp>
       <p:pic>
         <p:nvPicPr>
-          <p:cNvPr id="5" name="圖片 4">
+          <p:cNvPr id="6" name="圖片 5">
             <a:extLst>
               <a:ext uri="{FF2B5EF4-FFF2-40B4-BE49-F238E27FC236}">
-                <a16:creationId xmlns:a16="http://schemas.microsoft.com/office/drawing/2014/main" id="{032491EE-6523-2F60-1B6B-9367D348DBA1}"/>
+                <a16:creationId xmlns:a16="http://schemas.microsoft.com/office/drawing/2014/main" id="{1CA2B71A-2C1C-6DF2-7E11-404AC7BAEC52}"/>
               </a:ext>
             </a:extLst>
           </p:cNvPr>
@@ -12515,8 +12515,8 @@
         </p:blipFill>
         <p:spPr>
           <a:xfrm>
-            <a:off x="2007373" y="1634243"/>
-            <a:ext cx="8177254" cy="4605239"/>
+            <a:off x="2007373" y="1634242"/>
+            <a:ext cx="8177254" cy="4678429"/>
           </a:xfrm>
           <a:prstGeom prst="rect">
             <a:avLst/>
@@ -12555,10 +12555,10 @@
       </p:grpSpPr>
       <p:pic>
         <p:nvPicPr>
-          <p:cNvPr id="7" name="圖片 6">
+          <p:cNvPr id="4" name="圖片 3">
             <a:extLst>
               <a:ext uri="{FF2B5EF4-FFF2-40B4-BE49-F238E27FC236}">
-                <a16:creationId xmlns:a16="http://schemas.microsoft.com/office/drawing/2014/main" id="{8B675CB9-EA13-55FD-E89F-675340BE7457}"/>
+                <a16:creationId xmlns:a16="http://schemas.microsoft.com/office/drawing/2014/main" id="{9538D195-53B5-2103-5E65-9B4D2CFF9750}"/>
               </a:ext>
             </a:extLst>
           </p:cNvPr>
@@ -12575,8 +12575,8 @@
         </p:blipFill>
         <p:spPr>
           <a:xfrm>
-            <a:off x="1088221" y="599302"/>
-            <a:ext cx="10015558" cy="5659395"/>
+            <a:off x="984580" y="486875"/>
+            <a:ext cx="10267896" cy="5771822"/>
           </a:xfrm>
           <a:prstGeom prst="rect">
             <a:avLst/>
@@ -12638,21 +12638,44 @@
           </a:p>
         </p:txBody>
       </p:sp>
+      <p:sp>
+        <p:nvSpPr>
+          <p:cNvPr id="7" name="內容版面配置區 6">
+            <a:extLst>
+              <a:ext uri="{FF2B5EF4-FFF2-40B4-BE49-F238E27FC236}">
+                <a16:creationId xmlns:a16="http://schemas.microsoft.com/office/drawing/2014/main" id="{90A9E7DC-F5B7-DE67-F199-E9909F21DA59}"/>
+              </a:ext>
+            </a:extLst>
+          </p:cNvPr>
+          <p:cNvSpPr>
+            <a:spLocks noGrp="1"/>
+          </p:cNvSpPr>
+          <p:nvPr>
+            <p:ph idx="1"/>
+          </p:nvPr>
+        </p:nvSpPr>
+        <p:spPr/>
+        <p:txBody>
+          <a:bodyPr/>
+          <a:lstStyle/>
+          <a:p>
+            <a:endParaRPr lang="zh-TW" altLang="en-US"/>
+          </a:p>
+        </p:txBody>
+      </p:sp>
       <p:pic>
         <p:nvPicPr>
-          <p:cNvPr id="5" name="內容版面配置區 4">
+          <p:cNvPr id="8" name="圖片 7">
             <a:extLst>
               <a:ext uri="{FF2B5EF4-FFF2-40B4-BE49-F238E27FC236}">
-                <a16:creationId xmlns:a16="http://schemas.microsoft.com/office/drawing/2014/main" id="{4B428851-BC8A-0C3F-D744-5F454900B893}"/>
+                <a16:creationId xmlns:a16="http://schemas.microsoft.com/office/drawing/2014/main" id="{E625BD59-B985-6AE0-C522-C97690694818}"/>
               </a:ext>
             </a:extLst>
           </p:cNvPr>
           <p:cNvPicPr>
-            <a:picLocks noGrp="1" noChangeAspect="1"/>
+            <a:picLocks noChangeAspect="1"/>
           </p:cNvPicPr>
-          <p:nvPr>
-            <p:ph idx="1"/>
-          </p:nvPr>
+          <p:nvPr/>
         </p:nvPicPr>
         <p:blipFill>
           <a:blip r:embed="rId2"/>
@@ -12662,8 +12685,8 @@
         </p:blipFill>
         <p:spPr>
           <a:xfrm>
-            <a:off x="1102660" y="618517"/>
-            <a:ext cx="9983503" cy="5620965"/>
+            <a:off x="1102659" y="618516"/>
+            <a:ext cx="9983503" cy="5673818"/>
           </a:xfrm>
           <a:prstGeom prst="rect">
             <a:avLst/>
@@ -12751,10 +12774,10 @@
       </p:sp>
       <p:pic>
         <p:nvPicPr>
-          <p:cNvPr id="5" name="圖片 4">
+          <p:cNvPr id="6" name="圖片 5">
             <a:extLst>
               <a:ext uri="{FF2B5EF4-FFF2-40B4-BE49-F238E27FC236}">
-                <a16:creationId xmlns:a16="http://schemas.microsoft.com/office/drawing/2014/main" id="{45F533A1-C0C7-C18F-D0C9-F79917CAE5D3}"/>
+                <a16:creationId xmlns:a16="http://schemas.microsoft.com/office/drawing/2014/main" id="{6CF3778D-A35A-29D3-79CD-44DB6FC78EAB}"/>
               </a:ext>
             </a:extLst>
           </p:cNvPr>
@@ -12771,8 +12794,8 @@
         </p:blipFill>
         <p:spPr>
           <a:xfrm>
-            <a:off x="1881481" y="1625462"/>
-            <a:ext cx="8429038" cy="4752760"/>
+            <a:off x="1881481" y="1625461"/>
+            <a:ext cx="8429038" cy="4797597"/>
           </a:xfrm>
           <a:prstGeom prst="rect">
             <a:avLst/>
@@ -12855,7 +12878,9 @@
         </p:nvSpPr>
         <p:spPr/>
         <p:txBody>
-          <a:bodyPr/>
+          <a:bodyPr>
+            <a:normAutofit/>
+          </a:bodyPr>
           <a:lstStyle/>
           <a:p>
             <a:r>
@@ -12878,65 +12903,122 @@
           <a:p>
             <a:pPr lvl="1"/>
             <a:r>
-              <a:rPr lang="en-US" altLang="zh-TW" sz="2400" dirty="0"/>
+              <a:rPr lang="en-US" altLang="zh-TW" sz="2400" u="sng" dirty="0"/>
               <a:t>25~34</a:t>
             </a:r>
             <a:r>
+              <a:rPr lang="zh-TW" altLang="en-US" sz="2400" u="sng" dirty="0"/>
+              <a:t>歲</a:t>
+            </a:r>
+            <a:r>
               <a:rPr lang="zh-TW" altLang="en-US" sz="2400" dirty="0"/>
-              <a:t>歲結婚人數最多，大多為初婚，</a:t>
-            </a:r>
-            <a:r>
-              <a:rPr lang="en-US" altLang="zh-TW" sz="2400" dirty="0"/>
+              <a:t>結婚人數最多，大多為</a:t>
+            </a:r>
+            <a:r>
+              <a:rPr lang="zh-TW" altLang="en-US" sz="2400" u="sng" dirty="0"/>
+              <a:t>初婚</a:t>
+            </a:r>
+            <a:r>
+              <a:rPr lang="zh-TW" altLang="en-US" sz="2400" dirty="0"/>
+              <a:t>，</a:t>
+            </a:r>
+            <a:r>
+              <a:rPr lang="en-US" altLang="zh-TW" sz="2400" u="sng" dirty="0"/>
               <a:t>35~44</a:t>
             </a:r>
             <a:r>
+              <a:rPr lang="zh-TW" altLang="en-US" sz="2400" u="sng" dirty="0"/>
+              <a:t>歲</a:t>
+            </a:r>
+            <a:r>
               <a:rPr lang="zh-TW" altLang="en-US" sz="2400" dirty="0"/>
-              <a:t>歲大多為再婚。</a:t>
+              <a:t>大多為</a:t>
+            </a:r>
+            <a:r>
+              <a:rPr lang="zh-TW" altLang="en-US" sz="2400" u="sng" dirty="0"/>
+              <a:t>再婚</a:t>
+            </a:r>
+            <a:r>
+              <a:rPr lang="zh-TW" altLang="en-US" sz="2400" dirty="0"/>
+              <a:t>。</a:t>
             </a:r>
             <a:endParaRPr lang="en-US" altLang="zh-TW" sz="2400" dirty="0"/>
           </a:p>
           <a:p>
             <a:pPr lvl="1"/>
             <a:r>
-              <a:rPr lang="en-US" altLang="zh-TW" sz="2400" dirty="0"/>
+              <a:rPr lang="en-US" altLang="zh-TW" sz="2400" u="sng" dirty="0"/>
               <a:t>35~44</a:t>
             </a:r>
             <a:r>
+              <a:rPr lang="zh-TW" altLang="en-US" sz="2400" u="sng" dirty="0"/>
+              <a:t>歲</a:t>
+            </a:r>
+            <a:r>
               <a:rPr lang="zh-TW" altLang="en-US" sz="2400" dirty="0"/>
-              <a:t>歲離婚人數為該群最高、高中畢業的離婚人數為該群最高。</a:t>
+              <a:t>離婚人數為該群最高、</a:t>
+            </a:r>
+            <a:r>
+              <a:rPr lang="zh-TW" altLang="en-US" sz="2400" u="sng" dirty="0"/>
+              <a:t>高中畢業</a:t>
+            </a:r>
+            <a:r>
+              <a:rPr lang="zh-TW" altLang="en-US" sz="2400" dirty="0"/>
+              <a:t>的離婚人數為該群最高。</a:t>
             </a:r>
             <a:endParaRPr lang="en-US" altLang="zh-TW" sz="2400" dirty="0"/>
           </a:p>
           <a:p>
             <a:pPr lvl="1"/>
             <a:r>
-              <a:rPr lang="en-US" altLang="zh-TW" sz="2400" dirty="0"/>
+              <a:rPr lang="en-US" altLang="zh-TW" sz="2400" u="sng" dirty="0"/>
               <a:t>25~34</a:t>
             </a:r>
             <a:r>
+              <a:rPr lang="zh-TW" altLang="en-US" sz="2400" u="sng" dirty="0"/>
+              <a:t>歲</a:t>
+            </a:r>
+            <a:r>
               <a:rPr lang="zh-TW" altLang="en-US" sz="2400" dirty="0"/>
-              <a:t>歲且大學畢業的初婚人數最高。</a:t>
+              <a:t>且</a:t>
+            </a:r>
+            <a:r>
+              <a:rPr lang="zh-TW" altLang="en-US" sz="2400" u="sng" dirty="0"/>
+              <a:t>大學畢業</a:t>
+            </a:r>
+            <a:r>
+              <a:rPr lang="zh-TW" altLang="en-US" sz="2400" dirty="0"/>
+              <a:t>的初婚人數最高。</a:t>
             </a:r>
             <a:endParaRPr lang="en-US" altLang="zh-TW" sz="2400" dirty="0"/>
           </a:p>
           <a:p>
             <a:pPr lvl="1"/>
             <a:r>
-              <a:rPr lang="en-US" altLang="zh-TW" sz="2400" dirty="0"/>
+              <a:rPr lang="zh-TW" altLang="en-US" sz="2400" dirty="0"/>
+              <a:t>原住民中有偶人數最多人為</a:t>
+            </a:r>
+            <a:r>
+              <a:rPr lang="en-US" altLang="zh-TW" sz="2400" u="sng" dirty="0"/>
               <a:t>35~44</a:t>
             </a:r>
             <a:r>
+              <a:rPr lang="zh-TW" altLang="en-US" sz="2400" u="sng" dirty="0"/>
+              <a:t>歲</a:t>
+            </a:r>
+            <a:r>
               <a:rPr lang="zh-TW" altLang="en-US" sz="2400" dirty="0"/>
-              <a:t>的歲的原住民有偶人數最高，</a:t>
-            </a:r>
-            <a:r>
-              <a:rPr lang="en-US" altLang="zh-TW" sz="2400" dirty="0"/>
+              <a:t>，離過婚中最多人在</a:t>
+            </a:r>
+            <a:r>
+              <a:rPr lang="en-US" altLang="zh-TW" sz="2400" u="sng" dirty="0"/>
               <a:t>45~54</a:t>
             </a:r>
             <a:r>
-              <a:rPr lang="zh-TW" altLang="en-US" sz="2400" dirty="0"/>
-              <a:t>的歲的原住民離過婚人數最高。</a:t>
-            </a:r>
+              <a:rPr lang="zh-TW" altLang="en-US" sz="2400" u="sng" dirty="0"/>
+              <a:t>歲</a:t>
+            </a:r>
+            <a:endParaRPr lang="en-US" altLang="zh-TW" sz="2400" u="sng" dirty="0"/>
           </a:p>
         </p:txBody>
       </p:sp>
@@ -14006,10 +14088,10 @@
       </p:sp>
       <p:pic>
         <p:nvPicPr>
-          <p:cNvPr id="11" name="圖片 10">
+          <p:cNvPr id="6" name="圖片 5">
             <a:extLst>
               <a:ext uri="{FF2B5EF4-FFF2-40B4-BE49-F238E27FC236}">
-                <a16:creationId xmlns:a16="http://schemas.microsoft.com/office/drawing/2014/main" id="{F0DDF956-992C-4C79-8C7C-F7C2845BA763}"/>
+                <a16:creationId xmlns:a16="http://schemas.microsoft.com/office/drawing/2014/main" id="{A6B8B33F-63CA-9EB2-3B39-17B4ACF6662E}"/>
               </a:ext>
             </a:extLst>
           </p:cNvPr>
@@ -14026,8 +14108,8 @@
         </p:blipFill>
         <p:spPr>
           <a:xfrm>
-            <a:off x="1977941" y="1611002"/>
-            <a:ext cx="8236117" cy="4628480"/>
+            <a:off x="2136222" y="1800212"/>
+            <a:ext cx="7916380" cy="4439270"/>
           </a:xfrm>
           <a:prstGeom prst="rect">
             <a:avLst/>
@@ -14089,21 +14171,44 @@
           </a:p>
         </p:txBody>
       </p:sp>
+      <p:sp>
+        <p:nvSpPr>
+          <p:cNvPr id="7" name="內容版面配置區 6">
+            <a:extLst>
+              <a:ext uri="{FF2B5EF4-FFF2-40B4-BE49-F238E27FC236}">
+                <a16:creationId xmlns:a16="http://schemas.microsoft.com/office/drawing/2014/main" id="{68B19D04-722A-3B24-41B1-A78905BCC0EA}"/>
+              </a:ext>
+            </a:extLst>
+          </p:cNvPr>
+          <p:cNvSpPr>
+            <a:spLocks noGrp="1"/>
+          </p:cNvSpPr>
+          <p:nvPr>
+            <p:ph idx="1"/>
+          </p:nvPr>
+        </p:nvSpPr>
+        <p:spPr/>
+        <p:txBody>
+          <a:bodyPr/>
+          <a:lstStyle/>
+          <a:p>
+            <a:endParaRPr lang="zh-TW" altLang="en-US"/>
+          </a:p>
+        </p:txBody>
+      </p:sp>
       <p:pic>
         <p:nvPicPr>
-          <p:cNvPr id="5" name="內容版面配置區 4">
+          <p:cNvPr id="8" name="圖片 7">
             <a:extLst>
               <a:ext uri="{FF2B5EF4-FFF2-40B4-BE49-F238E27FC236}">
-                <a16:creationId xmlns:a16="http://schemas.microsoft.com/office/drawing/2014/main" id="{CB723C57-109C-F818-2202-AE5399C88FDB}"/>
+                <a16:creationId xmlns:a16="http://schemas.microsoft.com/office/drawing/2014/main" id="{0C6AC618-2A58-AD70-F329-0C654B9DF597}"/>
               </a:ext>
             </a:extLst>
           </p:cNvPr>
           <p:cNvPicPr>
-            <a:picLocks noGrp="1" noChangeAspect="1"/>
+            <a:picLocks noChangeAspect="1"/>
           </p:cNvPicPr>
-          <p:nvPr>
-            <p:ph idx="1"/>
-          </p:nvPr>
+          <p:nvPr/>
         </p:nvPicPr>
         <p:blipFill>
           <a:blip r:embed="rId2"/>
@@ -14114,7 +14219,7 @@
         <p:spPr>
           <a:xfrm>
             <a:off x="1141413" y="618518"/>
-            <a:ext cx="9905998" cy="5566909"/>
+            <a:ext cx="9905998" cy="5601678"/>
           </a:xfrm>
           <a:prstGeom prst="rect">
             <a:avLst/>
@@ -14180,21 +14285,44 @@
           </a:p>
         </p:txBody>
       </p:sp>
+      <p:sp>
+        <p:nvSpPr>
+          <p:cNvPr id="7" name="內容版面配置區 6">
+            <a:extLst>
+              <a:ext uri="{FF2B5EF4-FFF2-40B4-BE49-F238E27FC236}">
+                <a16:creationId xmlns:a16="http://schemas.microsoft.com/office/drawing/2014/main" id="{D23F2302-F2DE-F7B0-6FA6-401BAD480B01}"/>
+              </a:ext>
+            </a:extLst>
+          </p:cNvPr>
+          <p:cNvSpPr>
+            <a:spLocks noGrp="1"/>
+          </p:cNvSpPr>
+          <p:nvPr>
+            <p:ph idx="1"/>
+          </p:nvPr>
+        </p:nvSpPr>
+        <p:spPr/>
+        <p:txBody>
+          <a:bodyPr/>
+          <a:lstStyle/>
+          <a:p>
+            <a:endParaRPr lang="zh-TW" altLang="en-US"/>
+          </a:p>
+        </p:txBody>
+      </p:sp>
       <p:pic>
         <p:nvPicPr>
-          <p:cNvPr id="5" name="內容版面配置區 4">
+          <p:cNvPr id="8" name="圖片 7">
             <a:extLst>
               <a:ext uri="{FF2B5EF4-FFF2-40B4-BE49-F238E27FC236}">
-                <a16:creationId xmlns:a16="http://schemas.microsoft.com/office/drawing/2014/main" id="{489509B0-74ED-9662-604B-A5A023FD8883}"/>
+                <a16:creationId xmlns:a16="http://schemas.microsoft.com/office/drawing/2014/main" id="{3DBD2F39-9BDC-DFD8-044E-B47BA7AB0690}"/>
               </a:ext>
             </a:extLst>
           </p:cNvPr>
           <p:cNvPicPr>
-            <a:picLocks noGrp="1" noChangeAspect="1"/>
+            <a:picLocks noChangeAspect="1"/>
           </p:cNvPicPr>
-          <p:nvPr>
-            <p:ph idx="1"/>
-          </p:nvPr>
+          <p:nvPr/>
         </p:nvPicPr>
         <p:blipFill>
           <a:blip r:embed="rId2"/>
@@ -14205,7 +14333,7 @@
         <p:spPr>
           <a:xfrm>
             <a:off x="1905309" y="1611420"/>
-            <a:ext cx="8378206" cy="4707084"/>
+            <a:ext cx="8378206" cy="4767260"/>
           </a:xfrm>
           <a:prstGeom prst="rect">
             <a:avLst/>

--- a/那些人較易結婚或離婚.pptx
+++ b/那些人較易結婚或離婚.pptx
@@ -175,7 +175,7 @@
           <a:noFill/>
           <a:extLst>
             <a:ext uri="{909E8E84-426E-40dd-AFC4-6F175D3DCCD1}">
-              <a14:hiddenFill xmlns="" xmlns:a14="http://schemas.microsoft.com/office/drawing/2010/main">
+              <a14:hiddenFill xmlns:a14="http://schemas.microsoft.com/office/drawing/2010/main" xmlns="">
                 <a:solidFill>
                   <a:srgbClr val="FFFFFF"/>
                 </a:solidFill>
@@ -235,7 +235,7 @@
             </a:ln>
             <a:extLst>
               <a:ext uri="{91240B29-F687-4f45-9708-019B960494DF}">
-                <a14:hiddenLine xmlns="" xmlns:a14="http://schemas.microsoft.com/office/drawing/2010/main" w="9525">
+                <a14:hiddenLine xmlns:a14="http://schemas.microsoft.com/office/drawing/2010/main" xmlns="" w="9525">
                   <a:solidFill>
                     <a:srgbClr val="000000"/>
                   </a:solidFill>
@@ -325,7 +325,7 @@
             </a:ln>
             <a:extLst>
               <a:ext uri="{91240B29-F687-4f45-9708-019B960494DF}">
-                <a14:hiddenLine xmlns="" xmlns:a14="http://schemas.microsoft.com/office/drawing/2010/main" w="9525">
+                <a14:hiddenLine xmlns:a14="http://schemas.microsoft.com/office/drawing/2010/main" xmlns="" w="9525">
                   <a:solidFill>
                     <a:srgbClr val="000000"/>
                   </a:solidFill>
@@ -415,7 +415,7 @@
             </a:ln>
             <a:extLst>
               <a:ext uri="{91240B29-F687-4f45-9708-019B960494DF}">
-                <a14:hiddenLine xmlns="" xmlns:a14="http://schemas.microsoft.com/office/drawing/2010/main" w="9525">
+                <a14:hiddenLine xmlns:a14="http://schemas.microsoft.com/office/drawing/2010/main" xmlns="" w="9525">
                   <a:solidFill>
                     <a:srgbClr val="000000"/>
                   </a:solidFill>
@@ -449,7 +449,7 @@
             </a:ln>
             <a:extLst>
               <a:ext uri="{91240B29-F687-4f45-9708-019B960494DF}">
-                <a14:hiddenLine xmlns="" xmlns:a14="http://schemas.microsoft.com/office/drawing/2010/main" w="9525">
+                <a14:hiddenLine xmlns:a14="http://schemas.microsoft.com/office/drawing/2010/main" xmlns="" w="9525">
                   <a:solidFill>
                     <a:srgbClr val="000000"/>
                   </a:solidFill>
@@ -539,7 +539,7 @@
             </a:ln>
             <a:extLst>
               <a:ext uri="{91240B29-F687-4f45-9708-019B960494DF}">
-                <a14:hiddenLine xmlns="" xmlns:a14="http://schemas.microsoft.com/office/drawing/2010/main" w="9525">
+                <a14:hiddenLine xmlns:a14="http://schemas.microsoft.com/office/drawing/2010/main" xmlns="" w="9525">
                   <a:solidFill>
                     <a:srgbClr val="000000"/>
                   </a:solidFill>
@@ -601,7 +601,7 @@
             </a:ln>
             <a:extLst>
               <a:ext uri="{91240B29-F687-4f45-9708-019B960494DF}">
-                <a14:hiddenLine xmlns="" xmlns:a14="http://schemas.microsoft.com/office/drawing/2010/main" w="9525">
+                <a14:hiddenLine xmlns:a14="http://schemas.microsoft.com/office/drawing/2010/main" xmlns="" w="9525">
                   <a:solidFill>
                     <a:srgbClr val="000000"/>
                   </a:solidFill>
@@ -663,7 +663,7 @@
             </a:ln>
             <a:extLst>
               <a:ext uri="{91240B29-F687-4f45-9708-019B960494DF}">
-                <a14:hiddenLine xmlns="" xmlns:a14="http://schemas.microsoft.com/office/drawing/2010/main" w="9525">
+                <a14:hiddenLine xmlns:a14="http://schemas.microsoft.com/office/drawing/2010/main" xmlns="" w="9525">
                   <a:solidFill>
                     <a:srgbClr val="000000"/>
                   </a:solidFill>
@@ -753,7 +753,7 @@
             </a:ln>
             <a:extLst>
               <a:ext uri="{91240B29-F687-4f45-9708-019B960494DF}">
-                <a14:hiddenLine xmlns="" xmlns:a14="http://schemas.microsoft.com/office/drawing/2010/main" w="9525">
+                <a14:hiddenLine xmlns:a14="http://schemas.microsoft.com/office/drawing/2010/main" xmlns="" w="9525">
                   <a:solidFill>
                     <a:srgbClr val="000000"/>
                   </a:solidFill>
@@ -815,7 +815,7 @@
             </a:ln>
             <a:extLst>
               <a:ext uri="{91240B29-F687-4f45-9708-019B960494DF}">
-                <a14:hiddenLine xmlns="" xmlns:a14="http://schemas.microsoft.com/office/drawing/2010/main" w="9525">
+                <a14:hiddenLine xmlns:a14="http://schemas.microsoft.com/office/drawing/2010/main" xmlns="" w="9525">
                   <a:solidFill>
                     <a:srgbClr val="000000"/>
                   </a:solidFill>
@@ -877,7 +877,7 @@
             </a:ln>
             <a:extLst>
               <a:ext uri="{91240B29-F687-4f45-9708-019B960494DF}">
-                <a14:hiddenLine xmlns="" xmlns:a14="http://schemas.microsoft.com/office/drawing/2010/main" w="9525">
+                <a14:hiddenLine xmlns:a14="http://schemas.microsoft.com/office/drawing/2010/main" xmlns="" w="9525">
                   <a:solidFill>
                     <a:srgbClr val="000000"/>
                   </a:solidFill>
@@ -967,7 +967,7 @@
             </a:ln>
             <a:extLst>
               <a:ext uri="{91240B29-F687-4f45-9708-019B960494DF}">
-                <a14:hiddenLine xmlns="" xmlns:a14="http://schemas.microsoft.com/office/drawing/2010/main" w="9525">
+                <a14:hiddenLine xmlns:a14="http://schemas.microsoft.com/office/drawing/2010/main" xmlns="" w="9525">
                   <a:solidFill>
                     <a:srgbClr val="000000"/>
                   </a:solidFill>
@@ -1057,7 +1057,7 @@
             </a:ln>
             <a:extLst>
               <a:ext uri="{91240B29-F687-4f45-9708-019B960494DF}">
-                <a14:hiddenLine xmlns="" xmlns:a14="http://schemas.microsoft.com/office/drawing/2010/main" w="9525">
+                <a14:hiddenLine xmlns:a14="http://schemas.microsoft.com/office/drawing/2010/main" xmlns="" w="9525">
                   <a:solidFill>
                     <a:srgbClr val="000000"/>
                   </a:solidFill>
@@ -1119,7 +1119,7 @@
             </a:ln>
             <a:extLst>
               <a:ext uri="{91240B29-F687-4f45-9708-019B960494DF}">
-                <a14:hiddenLine xmlns="" xmlns:a14="http://schemas.microsoft.com/office/drawing/2010/main" w="9525">
+                <a14:hiddenLine xmlns:a14="http://schemas.microsoft.com/office/drawing/2010/main" xmlns="" w="9525">
                   <a:solidFill>
                     <a:srgbClr val="000000"/>
                   </a:solidFill>
@@ -1229,7 +1229,7 @@
             </a:ln>
             <a:extLst>
               <a:ext uri="{91240B29-F687-4f45-9708-019B960494DF}">
-                <a14:hiddenLine xmlns="" xmlns:a14="http://schemas.microsoft.com/office/drawing/2010/main" w="9525">
+                <a14:hiddenLine xmlns:a14="http://schemas.microsoft.com/office/drawing/2010/main" xmlns="" w="9525">
                   <a:solidFill>
                     <a:srgbClr val="000000"/>
                   </a:solidFill>
@@ -1291,7 +1291,7 @@
             </a:ln>
             <a:extLst>
               <a:ext uri="{91240B29-F687-4f45-9708-019B960494DF}">
-                <a14:hiddenLine xmlns="" xmlns:a14="http://schemas.microsoft.com/office/drawing/2010/main" w="9525">
+                <a14:hiddenLine xmlns:a14="http://schemas.microsoft.com/office/drawing/2010/main" xmlns="" w="9525">
                   <a:solidFill>
                     <a:srgbClr val="000000"/>
                   </a:solidFill>
@@ -1381,7 +1381,7 @@
             </a:ln>
             <a:extLst>
               <a:ext uri="{91240B29-F687-4f45-9708-019B960494DF}">
-                <a14:hiddenLine xmlns="" xmlns:a14="http://schemas.microsoft.com/office/drawing/2010/main" w="9525">
+                <a14:hiddenLine xmlns:a14="http://schemas.microsoft.com/office/drawing/2010/main" xmlns="" w="9525">
                   <a:solidFill>
                     <a:srgbClr val="000000"/>
                   </a:solidFill>
@@ -1471,7 +1471,7 @@
             </a:ln>
             <a:extLst>
               <a:ext uri="{91240B29-F687-4f45-9708-019B960494DF}">
-                <a14:hiddenLine xmlns="" xmlns:a14="http://schemas.microsoft.com/office/drawing/2010/main" w="9525">
+                <a14:hiddenLine xmlns:a14="http://schemas.microsoft.com/office/drawing/2010/main" xmlns="" w="9525">
                   <a:solidFill>
                     <a:srgbClr val="000000"/>
                   </a:solidFill>
@@ -1533,7 +1533,7 @@
             </a:ln>
             <a:extLst>
               <a:ext uri="{91240B29-F687-4f45-9708-019B960494DF}">
-                <a14:hiddenLine xmlns="" xmlns:a14="http://schemas.microsoft.com/office/drawing/2010/main" w="9525">
+                <a14:hiddenLine xmlns:a14="http://schemas.microsoft.com/office/drawing/2010/main" xmlns="" w="9525">
                   <a:solidFill>
                     <a:srgbClr val="000000"/>
                   </a:solidFill>
@@ -1623,7 +1623,7 @@
             </a:ln>
             <a:extLst>
               <a:ext uri="{91240B29-F687-4f45-9708-019B960494DF}">
-                <a14:hiddenLine xmlns="" xmlns:a14="http://schemas.microsoft.com/office/drawing/2010/main" w="9525">
+                <a14:hiddenLine xmlns:a14="http://schemas.microsoft.com/office/drawing/2010/main" xmlns="" w="9525">
                   <a:solidFill>
                     <a:srgbClr val="000000"/>
                   </a:solidFill>
@@ -1713,7 +1713,7 @@
             </a:ln>
             <a:extLst>
               <a:ext uri="{91240B29-F687-4f45-9708-019B960494DF}">
-                <a14:hiddenLine xmlns="" xmlns:a14="http://schemas.microsoft.com/office/drawing/2010/main" w="9525">
+                <a14:hiddenLine xmlns:a14="http://schemas.microsoft.com/office/drawing/2010/main" xmlns="" w="9525">
                   <a:solidFill>
                     <a:srgbClr val="000000"/>
                   </a:solidFill>
@@ -1769,7 +1769,7 @@
             </a:ln>
             <a:extLst>
               <a:ext uri="{91240B29-F687-4f45-9708-019B960494DF}">
-                <a14:hiddenLine xmlns="" xmlns:a14="http://schemas.microsoft.com/office/drawing/2010/main" w="9525">
+                <a14:hiddenLine xmlns:a14="http://schemas.microsoft.com/office/drawing/2010/main" xmlns="" w="9525">
                   <a:solidFill>
                     <a:srgbClr val="000000"/>
                   </a:solidFill>
@@ -1859,7 +1859,7 @@
             </a:ln>
             <a:extLst>
               <a:ext uri="{91240B29-F687-4f45-9708-019B960494DF}">
-                <a14:hiddenLine xmlns="" xmlns:a14="http://schemas.microsoft.com/office/drawing/2010/main" w="9525">
+                <a14:hiddenLine xmlns:a14="http://schemas.microsoft.com/office/drawing/2010/main" xmlns="" w="9525">
                   <a:solidFill>
                     <a:srgbClr val="000000"/>
                   </a:solidFill>
@@ -1915,7 +1915,7 @@
             </a:ln>
             <a:extLst>
               <a:ext uri="{91240B29-F687-4f45-9708-019B960494DF}">
-                <a14:hiddenLine xmlns="" xmlns:a14="http://schemas.microsoft.com/office/drawing/2010/main" w="9525">
+                <a14:hiddenLine xmlns:a14="http://schemas.microsoft.com/office/drawing/2010/main" xmlns="" w="9525">
                   <a:solidFill>
                     <a:srgbClr val="000000"/>
                   </a:solidFill>
@@ -2005,7 +2005,7 @@
             </a:ln>
             <a:extLst>
               <a:ext uri="{91240B29-F687-4f45-9708-019B960494DF}">
-                <a14:hiddenLine xmlns="" xmlns:a14="http://schemas.microsoft.com/office/drawing/2010/main" w="9525">
+                <a14:hiddenLine xmlns:a14="http://schemas.microsoft.com/office/drawing/2010/main" xmlns="" w="9525">
                   <a:solidFill>
                     <a:srgbClr val="000000"/>
                   </a:solidFill>
@@ -2073,7 +2073,7 @@
             </a:ln>
             <a:extLst>
               <a:ext uri="{91240B29-F687-4f45-9708-019B960494DF}">
-                <a14:hiddenLine xmlns="" xmlns:a14="http://schemas.microsoft.com/office/drawing/2010/main" w="9525">
+                <a14:hiddenLine xmlns:a14="http://schemas.microsoft.com/office/drawing/2010/main" xmlns="" w="9525">
                   <a:solidFill>
                     <a:srgbClr val="000000"/>
                   </a:solidFill>
@@ -2163,7 +2163,7 @@
             </a:ln>
             <a:extLst>
               <a:ext uri="{91240B29-F687-4f45-9708-019B960494DF}">
-                <a14:hiddenLine xmlns="" xmlns:a14="http://schemas.microsoft.com/office/drawing/2010/main" w="9525">
+                <a14:hiddenLine xmlns:a14="http://schemas.microsoft.com/office/drawing/2010/main" xmlns="" w="9525">
                   <a:solidFill>
                     <a:srgbClr val="000000"/>
                   </a:solidFill>
@@ -2231,7 +2231,7 @@
             </a:ln>
             <a:extLst>
               <a:ext uri="{91240B29-F687-4f45-9708-019B960494DF}">
-                <a14:hiddenLine xmlns="" xmlns:a14="http://schemas.microsoft.com/office/drawing/2010/main" w="9525">
+                <a14:hiddenLine xmlns:a14="http://schemas.microsoft.com/office/drawing/2010/main" xmlns="" w="9525">
                   <a:solidFill>
                     <a:srgbClr val="000000"/>
                   </a:solidFill>
@@ -2321,7 +2321,7 @@
             </a:ln>
             <a:extLst>
               <a:ext uri="{91240B29-F687-4f45-9708-019B960494DF}">
-                <a14:hiddenLine xmlns="" xmlns:a14="http://schemas.microsoft.com/office/drawing/2010/main" w="9525">
+                <a14:hiddenLine xmlns:a14="http://schemas.microsoft.com/office/drawing/2010/main" xmlns="" w="9525">
                   <a:solidFill>
                     <a:srgbClr val="000000"/>
                   </a:solidFill>
@@ -2355,7 +2355,7 @@
             </a:ln>
             <a:extLst>
               <a:ext uri="{91240B29-F687-4f45-9708-019B960494DF}">
-                <a14:hiddenLine xmlns="" xmlns:a14="http://schemas.microsoft.com/office/drawing/2010/main" w="9525">
+                <a14:hiddenLine xmlns:a14="http://schemas.microsoft.com/office/drawing/2010/main" xmlns="" w="9525">
                   <a:solidFill>
                     <a:srgbClr val="000000"/>
                   </a:solidFill>
@@ -2445,7 +2445,7 @@
             </a:ln>
             <a:extLst>
               <a:ext uri="{91240B29-F687-4f45-9708-019B960494DF}">
-                <a14:hiddenLine xmlns="" xmlns:a14="http://schemas.microsoft.com/office/drawing/2010/main" w="9525">
+                <a14:hiddenLine xmlns:a14="http://schemas.microsoft.com/office/drawing/2010/main" xmlns="" w="9525">
                   <a:solidFill>
                     <a:srgbClr val="000000"/>
                   </a:solidFill>
@@ -2507,7 +2507,7 @@
             </a:ln>
             <a:extLst>
               <a:ext uri="{91240B29-F687-4f45-9708-019B960494DF}">
-                <a14:hiddenLine xmlns="" xmlns:a14="http://schemas.microsoft.com/office/drawing/2010/main" w="9525">
+                <a14:hiddenLine xmlns:a14="http://schemas.microsoft.com/office/drawing/2010/main" xmlns="" w="9525">
                   <a:solidFill>
                     <a:srgbClr val="000000"/>
                   </a:solidFill>
@@ -2569,7 +2569,7 @@
             </a:ln>
             <a:extLst>
               <a:ext uri="{91240B29-F687-4f45-9708-019B960494DF}">
-                <a14:hiddenLine xmlns="" xmlns:a14="http://schemas.microsoft.com/office/drawing/2010/main" w="9525">
+                <a14:hiddenLine xmlns:a14="http://schemas.microsoft.com/office/drawing/2010/main" xmlns="" w="9525">
                   <a:solidFill>
                     <a:srgbClr val="000000"/>
                   </a:solidFill>
@@ -2659,7 +2659,7 @@
             </a:ln>
             <a:extLst>
               <a:ext uri="{91240B29-F687-4f45-9708-019B960494DF}">
-                <a14:hiddenLine xmlns="" xmlns:a14="http://schemas.microsoft.com/office/drawing/2010/main" w="9525">
+                <a14:hiddenLine xmlns:a14="http://schemas.microsoft.com/office/drawing/2010/main" xmlns="" w="9525">
                   <a:solidFill>
                     <a:srgbClr val="000000"/>
                   </a:solidFill>
@@ -2727,7 +2727,7 @@
             </a:ln>
             <a:extLst>
               <a:ext uri="{91240B29-F687-4f45-9708-019B960494DF}">
-                <a14:hiddenLine xmlns="" xmlns:a14="http://schemas.microsoft.com/office/drawing/2010/main" w="9525">
+                <a14:hiddenLine xmlns:a14="http://schemas.microsoft.com/office/drawing/2010/main" xmlns="" w="9525">
                   <a:solidFill>
                     <a:srgbClr val="000000"/>
                   </a:solidFill>
@@ -2789,7 +2789,7 @@
             </a:ln>
             <a:extLst>
               <a:ext uri="{91240B29-F687-4f45-9708-019B960494DF}">
-                <a14:hiddenLine xmlns="" xmlns:a14="http://schemas.microsoft.com/office/drawing/2010/main" w="9525">
+                <a14:hiddenLine xmlns:a14="http://schemas.microsoft.com/office/drawing/2010/main" xmlns="" w="9525">
                   <a:solidFill>
                     <a:srgbClr val="000000"/>
                   </a:solidFill>
@@ -2879,7 +2879,7 @@
             </a:ln>
             <a:extLst>
               <a:ext uri="{91240B29-F687-4f45-9708-019B960494DF}">
-                <a14:hiddenLine xmlns="" xmlns:a14="http://schemas.microsoft.com/office/drawing/2010/main" w="9525">
+                <a14:hiddenLine xmlns:a14="http://schemas.microsoft.com/office/drawing/2010/main" xmlns="" w="9525">
                   <a:solidFill>
                     <a:srgbClr val="000000"/>
                   </a:solidFill>
@@ -2941,7 +2941,7 @@
             </a:ln>
             <a:extLst>
               <a:ext uri="{91240B29-F687-4f45-9708-019B960494DF}">
-                <a14:hiddenLine xmlns="" xmlns:a14="http://schemas.microsoft.com/office/drawing/2010/main" w="9525">
+                <a14:hiddenLine xmlns:a14="http://schemas.microsoft.com/office/drawing/2010/main" xmlns="" w="9525">
                   <a:solidFill>
                     <a:srgbClr val="000000"/>
                   </a:solidFill>
@@ -3031,7 +3031,7 @@
             </a:ln>
             <a:extLst>
               <a:ext uri="{91240B29-F687-4f45-9708-019B960494DF}">
-                <a14:hiddenLine xmlns="" xmlns:a14="http://schemas.microsoft.com/office/drawing/2010/main" w="9525">
+                <a14:hiddenLine xmlns:a14="http://schemas.microsoft.com/office/drawing/2010/main" xmlns="" w="9525">
                   <a:solidFill>
                     <a:srgbClr val="000000"/>
                   </a:solidFill>
@@ -3093,7 +3093,7 @@
             </a:ln>
             <a:extLst>
               <a:ext uri="{91240B29-F687-4f45-9708-019B960494DF}">
-                <a14:hiddenLine xmlns="" xmlns:a14="http://schemas.microsoft.com/office/drawing/2010/main" w="9525">
+                <a14:hiddenLine xmlns:a14="http://schemas.microsoft.com/office/drawing/2010/main" xmlns="" w="9525">
                   <a:solidFill>
                     <a:srgbClr val="000000"/>
                   </a:solidFill>
@@ -3183,7 +3183,7 @@
             </a:ln>
             <a:extLst>
               <a:ext uri="{91240B29-F687-4f45-9708-019B960494DF}">
-                <a14:hiddenLine xmlns="" xmlns:a14="http://schemas.microsoft.com/office/drawing/2010/main" w="9525">
+                <a14:hiddenLine xmlns:a14="http://schemas.microsoft.com/office/drawing/2010/main" xmlns="" w="9525">
                   <a:solidFill>
                     <a:srgbClr val="000000"/>
                   </a:solidFill>
@@ -3217,7 +3217,7 @@
             </a:ln>
             <a:extLst>
               <a:ext uri="{91240B29-F687-4f45-9708-019B960494DF}">
-                <a14:hiddenLine xmlns="" xmlns:a14="http://schemas.microsoft.com/office/drawing/2010/main" w="9525">
+                <a14:hiddenLine xmlns:a14="http://schemas.microsoft.com/office/drawing/2010/main" xmlns="" w="9525">
                   <a:solidFill>
                     <a:srgbClr val="000000"/>
                   </a:solidFill>
@@ -3282,7 +3282,7 @@
             </a:ln>
             <a:extLst>
               <a:ext uri="{91240B29-F687-4f45-9708-019B960494DF}">
-                <a14:hiddenLine xmlns="" xmlns:a14="http://schemas.microsoft.com/office/drawing/2010/main" w="9525">
+                <a14:hiddenLine xmlns:a14="http://schemas.microsoft.com/office/drawing/2010/main" xmlns="" w="9525">
                   <a:solidFill>
                     <a:srgbClr val="000000"/>
                   </a:solidFill>
@@ -3372,7 +3372,7 @@
             </a:ln>
             <a:extLst>
               <a:ext uri="{91240B29-F687-4f45-9708-019B960494DF}">
-                <a14:hiddenLine xmlns="" xmlns:a14="http://schemas.microsoft.com/office/drawing/2010/main" w="9525">
+                <a14:hiddenLine xmlns:a14="http://schemas.microsoft.com/office/drawing/2010/main" xmlns="" w="9525">
                   <a:solidFill>
                     <a:srgbClr val="000000"/>
                   </a:solidFill>
@@ -3434,7 +3434,7 @@
             </a:ln>
             <a:extLst>
               <a:ext uri="{91240B29-F687-4f45-9708-019B960494DF}">
-                <a14:hiddenLine xmlns="" xmlns:a14="http://schemas.microsoft.com/office/drawing/2010/main" w="9525">
+                <a14:hiddenLine xmlns:a14="http://schemas.microsoft.com/office/drawing/2010/main" xmlns="" w="9525">
                   <a:solidFill>
                     <a:srgbClr val="000000"/>
                   </a:solidFill>
@@ -3524,7 +3524,7 @@
             </a:ln>
             <a:extLst>
               <a:ext uri="{91240B29-F687-4f45-9708-019B960494DF}">
-                <a14:hiddenLine xmlns="" xmlns:a14="http://schemas.microsoft.com/office/drawing/2010/main" w="9525">
+                <a14:hiddenLine xmlns:a14="http://schemas.microsoft.com/office/drawing/2010/main" xmlns="" w="9525">
                   <a:solidFill>
                     <a:srgbClr val="000000"/>
                   </a:solidFill>
@@ -3614,7 +3614,7 @@
             </a:ln>
             <a:extLst>
               <a:ext uri="{91240B29-F687-4f45-9708-019B960494DF}">
-                <a14:hiddenLine xmlns="" xmlns:a14="http://schemas.microsoft.com/office/drawing/2010/main" w="9525">
+                <a14:hiddenLine xmlns:a14="http://schemas.microsoft.com/office/drawing/2010/main" xmlns="" w="9525">
                   <a:solidFill>
                     <a:srgbClr val="000000"/>
                   </a:solidFill>
@@ -3679,7 +3679,7 @@
             </a:ln>
             <a:extLst>
               <a:ext uri="{91240B29-F687-4f45-9708-019B960494DF}">
-                <a14:hiddenLine xmlns="" xmlns:a14="http://schemas.microsoft.com/office/drawing/2010/main" w="9525">
+                <a14:hiddenLine xmlns:a14="http://schemas.microsoft.com/office/drawing/2010/main" xmlns="" w="9525">
                   <a:solidFill>
                     <a:srgbClr val="000000"/>
                   </a:solidFill>
@@ -3741,7 +3741,7 @@
             </a:ln>
             <a:extLst>
               <a:ext uri="{91240B29-F687-4f45-9708-019B960494DF}">
-                <a14:hiddenLine xmlns="" xmlns:a14="http://schemas.microsoft.com/office/drawing/2010/main" w="9525">
+                <a14:hiddenLine xmlns:a14="http://schemas.microsoft.com/office/drawing/2010/main" xmlns="" w="9525">
                   <a:solidFill>
                     <a:srgbClr val="000000"/>
                   </a:solidFill>
@@ -3831,7 +3831,7 @@
             </a:ln>
             <a:extLst>
               <a:ext uri="{91240B29-F687-4f45-9708-019B960494DF}">
-                <a14:hiddenLine xmlns="" xmlns:a14="http://schemas.microsoft.com/office/drawing/2010/main" w="9525">
+                <a14:hiddenLine xmlns:a14="http://schemas.microsoft.com/office/drawing/2010/main" xmlns="" w="9525">
                   <a:solidFill>
                     <a:srgbClr val="000000"/>
                   </a:solidFill>
@@ -3921,7 +3921,7 @@
             </a:ln>
             <a:extLst>
               <a:ext uri="{91240B29-F687-4f45-9708-019B960494DF}">
-                <a14:hiddenLine xmlns="" xmlns:a14="http://schemas.microsoft.com/office/drawing/2010/main" w="9525">
+                <a14:hiddenLine xmlns:a14="http://schemas.microsoft.com/office/drawing/2010/main" xmlns="" w="9525">
                   <a:solidFill>
                     <a:srgbClr val="000000"/>
                   </a:solidFill>
@@ -3983,7 +3983,7 @@
             </a:ln>
             <a:extLst>
               <a:ext uri="{91240B29-F687-4f45-9708-019B960494DF}">
-                <a14:hiddenLine xmlns="" xmlns:a14="http://schemas.microsoft.com/office/drawing/2010/main" w="9525">
+                <a14:hiddenLine xmlns:a14="http://schemas.microsoft.com/office/drawing/2010/main" xmlns="" w="9525">
                   <a:solidFill>
                     <a:srgbClr val="000000"/>
                   </a:solidFill>
@@ -4103,7 +4103,7 @@
             </a:ln>
             <a:extLst>
               <a:ext uri="{91240B29-F687-4f45-9708-019B960494DF}">
-                <a14:hiddenLine xmlns="" xmlns:a14="http://schemas.microsoft.com/office/drawing/2010/main" w="9525">
+                <a14:hiddenLine xmlns:a14="http://schemas.microsoft.com/office/drawing/2010/main" xmlns="" w="9525">
                   <a:solidFill>
                     <a:srgbClr val="000000"/>
                   </a:solidFill>
@@ -4171,7 +4171,7 @@
             </a:ln>
             <a:extLst>
               <a:ext uri="{91240B29-F687-4f45-9708-019B960494DF}">
-                <a14:hiddenLine xmlns="" xmlns:a14="http://schemas.microsoft.com/office/drawing/2010/main" w="9525">
+                <a14:hiddenLine xmlns:a14="http://schemas.microsoft.com/office/drawing/2010/main" xmlns="" w="9525">
                   <a:solidFill>
                     <a:srgbClr val="000000"/>
                   </a:solidFill>
@@ -4261,7 +4261,7 @@
             </a:ln>
             <a:extLst>
               <a:ext uri="{91240B29-F687-4f45-9708-019B960494DF}">
-                <a14:hiddenLine xmlns="" xmlns:a14="http://schemas.microsoft.com/office/drawing/2010/main" w="9525">
+                <a14:hiddenLine xmlns:a14="http://schemas.microsoft.com/office/drawing/2010/main" xmlns="" w="9525">
                   <a:solidFill>
                     <a:srgbClr val="000000"/>
                   </a:solidFill>
@@ -4401,7 +4401,7 @@
           <a:p>
             <a:fld id="{48A87A34-81AB-432B-8DAE-1953F412C126}" type="datetimeFigureOut">
               <a:rPr lang="en-US" dirty="0"/>
-              <a:t>4/7/2026</a:t>
+              <a:t>4/13/2026</a:t>
             </a:fld>
             <a:endParaRPr lang="en-US" dirty="0"/>
           </a:p>
@@ -4663,7 +4663,7 @@
           <a:p>
             <a:fld id="{48A87A34-81AB-432B-8DAE-1953F412C126}" type="datetimeFigureOut">
               <a:rPr lang="en-US" dirty="0"/>
-              <a:t>4/7/2026</a:t>
+              <a:t>4/13/2026</a:t>
             </a:fld>
             <a:endParaRPr lang="en-US" dirty="0"/>
           </a:p>
@@ -4854,7 +4854,7 @@
           <a:p>
             <a:fld id="{48A87A34-81AB-432B-8DAE-1953F412C126}" type="datetimeFigureOut">
               <a:rPr lang="en-US" dirty="0"/>
-              <a:t>4/7/2026</a:t>
+              <a:t>4/13/2026</a:t>
             </a:fld>
             <a:endParaRPr lang="en-US" dirty="0"/>
           </a:p>
@@ -5112,7 +5112,7 @@
           <a:p>
             <a:fld id="{48A87A34-81AB-432B-8DAE-1953F412C126}" type="datetimeFigureOut">
               <a:rPr lang="en-US" dirty="0"/>
-              <a:t>4/7/2026</a:t>
+              <a:t>4/13/2026</a:t>
             </a:fld>
             <a:endParaRPr lang="en-US" dirty="0"/>
           </a:p>
@@ -5541,7 +5541,7 @@
           <a:p>
             <a:fld id="{48A87A34-81AB-432B-8DAE-1953F412C126}" type="datetimeFigureOut">
               <a:rPr lang="en-US" dirty="0"/>
-              <a:t>4/7/2026</a:t>
+              <a:t>4/13/2026</a:t>
             </a:fld>
             <a:endParaRPr lang="en-US" dirty="0"/>
           </a:p>
@@ -6082,7 +6082,7 @@
           <a:p>
             <a:fld id="{48A87A34-81AB-432B-8DAE-1953F412C126}" type="datetimeFigureOut">
               <a:rPr lang="en-US" dirty="0"/>
-              <a:t>4/7/2026</a:t>
+              <a:t>4/13/2026</a:t>
             </a:fld>
             <a:endParaRPr lang="en-US" dirty="0"/>
           </a:p>
@@ -6797,7 +6797,7 @@
           <a:p>
             <a:fld id="{48A87A34-81AB-432B-8DAE-1953F412C126}" type="datetimeFigureOut">
               <a:rPr lang="en-US" dirty="0"/>
-              <a:t>4/7/2026</a:t>
+              <a:t>4/13/2026</a:t>
             </a:fld>
             <a:endParaRPr lang="en-US" dirty="0"/>
           </a:p>
@@ -6962,7 +6962,7 @@
           <a:p>
             <a:fld id="{48A87A34-81AB-432B-8DAE-1953F412C126}" type="datetimeFigureOut">
               <a:rPr lang="en-US" dirty="0"/>
-              <a:t>4/7/2026</a:t>
+              <a:t>4/13/2026</a:t>
             </a:fld>
             <a:endParaRPr lang="en-US" dirty="0"/>
           </a:p>
@@ -7137,7 +7137,7 @@
           <a:p>
             <a:fld id="{48A87A34-81AB-432B-8DAE-1953F412C126}" type="datetimeFigureOut">
               <a:rPr lang="en-US" dirty="0"/>
-              <a:t>4/7/2026</a:t>
+              <a:t>4/13/2026</a:t>
             </a:fld>
             <a:endParaRPr lang="en-US" dirty="0"/>
           </a:p>
@@ -7302,7 +7302,7 @@
           <a:p>
             <a:fld id="{48A87A34-81AB-432B-8DAE-1953F412C126}" type="datetimeFigureOut">
               <a:rPr lang="en-US" dirty="0"/>
-              <a:t>4/7/2026</a:t>
+              <a:t>4/13/2026</a:t>
             </a:fld>
             <a:endParaRPr lang="en-US" dirty="0"/>
           </a:p>
@@ -7547,7 +7547,7 @@
           <a:p>
             <a:fld id="{48A87A34-81AB-432B-8DAE-1953F412C126}" type="datetimeFigureOut">
               <a:rPr lang="en-US" dirty="0"/>
-              <a:t>4/7/2026</a:t>
+              <a:t>4/13/2026</a:t>
             </a:fld>
             <a:endParaRPr lang="en-US" dirty="0"/>
           </a:p>
@@ -7774,7 +7774,7 @@
           <a:p>
             <a:fld id="{48A87A34-81AB-432B-8DAE-1953F412C126}" type="datetimeFigureOut">
               <a:rPr lang="en-US" dirty="0"/>
-              <a:t>4/7/2026</a:t>
+              <a:t>4/13/2026</a:t>
             </a:fld>
             <a:endParaRPr lang="en-US" dirty="0"/>
           </a:p>
@@ -8150,7 +8150,7 @@
           <a:p>
             <a:fld id="{48A87A34-81AB-432B-8DAE-1953F412C126}" type="datetimeFigureOut">
               <a:rPr lang="en-US" dirty="0"/>
-              <a:t>4/7/2026</a:t>
+              <a:t>4/13/2026</a:t>
             </a:fld>
             <a:endParaRPr lang="en-US" dirty="0"/>
           </a:p>
@@ -8263,7 +8263,7 @@
           <a:p>
             <a:fld id="{48A87A34-81AB-432B-8DAE-1953F412C126}" type="datetimeFigureOut">
               <a:rPr lang="en-US" dirty="0"/>
-              <a:t>4/7/2026</a:t>
+              <a:t>4/13/2026</a:t>
             </a:fld>
             <a:endParaRPr lang="en-US" dirty="0"/>
           </a:p>
@@ -8353,7 +8353,7 @@
           <a:p>
             <a:fld id="{48A87A34-81AB-432B-8DAE-1953F412C126}" type="datetimeFigureOut">
               <a:rPr lang="en-US" dirty="0"/>
-              <a:t>4/7/2026</a:t>
+              <a:t>4/13/2026</a:t>
             </a:fld>
             <a:endParaRPr lang="en-US" dirty="0"/>
           </a:p>
@@ -8597,7 +8597,7 @@
           <a:p>
             <a:fld id="{48A87A34-81AB-432B-8DAE-1953F412C126}" type="datetimeFigureOut">
               <a:rPr lang="en-US" dirty="0"/>
-              <a:t>4/7/2026</a:t>
+              <a:t>4/13/2026</a:t>
             </a:fld>
             <a:endParaRPr lang="en-US" dirty="0"/>
           </a:p>
@@ -8872,7 +8872,7 @@
           <a:p>
             <a:fld id="{48A87A34-81AB-432B-8DAE-1953F412C126}" type="datetimeFigureOut">
               <a:rPr lang="en-US" dirty="0"/>
-              <a:t>4/7/2026</a:t>
+              <a:t>4/13/2026</a:t>
             </a:fld>
             <a:endParaRPr lang="en-US" dirty="0"/>
           </a:p>
@@ -8983,7 +8983,7 @@
           <a:noFill/>
           <a:extLst>
             <a:ext uri="{909E8E84-426E-40dd-AFC4-6F175D3DCCD1}">
-              <a14:hiddenFill xmlns="" xmlns:a14="http://schemas.microsoft.com/office/drawing/2010/main">
+              <a14:hiddenFill xmlns:a14="http://schemas.microsoft.com/office/drawing/2010/main" xmlns="">
                 <a:solidFill>
                   <a:srgbClr val="FFFFFF"/>
                 </a:solidFill>
@@ -9057,7 +9057,7 @@
               </a:ln>
               <a:extLst>
                 <a:ext uri="{91240B29-F687-4f45-9708-019B960494DF}">
-                  <a14:hiddenLine xmlns="" xmlns:a14="http://schemas.microsoft.com/office/drawing/2010/main" w="9525">
+                  <a14:hiddenLine xmlns:a14="http://schemas.microsoft.com/office/drawing/2010/main" xmlns="" w="9525">
                     <a:solidFill>
                       <a:srgbClr val="000000"/>
                     </a:solidFill>
@@ -9147,7 +9147,7 @@
               </a:ln>
               <a:extLst>
                 <a:ext uri="{91240B29-F687-4f45-9708-019B960494DF}">
-                  <a14:hiddenLine xmlns="" xmlns:a14="http://schemas.microsoft.com/office/drawing/2010/main" w="9525">
+                  <a14:hiddenLine xmlns:a14="http://schemas.microsoft.com/office/drawing/2010/main" xmlns="" w="9525">
                     <a:solidFill>
                       <a:srgbClr val="000000"/>
                     </a:solidFill>
@@ -9237,7 +9237,7 @@
               </a:ln>
               <a:extLst>
                 <a:ext uri="{91240B29-F687-4f45-9708-019B960494DF}">
-                  <a14:hiddenLine xmlns="" xmlns:a14="http://schemas.microsoft.com/office/drawing/2010/main" w="9525">
+                  <a14:hiddenLine xmlns:a14="http://schemas.microsoft.com/office/drawing/2010/main" xmlns="" w="9525">
                     <a:solidFill>
                       <a:srgbClr val="000000"/>
                     </a:solidFill>
@@ -9299,7 +9299,7 @@
               </a:ln>
               <a:extLst>
                 <a:ext uri="{91240B29-F687-4f45-9708-019B960494DF}">
-                  <a14:hiddenLine xmlns="" xmlns:a14="http://schemas.microsoft.com/office/drawing/2010/main" w="9525">
+                  <a14:hiddenLine xmlns:a14="http://schemas.microsoft.com/office/drawing/2010/main" xmlns="" w="9525">
                     <a:solidFill>
                       <a:srgbClr val="000000"/>
                     </a:solidFill>
@@ -9389,7 +9389,7 @@
               </a:ln>
               <a:extLst>
                 <a:ext uri="{91240B29-F687-4f45-9708-019B960494DF}">
-                  <a14:hiddenLine xmlns="" xmlns:a14="http://schemas.microsoft.com/office/drawing/2010/main" w="9525">
+                  <a14:hiddenLine xmlns:a14="http://schemas.microsoft.com/office/drawing/2010/main" xmlns="" w="9525">
                     <a:solidFill>
                       <a:srgbClr val="000000"/>
                     </a:solidFill>
@@ -9451,7 +9451,7 @@
               </a:ln>
               <a:extLst>
                 <a:ext uri="{91240B29-F687-4f45-9708-019B960494DF}">
-                  <a14:hiddenLine xmlns="" xmlns:a14="http://schemas.microsoft.com/office/drawing/2010/main" w="9525">
+                  <a14:hiddenLine xmlns:a14="http://schemas.microsoft.com/office/drawing/2010/main" xmlns="" w="9525">
                     <a:solidFill>
                       <a:srgbClr val="000000"/>
                     </a:solidFill>
@@ -9513,7 +9513,7 @@
               </a:ln>
               <a:extLst>
                 <a:ext uri="{91240B29-F687-4f45-9708-019B960494DF}">
-                  <a14:hiddenLine xmlns="" xmlns:a14="http://schemas.microsoft.com/office/drawing/2010/main" w="9525">
+                  <a14:hiddenLine xmlns:a14="http://schemas.microsoft.com/office/drawing/2010/main" xmlns="" w="9525">
                     <a:solidFill>
                       <a:srgbClr val="000000"/>
                     </a:solidFill>
@@ -9603,7 +9603,7 @@
               </a:ln>
               <a:extLst>
                 <a:ext uri="{91240B29-F687-4f45-9708-019B960494DF}">
-                  <a14:hiddenLine xmlns="" xmlns:a14="http://schemas.microsoft.com/office/drawing/2010/main" w="9525">
+                  <a14:hiddenLine xmlns:a14="http://schemas.microsoft.com/office/drawing/2010/main" xmlns="" w="9525">
                     <a:solidFill>
                       <a:srgbClr val="000000"/>
                     </a:solidFill>
@@ -9693,7 +9693,7 @@
               </a:ln>
               <a:extLst>
                 <a:ext uri="{91240B29-F687-4f45-9708-019B960494DF}">
-                  <a14:hiddenLine xmlns="" xmlns:a14="http://schemas.microsoft.com/office/drawing/2010/main" w="9525">
+                  <a14:hiddenLine xmlns:a14="http://schemas.microsoft.com/office/drawing/2010/main" xmlns="" w="9525">
                     <a:solidFill>
                       <a:srgbClr val="000000"/>
                     </a:solidFill>
@@ -9755,7 +9755,7 @@
               </a:ln>
               <a:extLst>
                 <a:ext uri="{91240B29-F687-4f45-9708-019B960494DF}">
-                  <a14:hiddenLine xmlns="" xmlns:a14="http://schemas.microsoft.com/office/drawing/2010/main" w="9525">
+                  <a14:hiddenLine xmlns:a14="http://schemas.microsoft.com/office/drawing/2010/main" xmlns="" w="9525">
                     <a:solidFill>
                       <a:srgbClr val="000000"/>
                     </a:solidFill>
@@ -9865,7 +9865,7 @@
               </a:ln>
               <a:extLst>
                 <a:ext uri="{91240B29-F687-4f45-9708-019B960494DF}">
-                  <a14:hiddenLine xmlns="" xmlns:a14="http://schemas.microsoft.com/office/drawing/2010/main" w="9525">
+                  <a14:hiddenLine xmlns:a14="http://schemas.microsoft.com/office/drawing/2010/main" xmlns="" w="9525">
                     <a:solidFill>
                       <a:srgbClr val="000000"/>
                     </a:solidFill>
@@ -9949,7 +9949,7 @@
               </a:ln>
               <a:extLst>
                 <a:ext uri="{91240B29-F687-4f45-9708-019B960494DF}">
-                  <a14:hiddenLine xmlns="" xmlns:a14="http://schemas.microsoft.com/office/drawing/2010/main" w="9525">
+                  <a14:hiddenLine xmlns:a14="http://schemas.microsoft.com/office/drawing/2010/main" xmlns="" w="9525">
                     <a:solidFill>
                       <a:srgbClr val="000000"/>
                     </a:solidFill>
@@ -10011,7 +10011,7 @@
               </a:ln>
               <a:extLst>
                 <a:ext uri="{91240B29-F687-4f45-9708-019B960494DF}">
-                  <a14:hiddenLine xmlns="" xmlns:a14="http://schemas.microsoft.com/office/drawing/2010/main" w="9525">
+                  <a14:hiddenLine xmlns:a14="http://schemas.microsoft.com/office/drawing/2010/main" xmlns="" w="9525">
                     <a:solidFill>
                       <a:srgbClr val="000000"/>
                     </a:solidFill>
@@ -10073,7 +10073,7 @@
               </a:ln>
               <a:extLst>
                 <a:ext uri="{91240B29-F687-4f45-9708-019B960494DF}">
-                  <a14:hiddenLine xmlns="" xmlns:a14="http://schemas.microsoft.com/office/drawing/2010/main" w="9525">
+                  <a14:hiddenLine xmlns:a14="http://schemas.microsoft.com/office/drawing/2010/main" xmlns="" w="9525">
                     <a:solidFill>
                       <a:srgbClr val="000000"/>
                     </a:solidFill>
@@ -10163,7 +10163,7 @@
               </a:ln>
               <a:extLst>
                 <a:ext uri="{91240B29-F687-4f45-9708-019B960494DF}">
-                  <a14:hiddenLine xmlns="" xmlns:a14="http://schemas.microsoft.com/office/drawing/2010/main" w="9525">
+                  <a14:hiddenLine xmlns:a14="http://schemas.microsoft.com/office/drawing/2010/main" xmlns="" w="9525">
                     <a:solidFill>
                       <a:srgbClr val="000000"/>
                     </a:solidFill>
@@ -10197,7 +10197,7 @@
               </a:ln>
               <a:extLst>
                 <a:ext uri="{91240B29-F687-4f45-9708-019B960494DF}">
-                  <a14:hiddenLine xmlns="" xmlns:a14="http://schemas.microsoft.com/office/drawing/2010/main" w="9525">
+                  <a14:hiddenLine xmlns:a14="http://schemas.microsoft.com/office/drawing/2010/main" xmlns="" w="9525">
                     <a:solidFill>
                       <a:srgbClr val="000000"/>
                     </a:solidFill>
@@ -10262,7 +10262,7 @@
               </a:ln>
               <a:extLst>
                 <a:ext uri="{91240B29-F687-4f45-9708-019B960494DF}">
-                  <a14:hiddenLine xmlns="" xmlns:a14="http://schemas.microsoft.com/office/drawing/2010/main" w="9525">
+                  <a14:hiddenLine xmlns:a14="http://schemas.microsoft.com/office/drawing/2010/main" xmlns="" w="9525">
                     <a:solidFill>
                       <a:srgbClr val="000000"/>
                     </a:solidFill>
@@ -10352,7 +10352,7 @@
               </a:ln>
               <a:extLst>
                 <a:ext uri="{91240B29-F687-4f45-9708-019B960494DF}">
-                  <a14:hiddenLine xmlns="" xmlns:a14="http://schemas.microsoft.com/office/drawing/2010/main" w="9525">
+                  <a14:hiddenLine xmlns:a14="http://schemas.microsoft.com/office/drawing/2010/main" xmlns="" w="9525">
                     <a:solidFill>
                       <a:srgbClr val="000000"/>
                     </a:solidFill>
@@ -10414,7 +10414,7 @@
               </a:ln>
               <a:extLst>
                 <a:ext uri="{91240B29-F687-4f45-9708-019B960494DF}">
-                  <a14:hiddenLine xmlns="" xmlns:a14="http://schemas.microsoft.com/office/drawing/2010/main" w="9525">
+                  <a14:hiddenLine xmlns:a14="http://schemas.microsoft.com/office/drawing/2010/main" xmlns="" w="9525">
                     <a:solidFill>
                       <a:srgbClr val="000000"/>
                     </a:solidFill>
@@ -10504,7 +10504,7 @@
               </a:ln>
               <a:extLst>
                 <a:ext uri="{91240B29-F687-4f45-9708-019B960494DF}">
-                  <a14:hiddenLine xmlns="" xmlns:a14="http://schemas.microsoft.com/office/drawing/2010/main" w="9525">
+                  <a14:hiddenLine xmlns:a14="http://schemas.microsoft.com/office/drawing/2010/main" xmlns="" w="9525">
                     <a:solidFill>
                       <a:srgbClr val="000000"/>
                     </a:solidFill>
@@ -10569,7 +10569,7 @@
               </a:ln>
               <a:extLst>
                 <a:ext uri="{91240B29-F687-4f45-9708-019B960494DF}">
-                  <a14:hiddenLine xmlns="" xmlns:a14="http://schemas.microsoft.com/office/drawing/2010/main" w="9525">
+                  <a14:hiddenLine xmlns:a14="http://schemas.microsoft.com/office/drawing/2010/main" xmlns="" w="9525">
                     <a:solidFill>
                       <a:srgbClr val="000000"/>
                     </a:solidFill>
@@ -10631,7 +10631,7 @@
               </a:ln>
               <a:extLst>
                 <a:ext uri="{91240B29-F687-4f45-9708-019B960494DF}">
-                  <a14:hiddenLine xmlns="" xmlns:a14="http://schemas.microsoft.com/office/drawing/2010/main" w="9525">
+                  <a14:hiddenLine xmlns:a14="http://schemas.microsoft.com/office/drawing/2010/main" xmlns="" w="9525">
                     <a:solidFill>
                       <a:srgbClr val="000000"/>
                     </a:solidFill>
@@ -10721,7 +10721,7 @@
               </a:ln>
               <a:extLst>
                 <a:ext uri="{91240B29-F687-4f45-9708-019B960494DF}">
-                  <a14:hiddenLine xmlns="" xmlns:a14="http://schemas.microsoft.com/office/drawing/2010/main" w="9525">
+                  <a14:hiddenLine xmlns:a14="http://schemas.microsoft.com/office/drawing/2010/main" xmlns="" w="9525">
                     <a:solidFill>
                       <a:srgbClr val="000000"/>
                     </a:solidFill>
@@ -10811,7 +10811,7 @@
               </a:ln>
               <a:extLst>
                 <a:ext uri="{91240B29-F687-4f45-9708-019B960494DF}">
-                  <a14:hiddenLine xmlns="" xmlns:a14="http://schemas.microsoft.com/office/drawing/2010/main" w="9525">
+                  <a14:hiddenLine xmlns:a14="http://schemas.microsoft.com/office/drawing/2010/main" xmlns="" w="9525">
                     <a:solidFill>
                       <a:srgbClr val="000000"/>
                     </a:solidFill>
@@ -10876,7 +10876,7 @@
               </a:ln>
               <a:extLst>
                 <a:ext uri="{91240B29-F687-4f45-9708-019B960494DF}">
-                  <a14:hiddenLine xmlns="" xmlns:a14="http://schemas.microsoft.com/office/drawing/2010/main" w="9525">
+                  <a14:hiddenLine xmlns:a14="http://schemas.microsoft.com/office/drawing/2010/main" xmlns="" w="9525">
                     <a:solidFill>
                       <a:srgbClr val="000000"/>
                     </a:solidFill>
@@ -10996,7 +10996,7 @@
               </a:ln>
               <a:extLst>
                 <a:ext uri="{91240B29-F687-4f45-9708-019B960494DF}">
-                  <a14:hiddenLine xmlns="" xmlns:a14="http://schemas.microsoft.com/office/drawing/2010/main" w="9525">
+                  <a14:hiddenLine xmlns:a14="http://schemas.microsoft.com/office/drawing/2010/main" xmlns="" w="9525">
                     <a:solidFill>
                       <a:srgbClr val="000000"/>
                     </a:solidFill>
@@ -11094,7 +11094,7 @@
               </a:ln>
               <a:extLst>
                 <a:ext uri="{91240B29-F687-4f45-9708-019B960494DF}">
-                  <a14:hiddenLine xmlns="" xmlns:a14="http://schemas.microsoft.com/office/drawing/2010/main" w="9525">
+                  <a14:hiddenLine xmlns:a14="http://schemas.microsoft.com/office/drawing/2010/main" xmlns="" w="9525">
                     <a:solidFill>
                       <a:srgbClr val="000000"/>
                     </a:solidFill>
@@ -11209,7 +11209,7 @@
               </a:ln>
               <a:extLst>
                 <a:ext uri="{91240B29-F687-4f45-9708-019B960494DF}">
-                  <a14:hiddenLine xmlns="" xmlns:a14="http://schemas.microsoft.com/office/drawing/2010/main" w="9525">
+                  <a14:hiddenLine xmlns:a14="http://schemas.microsoft.com/office/drawing/2010/main" xmlns="" w="9525">
                     <a:solidFill>
                       <a:srgbClr val="000000"/>
                     </a:solidFill>
@@ -11299,7 +11299,7 @@
               </a:ln>
               <a:extLst>
                 <a:ext uri="{91240B29-F687-4f45-9708-019B960494DF}">
-                  <a14:hiddenLine xmlns="" xmlns:a14="http://schemas.microsoft.com/office/drawing/2010/main" w="9525">
+                  <a14:hiddenLine xmlns:a14="http://schemas.microsoft.com/office/drawing/2010/main" xmlns="" w="9525">
                     <a:solidFill>
                       <a:srgbClr val="000000"/>
                     </a:solidFill>
@@ -11364,7 +11364,7 @@
               </a:ln>
               <a:extLst>
                 <a:ext uri="{91240B29-F687-4f45-9708-019B960494DF}">
-                  <a14:hiddenLine xmlns="" xmlns:a14="http://schemas.microsoft.com/office/drawing/2010/main" w="9525">
+                  <a14:hiddenLine xmlns:a14="http://schemas.microsoft.com/office/drawing/2010/main" xmlns="" w="9525">
                     <a:solidFill>
                       <a:srgbClr val="000000"/>
                     </a:solidFill>
@@ -11454,7 +11454,7 @@
               </a:ln>
               <a:extLst>
                 <a:ext uri="{91240B29-F687-4f45-9708-019B960494DF}">
-                  <a14:hiddenLine xmlns="" xmlns:a14="http://schemas.microsoft.com/office/drawing/2010/main" w="9525">
+                  <a14:hiddenLine xmlns:a14="http://schemas.microsoft.com/office/drawing/2010/main" xmlns="" w="9525">
                     <a:solidFill>
                       <a:srgbClr val="000000"/>
                     </a:solidFill>
@@ -11522,7 +11522,7 @@
               </a:ln>
               <a:extLst>
                 <a:ext uri="{91240B29-F687-4f45-9708-019B960494DF}">
-                  <a14:hiddenLine xmlns="" xmlns:a14="http://schemas.microsoft.com/office/drawing/2010/main" w="9525">
+                  <a14:hiddenLine xmlns:a14="http://schemas.microsoft.com/office/drawing/2010/main" xmlns="" w="9525">
                     <a:solidFill>
                       <a:srgbClr val="000000"/>
                     </a:solidFill>
@@ -11612,7 +11612,7 @@
               </a:ln>
               <a:extLst>
                 <a:ext uri="{91240B29-F687-4f45-9708-019B960494DF}">
-                  <a14:hiddenLine xmlns="" xmlns:a14="http://schemas.microsoft.com/office/drawing/2010/main" w="9525">
+                  <a14:hiddenLine xmlns:a14="http://schemas.microsoft.com/office/drawing/2010/main" xmlns="" w="9525">
                     <a:solidFill>
                       <a:srgbClr val="000000"/>
                     </a:solidFill>
@@ -11680,7 +11680,7 @@
               </a:ln>
               <a:extLst>
                 <a:ext uri="{91240B29-F687-4f45-9708-019B960494DF}">
-                  <a14:hiddenLine xmlns="" xmlns:a14="http://schemas.microsoft.com/office/drawing/2010/main" w="9525">
+                  <a14:hiddenLine xmlns:a14="http://schemas.microsoft.com/office/drawing/2010/main" xmlns="" w="9525">
                     <a:solidFill>
                       <a:srgbClr val="000000"/>
                     </a:solidFill>
@@ -11770,7 +11770,7 @@
               </a:ln>
               <a:extLst>
                 <a:ext uri="{91240B29-F687-4f45-9708-019B960494DF}">
-                  <a14:hiddenLine xmlns="" xmlns:a14="http://schemas.microsoft.com/office/drawing/2010/main" w="9525">
+                  <a14:hiddenLine xmlns:a14="http://schemas.microsoft.com/office/drawing/2010/main" xmlns="" w="9525">
                     <a:solidFill>
                       <a:srgbClr val="000000"/>
                     </a:solidFill>
@@ -11804,7 +11804,7 @@
               </a:ln>
               <a:extLst>
                 <a:ext uri="{91240B29-F687-4f45-9708-019B960494DF}">
-                  <a14:hiddenLine xmlns="" xmlns:a14="http://schemas.microsoft.com/office/drawing/2010/main" w="9525">
+                  <a14:hiddenLine xmlns:a14="http://schemas.microsoft.com/office/drawing/2010/main" xmlns="" w="9525">
                     <a:solidFill>
                       <a:srgbClr val="000000"/>
                     </a:solidFill>
@@ -11945,7 +11945,7 @@
             <a:fld id="{48A87A34-81AB-432B-8DAE-1953F412C126}" type="datetimeFigureOut">
               <a:rPr lang="en-US" dirty="0"/>
               <a:pPr/>
-              <a:t>4/7/2026</a:t>
+              <a:t>4/13/2026</a:t>
             </a:fld>
             <a:endParaRPr lang="en-US" dirty="0"/>
           </a:p>
@@ -12495,10 +12495,10 @@
       </p:sp>
       <p:pic>
         <p:nvPicPr>
-          <p:cNvPr id="6" name="圖片 5">
+          <p:cNvPr id="4" name="圖片 3">
             <a:extLst>
               <a:ext uri="{FF2B5EF4-FFF2-40B4-BE49-F238E27FC236}">
-                <a16:creationId xmlns:a16="http://schemas.microsoft.com/office/drawing/2014/main" id="{1CA2B71A-2C1C-6DF2-7E11-404AC7BAEC52}"/>
+                <a16:creationId xmlns:a16="http://schemas.microsoft.com/office/drawing/2014/main" id="{126DDBEA-D189-AFD1-9138-A9F6BCF096EF}"/>
               </a:ext>
             </a:extLst>
           </p:cNvPr>
@@ -12515,8 +12515,8 @@
         </p:blipFill>
         <p:spPr>
           <a:xfrm>
-            <a:off x="2007373" y="1634242"/>
-            <a:ext cx="8177254" cy="4678429"/>
+            <a:off x="1941931" y="1656818"/>
+            <a:ext cx="8304962" cy="4678429"/>
           </a:xfrm>
           <a:prstGeom prst="rect">
             <a:avLst/>
@@ -12752,7 +12752,23 @@
             <a:pPr algn="ctr"/>
             <a:r>
               <a:rPr lang="zh-TW" altLang="en-US" dirty="0"/>
-              <a:t>離婚 </a:t>
+              <a:t>離婚</a:t>
+            </a:r>
+            <a:r>
+              <a:rPr lang="en-US" altLang="zh-TW" dirty="0"/>
+              <a:t>-</a:t>
+            </a:r>
+            <a:r>
+              <a:rPr lang="zh-TW" altLang="en-US" dirty="0"/>
+              <a:t>條件</a:t>
+            </a:r>
+            <a:r>
+              <a:rPr lang="en-US" altLang="zh-TW" dirty="0"/>
+              <a:t>:25~34</a:t>
+            </a:r>
+            <a:r>
+              <a:rPr lang="zh-TW" altLang="en-US" dirty="0"/>
+              <a:t>歲、台中市西區</a:t>
             </a:r>
             <a:br>
               <a:rPr lang="en-US" altLang="zh-TW" dirty="0"/>
@@ -12932,15 +12948,23 @@
             </a:r>
             <a:r>
               <a:rPr lang="zh-TW" altLang="en-US" sz="2400" dirty="0"/>
-              <a:t>大多為</a:t>
+              <a:t>再婚人數最多。</a:t>
+            </a:r>
+            <a:endParaRPr lang="en-US" altLang="zh-TW" sz="2400" dirty="0"/>
+          </a:p>
+          <a:p>
+            <a:pPr lvl="1"/>
+            <a:r>
+              <a:rPr lang="en-US" altLang="zh-TW" sz="2400" u="sng" dirty="0"/>
+              <a:t>45~54</a:t>
             </a:r>
             <a:r>
               <a:rPr lang="zh-TW" altLang="en-US" sz="2400" u="sng" dirty="0"/>
-              <a:t>再婚</a:t>
+              <a:t>歲</a:t>
             </a:r>
             <a:r>
               <a:rPr lang="zh-TW" altLang="en-US" sz="2400" dirty="0"/>
-              <a:t>。</a:t>
+              <a:t>再婚人數開始高於初婚人數。</a:t>
             </a:r>
             <a:endParaRPr lang="en-US" altLang="zh-TW" sz="2400" dirty="0"/>
           </a:p>
@@ -13104,6 +13128,13 @@
         <p:txBody>
           <a:bodyPr/>
           <a:lstStyle/>
+          <a:p>
+            <a:r>
+              <a:rPr lang="zh-TW" altLang="en-US" dirty="0"/>
+              <a:t>近年結婚人數逐年減少，單身越來越多。</a:t>
+            </a:r>
+            <a:endParaRPr lang="en-US" altLang="zh-TW" dirty="0"/>
+          </a:p>
           <a:p>
             <a:r>
               <a:rPr lang="zh-TW" altLang="en-US" dirty="0"/>
@@ -14013,15 +14044,18 @@
         </p:nvSpPr>
         <p:spPr/>
         <p:txBody>
-          <a:bodyPr/>
+          <a:bodyPr>
+            <a:normAutofit/>
+          </a:bodyPr>
           <a:lstStyle/>
           <a:p>
-            <a:r>
-              <a:rPr lang="en-US" altLang="zh-TW" dirty="0"/>
+            <a:pPr algn="ctr"/>
+            <a:r>
+              <a:rPr lang="en-US" altLang="zh-TW" sz="4000" dirty="0"/>
               <a:t>Power PI</a:t>
             </a:r>
             <a:r>
-              <a:rPr lang="zh-TW" altLang="en-US" dirty="0"/>
+              <a:rPr lang="zh-TW" altLang="en-US" sz="4000" dirty="0"/>
               <a:t>展示</a:t>
             </a:r>
           </a:p>
@@ -14167,41 +14201,24 @@
           <a:bodyPr/>
           <a:lstStyle/>
           <a:p>
-            <a:endParaRPr lang="zh-TW" altLang="en-US"/>
-          </a:p>
-        </p:txBody>
-      </p:sp>
-      <p:sp>
-        <p:nvSpPr>
-          <p:cNvPr id="7" name="內容版面配置區 6">
-            <a:extLst>
-              <a:ext uri="{FF2B5EF4-FFF2-40B4-BE49-F238E27FC236}">
-                <a16:creationId xmlns:a16="http://schemas.microsoft.com/office/drawing/2014/main" id="{68B19D04-722A-3B24-41B1-A78905BCC0EA}"/>
-              </a:ext>
-            </a:extLst>
-          </p:cNvPr>
-          <p:cNvSpPr>
-            <a:spLocks noGrp="1"/>
-          </p:cNvSpPr>
-          <p:nvPr>
-            <p:ph idx="1"/>
-          </p:nvPr>
-        </p:nvSpPr>
-        <p:spPr/>
-        <p:txBody>
-          <a:bodyPr/>
-          <a:lstStyle/>
-          <a:p>
-            <a:endParaRPr lang="zh-TW" altLang="en-US"/>
+            <a:pPr algn="ctr"/>
+            <a:r>
+              <a:rPr lang="zh-TW" altLang="en-US" dirty="0"/>
+              <a:t>每月離婚人數</a:t>
+            </a:r>
+            <a:br>
+              <a:rPr lang="en-US" altLang="zh-TW" dirty="0"/>
+            </a:br>
+            <a:endParaRPr lang="zh-TW" altLang="en-US" dirty="0"/>
           </a:p>
         </p:txBody>
       </p:sp>
       <p:pic>
         <p:nvPicPr>
-          <p:cNvPr id="8" name="圖片 7">
+          <p:cNvPr id="4" name="圖片 3">
             <a:extLst>
               <a:ext uri="{FF2B5EF4-FFF2-40B4-BE49-F238E27FC236}">
-                <a16:creationId xmlns:a16="http://schemas.microsoft.com/office/drawing/2014/main" id="{0C6AC618-2A58-AD70-F329-0C654B9DF597}"/>
+                <a16:creationId xmlns:a16="http://schemas.microsoft.com/office/drawing/2014/main" id="{76FFEB43-2EEE-091E-0FCD-D5E4D6AC03D2}"/>
               </a:ext>
             </a:extLst>
           </p:cNvPr>
@@ -14218,8 +14235,8 @@
         </p:blipFill>
         <p:spPr>
           <a:xfrm>
-            <a:off x="1141413" y="618518"/>
-            <a:ext cx="9905998" cy="5601678"/>
+            <a:off x="1683957" y="1579504"/>
+            <a:ext cx="8820907" cy="4881679"/>
           </a:xfrm>
           <a:prstGeom prst="rect">
             <a:avLst/>
@@ -14281,6 +14298,14 @@
             <a:r>
               <a:rPr lang="zh-TW" altLang="en-US" dirty="0"/>
               <a:t>離婚</a:t>
+            </a:r>
+            <a:r>
+              <a:rPr lang="en-US" altLang="zh-TW" dirty="0"/>
+              <a:t>-</a:t>
+            </a:r>
+            <a:r>
+              <a:rPr lang="zh-TW" altLang="en-US" dirty="0"/>
+              <a:t>條件為臺中市大甲區</a:t>
             </a:r>
           </a:p>
         </p:txBody>

--- a/那些人較易結婚或離婚.pptx
+++ b/那些人較易結婚或離婚.pptx
@@ -12418,7 +12418,7 @@
         <p:spPr/>
         <p:txBody>
           <a:bodyPr>
-            <a:normAutofit/>
+            <a:normAutofit fontScale="92500" lnSpcReduction="10000"/>
           </a:bodyPr>
           <a:lstStyle/>
           <a:p>
@@ -12431,6 +12431,23 @@
               <a:rPr lang="zh-TW" altLang="en-US" sz="4400" dirty="0"/>
               <a:t>年台中市居民的婚姻狀況分析</a:t>
             </a:r>
+            <a:endParaRPr lang="en-US" altLang="zh-TW" sz="4400" dirty="0"/>
+          </a:p>
+          <a:p>
+            <a:pPr algn="ctr"/>
+            <a:r>
+              <a:rPr lang="zh-TW" altLang="en-US" sz="4400" dirty="0"/>
+              <a:t>專題製作</a:t>
+            </a:r>
+            <a:r>
+              <a:rPr lang="en-US" altLang="zh-TW" sz="4400" dirty="0"/>
+              <a:t>:</a:t>
+            </a:r>
+            <a:r>
+              <a:rPr lang="zh-TW" altLang="en-US" sz="4400" dirty="0"/>
+              <a:t>何權哲</a:t>
+            </a:r>
+            <a:endParaRPr lang="en-US" altLang="zh-TW" sz="4400" dirty="0"/>
           </a:p>
         </p:txBody>
       </p:sp>

--- a/那些人較易結婚或離婚.pptx
+++ b/那些人較易結婚或離婚.pptx
@@ -6,19 +6,21 @@
   </p:sldMasterIdLst>
   <p:sldIdLst>
     <p:sldId id="256" r:id="rId2"/>
-    <p:sldId id="257" r:id="rId3"/>
-    <p:sldId id="258" r:id="rId4"/>
-    <p:sldId id="259" r:id="rId5"/>
-    <p:sldId id="260" r:id="rId6"/>
-    <p:sldId id="261" r:id="rId7"/>
-    <p:sldId id="263" r:id="rId8"/>
-    <p:sldId id="264" r:id="rId9"/>
-    <p:sldId id="262" r:id="rId10"/>
-    <p:sldId id="265" r:id="rId11"/>
-    <p:sldId id="266" r:id="rId12"/>
-    <p:sldId id="267" r:id="rId13"/>
-    <p:sldId id="268" r:id="rId14"/>
-    <p:sldId id="269" r:id="rId15"/>
+    <p:sldId id="270" r:id="rId3"/>
+    <p:sldId id="257" r:id="rId4"/>
+    <p:sldId id="258" r:id="rId5"/>
+    <p:sldId id="259" r:id="rId6"/>
+    <p:sldId id="260" r:id="rId7"/>
+    <p:sldId id="261" r:id="rId8"/>
+    <p:sldId id="263" r:id="rId9"/>
+    <p:sldId id="264" r:id="rId10"/>
+    <p:sldId id="262" r:id="rId11"/>
+    <p:sldId id="265" r:id="rId12"/>
+    <p:sldId id="266" r:id="rId13"/>
+    <p:sldId id="267" r:id="rId14"/>
+    <p:sldId id="268" r:id="rId15"/>
+    <p:sldId id="271" r:id="rId16"/>
+    <p:sldId id="269" r:id="rId17"/>
   </p:sldIdLst>
   <p:sldSz cx="12192000" cy="6858000"/>
   <p:notesSz cx="6858000" cy="9144000"/>
@@ -118,6 +120,58 @@
     </a:lvl9pPr>
   </p:defaultTextStyle>
   <p:extLst>
+    <p:ext uri="{521415D9-36F7-43E2-AB2F-B90AF26B5E84}">
+      <p14:sectionLst xmlns:p14="http://schemas.microsoft.com/office/powerpoint/2010/main">
+        <p14:section name="預設章節" id="{1AA9CD98-57D2-4AE9-AF7E-9279CBEC05F1}">
+          <p14:sldIdLst>
+            <p14:sldId id="256"/>
+            <p14:sldId id="270"/>
+          </p14:sldIdLst>
+        </p14:section>
+        <p14:section name="專題發想說明" id="{3D3A3770-3E24-4444-9D05-23E9E74CD64D}">
+          <p14:sldIdLst>
+            <p14:sldId id="257"/>
+          </p14:sldIdLst>
+        </p14:section>
+        <p14:section name="收尋資料" id="{33C3750E-6E39-4E71-9BB7-92AA7032288C}">
+          <p14:sldIdLst>
+            <p14:sldId id="258"/>
+          </p14:sldIdLst>
+        </p14:section>
+        <p14:section name="資料轉換" id="{84FF970D-9EF9-4134-AA93-CEF38A01E2DE}">
+          <p14:sldIdLst>
+            <p14:sldId id="259"/>
+          </p14:sldIdLst>
+        </p14:section>
+        <p14:section name="資料儲存" id="{CE7FB4E4-E292-4DC1-9E28-4C0C7E72B71E}">
+          <p14:sldIdLst>
+            <p14:sldId id="260"/>
+          </p14:sldIdLst>
+        </p14:section>
+        <p14:section name="資料分析" id="{51C68CDC-7A18-4F86-8B66-D43758E6C9C3}">
+          <p14:sldIdLst>
+            <p14:sldId id="261"/>
+            <p14:sldId id="263"/>
+            <p14:sldId id="264"/>
+            <p14:sldId id="262"/>
+            <p14:sldId id="265"/>
+            <p14:sldId id="266"/>
+            <p14:sldId id="267"/>
+            <p14:sldId id="268"/>
+          </p14:sldIdLst>
+        </p14:section>
+        <p14:section name="相關發現" id="{5B55F51C-A9B9-4D71-8E70-75811F1E4DBA}">
+          <p14:sldIdLst>
+            <p14:sldId id="271"/>
+          </p14:sldIdLst>
+        </p14:section>
+        <p14:section name="結論" id="{EEA2D8FB-8303-485E-814E-3F0759258812}">
+          <p14:sldIdLst>
+            <p14:sldId id="269"/>
+          </p14:sldIdLst>
+        </p14:section>
+      </p14:sectionLst>
+    </p:ext>
     <p:ext uri="{EFAFB233-063F-42B5-8137-9DF3F51BA10A}">
       <p15:sldGuideLst xmlns:p15="http://schemas.microsoft.com/office/powerpoint/2012/main"/>
     </p:ext>
@@ -4401,7 +4455,7 @@
           <a:p>
             <a:fld id="{48A87A34-81AB-432B-8DAE-1953F412C126}" type="datetimeFigureOut">
               <a:rPr lang="en-US" dirty="0"/>
-              <a:t>4/13/2026</a:t>
+              <a:t>4/14/2026</a:t>
             </a:fld>
             <a:endParaRPr lang="en-US" dirty="0"/>
           </a:p>
@@ -4663,7 +4717,7 @@
           <a:p>
             <a:fld id="{48A87A34-81AB-432B-8DAE-1953F412C126}" type="datetimeFigureOut">
               <a:rPr lang="en-US" dirty="0"/>
-              <a:t>4/13/2026</a:t>
+              <a:t>4/14/2026</a:t>
             </a:fld>
             <a:endParaRPr lang="en-US" dirty="0"/>
           </a:p>
@@ -4854,7 +4908,7 @@
           <a:p>
             <a:fld id="{48A87A34-81AB-432B-8DAE-1953F412C126}" type="datetimeFigureOut">
               <a:rPr lang="en-US" dirty="0"/>
-              <a:t>4/13/2026</a:t>
+              <a:t>4/14/2026</a:t>
             </a:fld>
             <a:endParaRPr lang="en-US" dirty="0"/>
           </a:p>
@@ -5112,7 +5166,7 @@
           <a:p>
             <a:fld id="{48A87A34-81AB-432B-8DAE-1953F412C126}" type="datetimeFigureOut">
               <a:rPr lang="en-US" dirty="0"/>
-              <a:t>4/13/2026</a:t>
+              <a:t>4/14/2026</a:t>
             </a:fld>
             <a:endParaRPr lang="en-US" dirty="0"/>
           </a:p>
@@ -5541,7 +5595,7 @@
           <a:p>
             <a:fld id="{48A87A34-81AB-432B-8DAE-1953F412C126}" type="datetimeFigureOut">
               <a:rPr lang="en-US" dirty="0"/>
-              <a:t>4/13/2026</a:t>
+              <a:t>4/14/2026</a:t>
             </a:fld>
             <a:endParaRPr lang="en-US" dirty="0"/>
           </a:p>
@@ -6082,7 +6136,7 @@
           <a:p>
             <a:fld id="{48A87A34-81AB-432B-8DAE-1953F412C126}" type="datetimeFigureOut">
               <a:rPr lang="en-US" dirty="0"/>
-              <a:t>4/13/2026</a:t>
+              <a:t>4/14/2026</a:t>
             </a:fld>
             <a:endParaRPr lang="en-US" dirty="0"/>
           </a:p>
@@ -6797,7 +6851,7 @@
           <a:p>
             <a:fld id="{48A87A34-81AB-432B-8DAE-1953F412C126}" type="datetimeFigureOut">
               <a:rPr lang="en-US" dirty="0"/>
-              <a:t>4/13/2026</a:t>
+              <a:t>4/14/2026</a:t>
             </a:fld>
             <a:endParaRPr lang="en-US" dirty="0"/>
           </a:p>
@@ -6962,7 +7016,7 @@
           <a:p>
             <a:fld id="{48A87A34-81AB-432B-8DAE-1953F412C126}" type="datetimeFigureOut">
               <a:rPr lang="en-US" dirty="0"/>
-              <a:t>4/13/2026</a:t>
+              <a:t>4/14/2026</a:t>
             </a:fld>
             <a:endParaRPr lang="en-US" dirty="0"/>
           </a:p>
@@ -7137,7 +7191,7 @@
           <a:p>
             <a:fld id="{48A87A34-81AB-432B-8DAE-1953F412C126}" type="datetimeFigureOut">
               <a:rPr lang="en-US" dirty="0"/>
-              <a:t>4/13/2026</a:t>
+              <a:t>4/14/2026</a:t>
             </a:fld>
             <a:endParaRPr lang="en-US" dirty="0"/>
           </a:p>
@@ -7302,7 +7356,7 @@
           <a:p>
             <a:fld id="{48A87A34-81AB-432B-8DAE-1953F412C126}" type="datetimeFigureOut">
               <a:rPr lang="en-US" dirty="0"/>
-              <a:t>4/13/2026</a:t>
+              <a:t>4/14/2026</a:t>
             </a:fld>
             <a:endParaRPr lang="en-US" dirty="0"/>
           </a:p>
@@ -7547,7 +7601,7 @@
           <a:p>
             <a:fld id="{48A87A34-81AB-432B-8DAE-1953F412C126}" type="datetimeFigureOut">
               <a:rPr lang="en-US" dirty="0"/>
-              <a:t>4/13/2026</a:t>
+              <a:t>4/14/2026</a:t>
             </a:fld>
             <a:endParaRPr lang="en-US" dirty="0"/>
           </a:p>
@@ -7774,7 +7828,7 @@
           <a:p>
             <a:fld id="{48A87A34-81AB-432B-8DAE-1953F412C126}" type="datetimeFigureOut">
               <a:rPr lang="en-US" dirty="0"/>
-              <a:t>4/13/2026</a:t>
+              <a:t>4/14/2026</a:t>
             </a:fld>
             <a:endParaRPr lang="en-US" dirty="0"/>
           </a:p>
@@ -8150,7 +8204,7 @@
           <a:p>
             <a:fld id="{48A87A34-81AB-432B-8DAE-1953F412C126}" type="datetimeFigureOut">
               <a:rPr lang="en-US" dirty="0"/>
-              <a:t>4/13/2026</a:t>
+              <a:t>4/14/2026</a:t>
             </a:fld>
             <a:endParaRPr lang="en-US" dirty="0"/>
           </a:p>
@@ -8263,7 +8317,7 @@
           <a:p>
             <a:fld id="{48A87A34-81AB-432B-8DAE-1953F412C126}" type="datetimeFigureOut">
               <a:rPr lang="en-US" dirty="0"/>
-              <a:t>4/13/2026</a:t>
+              <a:t>4/14/2026</a:t>
             </a:fld>
             <a:endParaRPr lang="en-US" dirty="0"/>
           </a:p>
@@ -8353,7 +8407,7 @@
           <a:p>
             <a:fld id="{48A87A34-81AB-432B-8DAE-1953F412C126}" type="datetimeFigureOut">
               <a:rPr lang="en-US" dirty="0"/>
-              <a:t>4/13/2026</a:t>
+              <a:t>4/14/2026</a:t>
             </a:fld>
             <a:endParaRPr lang="en-US" dirty="0"/>
           </a:p>
@@ -8597,7 +8651,7 @@
           <a:p>
             <a:fld id="{48A87A34-81AB-432B-8DAE-1953F412C126}" type="datetimeFigureOut">
               <a:rPr lang="en-US" dirty="0"/>
-              <a:t>4/13/2026</a:t>
+              <a:t>4/14/2026</a:t>
             </a:fld>
             <a:endParaRPr lang="en-US" dirty="0"/>
           </a:p>
@@ -8872,7 +8926,7 @@
           <a:p>
             <a:fld id="{48A87A34-81AB-432B-8DAE-1953F412C126}" type="datetimeFigureOut">
               <a:rPr lang="en-US" dirty="0"/>
-              <a:t>4/13/2026</a:t>
+              <a:t>4/14/2026</a:t>
             </a:fld>
             <a:endParaRPr lang="en-US" dirty="0"/>
           </a:p>
@@ -11945,7 +11999,7 @@
             <a:fld id="{48A87A34-81AB-432B-8DAE-1953F412C126}" type="datetimeFigureOut">
               <a:rPr lang="en-US" dirty="0"/>
               <a:pPr/>
-              <a:t>4/13/2026</a:t>
+              <a:t>4/14/2026</a:t>
             </a:fld>
             <a:endParaRPr lang="en-US" dirty="0"/>
           </a:p>
@@ -12486,6 +12540,128 @@
           <p:cNvPr id="2" name="標題 1">
             <a:extLst>
               <a:ext uri="{FF2B5EF4-FFF2-40B4-BE49-F238E27FC236}">
+                <a16:creationId xmlns:a16="http://schemas.microsoft.com/office/drawing/2014/main" id="{1A19A397-BC6A-F52F-20FC-FB3EC17D1093}"/>
+              </a:ext>
+            </a:extLst>
+          </p:cNvPr>
+          <p:cNvSpPr>
+            <a:spLocks noGrp="1"/>
+          </p:cNvSpPr>
+          <p:nvPr>
+            <p:ph type="title"/>
+          </p:nvPr>
+        </p:nvSpPr>
+        <p:spPr/>
+        <p:txBody>
+          <a:bodyPr/>
+          <a:lstStyle/>
+          <a:p>
+            <a:pPr algn="ctr"/>
+            <a:r>
+              <a:rPr lang="zh-TW" altLang="en-US" dirty="0"/>
+              <a:t>離婚</a:t>
+            </a:r>
+            <a:r>
+              <a:rPr lang="en-US" altLang="zh-TW" dirty="0"/>
+              <a:t>-</a:t>
+            </a:r>
+            <a:r>
+              <a:rPr lang="zh-TW" altLang="en-US" dirty="0"/>
+              <a:t>條件為臺中市大甲區</a:t>
+            </a:r>
+          </a:p>
+        </p:txBody>
+      </p:sp>
+      <p:sp>
+        <p:nvSpPr>
+          <p:cNvPr id="7" name="內容版面配置區 6">
+            <a:extLst>
+              <a:ext uri="{FF2B5EF4-FFF2-40B4-BE49-F238E27FC236}">
+                <a16:creationId xmlns:a16="http://schemas.microsoft.com/office/drawing/2014/main" id="{D23F2302-F2DE-F7B0-6FA6-401BAD480B01}"/>
+              </a:ext>
+            </a:extLst>
+          </p:cNvPr>
+          <p:cNvSpPr>
+            <a:spLocks noGrp="1"/>
+          </p:cNvSpPr>
+          <p:nvPr>
+            <p:ph idx="1"/>
+          </p:nvPr>
+        </p:nvSpPr>
+        <p:spPr/>
+        <p:txBody>
+          <a:bodyPr/>
+          <a:lstStyle/>
+          <a:p>
+            <a:endParaRPr lang="zh-TW" altLang="en-US"/>
+          </a:p>
+        </p:txBody>
+      </p:sp>
+      <p:pic>
+        <p:nvPicPr>
+          <p:cNvPr id="8" name="圖片 7">
+            <a:extLst>
+              <a:ext uri="{FF2B5EF4-FFF2-40B4-BE49-F238E27FC236}">
+                <a16:creationId xmlns:a16="http://schemas.microsoft.com/office/drawing/2014/main" id="{3DBD2F39-9BDC-DFD8-044E-B47BA7AB0690}"/>
+              </a:ext>
+            </a:extLst>
+          </p:cNvPr>
+          <p:cNvPicPr>
+            <a:picLocks noChangeAspect="1"/>
+          </p:cNvPicPr>
+          <p:nvPr/>
+        </p:nvPicPr>
+        <p:blipFill>
+          <a:blip r:embed="rId2"/>
+          <a:stretch>
+            <a:fillRect/>
+          </a:stretch>
+        </p:blipFill>
+        <p:spPr>
+          <a:xfrm>
+            <a:off x="1905309" y="1611420"/>
+            <a:ext cx="8378206" cy="4767260"/>
+          </a:xfrm>
+          <a:prstGeom prst="rect">
+            <a:avLst/>
+          </a:prstGeom>
+        </p:spPr>
+      </p:pic>
+    </p:spTree>
+    <p:extLst>
+      <p:ext uri="{BB962C8B-B14F-4D97-AF65-F5344CB8AC3E}">
+        <p14:creationId xmlns:p14="http://schemas.microsoft.com/office/powerpoint/2010/main" val="1807351438"/>
+      </p:ext>
+    </p:extLst>
+  </p:cSld>
+  <p:clrMapOvr>
+    <a:masterClrMapping/>
+  </p:clrMapOvr>
+</p:sld>
+</file>
+
+<file path=ppt/slides/slide11.xml><?xml version="1.0" encoding="utf-8"?>
+<p:sld xmlns:a="http://schemas.openxmlformats.org/drawingml/2006/main" xmlns:r="http://schemas.openxmlformats.org/officeDocument/2006/relationships" xmlns:p="http://schemas.openxmlformats.org/presentationml/2006/main">
+  <p:cSld>
+    <p:spTree>
+      <p:nvGrpSpPr>
+        <p:cNvPr id="1" name=""/>
+        <p:cNvGrpSpPr/>
+        <p:nvPr/>
+      </p:nvGrpSpPr>
+      <p:grpSpPr>
+        <a:xfrm>
+          <a:off x="0" y="0"/>
+          <a:ext cx="0" cy="0"/>
+          <a:chOff x="0" y="0"/>
+          <a:chExt cx="0" cy="0"/>
+        </a:xfrm>
+      </p:grpSpPr>
+      <p:sp>
+        <p:nvSpPr>
+          <p:cNvPr id="2" name="標題 1">
+            <a:extLst>
+              <a:ext uri="{FF2B5EF4-FFF2-40B4-BE49-F238E27FC236}">
                 <a16:creationId xmlns:a16="http://schemas.microsoft.com/office/drawing/2014/main" id="{6A65E444-2789-6140-A878-B569848402DD}"/>
               </a:ext>
             </a:extLst>
@@ -12553,7 +12729,7 @@
 </p:sld>
 </file>
 
-<file path=ppt/slides/slide11.xml><?xml version="1.0" encoding="utf-8"?>
+<file path=ppt/slides/slide12.xml><?xml version="1.0" encoding="utf-8"?>
 <p:sld xmlns:a="http://schemas.openxmlformats.org/drawingml/2006/main" xmlns:r="http://schemas.openxmlformats.org/officeDocument/2006/relationships" xmlns:p="http://schemas.openxmlformats.org/presentationml/2006/main">
   <p:cSld>
     <p:spTree>
@@ -12613,7 +12789,7 @@
 </p:sld>
 </file>
 
-<file path=ppt/slides/slide12.xml><?xml version="1.0" encoding="utf-8"?>
+<file path=ppt/slides/slide13.xml><?xml version="1.0" encoding="utf-8"?>
 <p:sld xmlns:a="http://schemas.openxmlformats.org/drawingml/2006/main" xmlns:r="http://schemas.openxmlformats.org/officeDocument/2006/relationships" xmlns:p="http://schemas.openxmlformats.org/presentationml/2006/main">
   <p:cSld>
     <p:spTree>
@@ -12723,7 +12899,7 @@
 </p:sld>
 </file>
 
-<file path=ppt/slides/slide13.xml><?xml version="1.0" encoding="utf-8"?>
+<file path=ppt/slides/slide14.xml><?xml version="1.0" encoding="utf-8"?>
 <p:sld xmlns:a="http://schemas.openxmlformats.org/drawingml/2006/main" xmlns:r="http://schemas.openxmlformats.org/officeDocument/2006/relationships" xmlns:p="http://schemas.openxmlformats.org/presentationml/2006/main">
   <p:cSld>
     <p:spTree>
@@ -12848,7 +13024,120 @@
 </p:sld>
 </file>
 
-<file path=ppt/slides/slide14.xml><?xml version="1.0" encoding="utf-8"?>
+<file path=ppt/slides/slide15.xml><?xml version="1.0" encoding="utf-8"?>
+<p:sld xmlns:a="http://schemas.openxmlformats.org/drawingml/2006/main" xmlns:r="http://schemas.openxmlformats.org/officeDocument/2006/relationships" xmlns:p="http://schemas.openxmlformats.org/presentationml/2006/main">
+  <p:cSld>
+    <p:spTree>
+      <p:nvGrpSpPr>
+        <p:cNvPr id="1" name=""/>
+        <p:cNvGrpSpPr/>
+        <p:nvPr/>
+      </p:nvGrpSpPr>
+      <p:grpSpPr>
+        <a:xfrm>
+          <a:off x="0" y="0"/>
+          <a:ext cx="0" cy="0"/>
+          <a:chOff x="0" y="0"/>
+          <a:chExt cx="0" cy="0"/>
+        </a:xfrm>
+      </p:grpSpPr>
+      <p:sp>
+        <p:nvSpPr>
+          <p:cNvPr id="2" name="標題 1">
+            <a:extLst>
+              <a:ext uri="{FF2B5EF4-FFF2-40B4-BE49-F238E27FC236}">
+                <a16:creationId xmlns:a16="http://schemas.microsoft.com/office/drawing/2014/main" id="{9842B3DD-4613-85DD-A677-946F669A69B9}"/>
+              </a:ext>
+            </a:extLst>
+          </p:cNvPr>
+          <p:cNvSpPr>
+            <a:spLocks noGrp="1"/>
+          </p:cNvSpPr>
+          <p:nvPr>
+            <p:ph type="title"/>
+          </p:nvPr>
+        </p:nvSpPr>
+        <p:spPr/>
+        <p:txBody>
+          <a:bodyPr>
+            <a:normAutofit/>
+          </a:bodyPr>
+          <a:lstStyle/>
+          <a:p>
+            <a:r>
+              <a:rPr lang="zh-TW" altLang="en-US" dirty="0"/>
+              <a:t>額外相關發現</a:t>
+            </a:r>
+          </a:p>
+        </p:txBody>
+      </p:sp>
+      <p:sp>
+        <p:nvSpPr>
+          <p:cNvPr id="3" name="內容版面配置區 2">
+            <a:extLst>
+              <a:ext uri="{FF2B5EF4-FFF2-40B4-BE49-F238E27FC236}">
+                <a16:creationId xmlns:a16="http://schemas.microsoft.com/office/drawing/2014/main" id="{76FD8C23-B881-4AE7-76FB-80FA280DF661}"/>
+              </a:ext>
+            </a:extLst>
+          </p:cNvPr>
+          <p:cNvSpPr>
+            <a:spLocks noGrp="1"/>
+          </p:cNvSpPr>
+          <p:nvPr>
+            <p:ph idx="1"/>
+          </p:nvPr>
+        </p:nvSpPr>
+        <p:spPr/>
+        <p:txBody>
+          <a:bodyPr>
+            <a:noAutofit/>
+          </a:bodyPr>
+          <a:lstStyle/>
+          <a:p>
+            <a:r>
+              <a:rPr lang="en-US" altLang="zh-TW" sz="3200" dirty="0"/>
+              <a:t>2018</a:t>
+            </a:r>
+            <a:r>
+              <a:rPr lang="zh-TW" altLang="en-US" sz="3200" dirty="0"/>
+              <a:t>年恰逢同性婚姻合法化，可能造成同性結婚增加，能解釋為何</a:t>
+            </a:r>
+            <a:r>
+              <a:rPr lang="zh-TW" altLang="en-US" sz="3200" b="1" u="sng" dirty="0"/>
+              <a:t>結婚男女比例不對稱</a:t>
+            </a:r>
+            <a:r>
+              <a:rPr lang="zh-TW" altLang="en-US" sz="3200" dirty="0"/>
+              <a:t>。</a:t>
+            </a:r>
+            <a:endParaRPr lang="en-US" altLang="zh-TW" sz="3200" dirty="0"/>
+          </a:p>
+          <a:p>
+            <a:r>
+              <a:rPr lang="en-US" altLang="zh-TW" sz="3200" dirty="0"/>
+              <a:t>2018</a:t>
+            </a:r>
+            <a:r>
+              <a:rPr lang="zh-TW" altLang="en-US" sz="3200" dirty="0"/>
+              <a:t>年台中集體結婚樂成宮月老加持首屆集團結婚，可能導致結婚人數增加</a:t>
+            </a:r>
+          </a:p>
+        </p:txBody>
+      </p:sp>
+    </p:spTree>
+    <p:extLst>
+      <p:ext uri="{BB962C8B-B14F-4D97-AF65-F5344CB8AC3E}">
+        <p14:creationId xmlns:p14="http://schemas.microsoft.com/office/powerpoint/2010/main" val="3872578960"/>
+      </p:ext>
+    </p:extLst>
+  </p:cSld>
+  <p:clrMapOvr>
+    <a:masterClrMapping/>
+  </p:clrMapOvr>
+</p:sld>
+</file>
+
+<file path=ppt/slides/slide16.xml><?xml version="1.0" encoding="utf-8"?>
 <p:sld xmlns:a="http://schemas.openxmlformats.org/drawingml/2006/main" xmlns:r="http://schemas.openxmlformats.org/officeDocument/2006/relationships" xmlns:p="http://schemas.openxmlformats.org/presentationml/2006/main">
   <p:cSld>
     <p:spTree>
@@ -12883,7 +13172,9 @@
         </p:nvSpPr>
         <p:spPr/>
         <p:txBody>
-          <a:bodyPr/>
+          <a:bodyPr>
+            <a:normAutofit/>
+          </a:bodyPr>
           <a:lstStyle/>
           <a:p>
             <a:r>
@@ -13098,6 +13389,226 @@
           <p:cNvPr id="2" name="標題 1">
             <a:extLst>
               <a:ext uri="{FF2B5EF4-FFF2-40B4-BE49-F238E27FC236}">
+                <a16:creationId xmlns:a16="http://schemas.microsoft.com/office/drawing/2014/main" id="{DDC92FA4-B0E2-A937-3F86-4223D103DA5E}"/>
+              </a:ext>
+            </a:extLst>
+          </p:cNvPr>
+          <p:cNvSpPr>
+            <a:spLocks noGrp="1"/>
+          </p:cNvSpPr>
+          <p:nvPr>
+            <p:ph type="title"/>
+          </p:nvPr>
+        </p:nvSpPr>
+        <p:spPr>
+          <a:xfrm>
+            <a:off x="1141413" y="327514"/>
+            <a:ext cx="9905998" cy="1478570"/>
+          </a:xfrm>
+        </p:spPr>
+        <p:txBody>
+          <a:bodyPr/>
+          <a:lstStyle/>
+          <a:p>
+            <a:pPr algn="ctr"/>
+            <a:r>
+              <a:rPr lang="zh-TW" altLang="en-US" b="1" dirty="0"/>
+              <a:t>目錄</a:t>
+            </a:r>
+          </a:p>
+        </p:txBody>
+      </p:sp>
+      <p:sp>
+        <p:nvSpPr>
+          <p:cNvPr id="3" name="內容版面配置區 2">
+            <a:extLst>
+              <a:ext uri="{FF2B5EF4-FFF2-40B4-BE49-F238E27FC236}">
+                <a16:creationId xmlns:a16="http://schemas.microsoft.com/office/drawing/2014/main" id="{768A62EC-246B-C898-9B89-AD036EA87B44}"/>
+              </a:ext>
+            </a:extLst>
+          </p:cNvPr>
+          <p:cNvSpPr>
+            <a:spLocks noGrp="1"/>
+          </p:cNvSpPr>
+          <p:nvPr>
+            <p:ph idx="1"/>
+          </p:nvPr>
+        </p:nvSpPr>
+        <p:spPr>
+          <a:xfrm>
+            <a:off x="1141413" y="1402819"/>
+            <a:ext cx="9905999" cy="4760913"/>
+          </a:xfrm>
+        </p:spPr>
+        <p:txBody>
+          <a:bodyPr>
+            <a:noAutofit/>
+          </a:bodyPr>
+          <a:lstStyle/>
+          <a:p>
+            <a:pPr marL="457200" indent="-457200">
+              <a:buFont typeface="+mj-lt"/>
+              <a:buAutoNum type="arabicPeriod"/>
+            </a:pPr>
+            <a:r>
+              <a:rPr lang="zh-TW" altLang="en-US" sz="2800" dirty="0"/>
+              <a:t>專題發想說明</a:t>
+            </a:r>
+            <a:r>
+              <a:rPr lang="en-US" altLang="zh-TW" sz="2800" dirty="0"/>
+              <a:t>----------------------------------------------</a:t>
+            </a:r>
+            <a:r>
+              <a:rPr lang="en-US" altLang="zh-TW" sz="3200" dirty="0"/>
+              <a:t>3P</a:t>
+            </a:r>
+          </a:p>
+          <a:p>
+            <a:pPr marL="457200" indent="-457200">
+              <a:buFont typeface="+mj-lt"/>
+              <a:buAutoNum type="arabicPeriod"/>
+            </a:pPr>
+            <a:r>
+              <a:rPr lang="zh-TW" altLang="en-US" sz="2800" dirty="0"/>
+              <a:t>收尋資料</a:t>
+            </a:r>
+            <a:r>
+              <a:rPr lang="en-US" altLang="zh-TW" sz="2800" dirty="0"/>
+              <a:t>----------------------------------------------------</a:t>
+            </a:r>
+            <a:r>
+              <a:rPr lang="en-US" altLang="zh-TW" sz="3200" dirty="0"/>
+              <a:t>4P</a:t>
+            </a:r>
+          </a:p>
+          <a:p>
+            <a:pPr marL="457200" indent="-457200">
+              <a:buFont typeface="+mj-lt"/>
+              <a:buAutoNum type="arabicPeriod"/>
+            </a:pPr>
+            <a:r>
+              <a:rPr lang="zh-TW" altLang="en-US" sz="2800" dirty="0"/>
+              <a:t>資料轉換</a:t>
+            </a:r>
+            <a:r>
+              <a:rPr lang="en-US" altLang="zh-TW" sz="2800" dirty="0"/>
+              <a:t>----------------------------------------------------</a:t>
+            </a:r>
+            <a:r>
+              <a:rPr lang="en-US" altLang="zh-TW" sz="3200" dirty="0"/>
+              <a:t>5P</a:t>
+            </a:r>
+          </a:p>
+          <a:p>
+            <a:pPr marL="457200" indent="-457200">
+              <a:buFont typeface="+mj-lt"/>
+              <a:buAutoNum type="arabicPeriod"/>
+            </a:pPr>
+            <a:r>
+              <a:rPr lang="zh-TW" altLang="en-US" sz="2800" dirty="0"/>
+              <a:t>資料儲存</a:t>
+            </a:r>
+            <a:r>
+              <a:rPr lang="en-US" altLang="zh-TW" sz="2800" dirty="0"/>
+              <a:t>----------------------------------------------------</a:t>
+            </a:r>
+            <a:r>
+              <a:rPr lang="en-US" altLang="zh-TW" sz="3200" dirty="0"/>
+              <a:t>6P</a:t>
+            </a:r>
+          </a:p>
+          <a:p>
+            <a:pPr marL="457200" indent="-457200">
+              <a:buFont typeface="+mj-lt"/>
+              <a:buAutoNum type="arabicPeriod"/>
+            </a:pPr>
+            <a:r>
+              <a:rPr lang="zh-TW" altLang="en-US" sz="2800" dirty="0"/>
+              <a:t>資料分析</a:t>
+            </a:r>
+            <a:r>
+              <a:rPr lang="en-US" altLang="zh-TW" sz="2800" dirty="0"/>
+              <a:t>----------------------------------------------------</a:t>
+            </a:r>
+            <a:r>
+              <a:rPr lang="en-US" altLang="zh-TW" sz="3200" dirty="0"/>
+              <a:t>7P</a:t>
+            </a:r>
+          </a:p>
+          <a:p>
+            <a:pPr marL="457200" indent="-457200">
+              <a:buFont typeface="+mj-lt"/>
+              <a:buAutoNum type="arabicPeriod"/>
+            </a:pPr>
+            <a:r>
+              <a:rPr lang="zh-TW" altLang="en-US" sz="2800" dirty="0"/>
+              <a:t>相關發現</a:t>
+            </a:r>
+            <a:r>
+              <a:rPr lang="en-US" altLang="zh-TW" sz="2800" dirty="0"/>
+              <a:t>---------------------------------------------------</a:t>
+            </a:r>
+            <a:r>
+              <a:rPr lang="en-US" altLang="zh-TW" sz="3200" dirty="0"/>
+              <a:t>15P</a:t>
+            </a:r>
+          </a:p>
+          <a:p>
+            <a:pPr marL="457200" indent="-457200">
+              <a:buFont typeface="+mj-lt"/>
+              <a:buAutoNum type="arabicPeriod"/>
+            </a:pPr>
+            <a:r>
+              <a:rPr lang="zh-TW" altLang="en-US" sz="2800" dirty="0"/>
+              <a:t>結論</a:t>
+            </a:r>
+            <a:r>
+              <a:rPr lang="en-US" altLang="zh-TW" sz="2800" dirty="0"/>
+              <a:t>---------------------------------------------------------</a:t>
+            </a:r>
+            <a:r>
+              <a:rPr lang="en-US" altLang="zh-TW" sz="3200" dirty="0"/>
+              <a:t>16P</a:t>
+            </a:r>
+            <a:endParaRPr lang="zh-TW" altLang="en-US" sz="3200" dirty="0"/>
+          </a:p>
+        </p:txBody>
+      </p:sp>
+    </p:spTree>
+    <p:extLst>
+      <p:ext uri="{BB962C8B-B14F-4D97-AF65-F5344CB8AC3E}">
+        <p14:creationId xmlns:p14="http://schemas.microsoft.com/office/powerpoint/2010/main" val="3516720609"/>
+      </p:ext>
+    </p:extLst>
+  </p:cSld>
+  <p:clrMapOvr>
+    <a:masterClrMapping/>
+  </p:clrMapOvr>
+</p:sld>
+</file>
+
+<file path=ppt/slides/slide3.xml><?xml version="1.0" encoding="utf-8"?>
+<p:sld xmlns:a="http://schemas.openxmlformats.org/drawingml/2006/main" xmlns:r="http://schemas.openxmlformats.org/officeDocument/2006/relationships" xmlns:p="http://schemas.openxmlformats.org/presentationml/2006/main">
+  <p:cSld>
+    <p:spTree>
+      <p:nvGrpSpPr>
+        <p:cNvPr id="1" name=""/>
+        <p:cNvGrpSpPr/>
+        <p:nvPr/>
+      </p:nvGrpSpPr>
+      <p:grpSpPr>
+        <a:xfrm>
+          <a:off x="0" y="0"/>
+          <a:ext cx="0" cy="0"/>
+          <a:chOff x="0" y="0"/>
+          <a:chExt cx="0" cy="0"/>
+        </a:xfrm>
+      </p:grpSpPr>
+      <p:sp>
+        <p:nvSpPr>
+          <p:cNvPr id="2" name="標題 1">
+            <a:extLst>
+              <a:ext uri="{FF2B5EF4-FFF2-40B4-BE49-F238E27FC236}">
                 <a16:creationId xmlns:a16="http://schemas.microsoft.com/office/drawing/2014/main" id="{43B64590-1A1E-2C50-C76E-030A7E146367}"/>
               </a:ext>
             </a:extLst>
@@ -13221,7 +13732,7 @@
 </p:sld>
 </file>
 
-<file path=ppt/slides/slide3.xml><?xml version="1.0" encoding="utf-8"?>
+<file path=ppt/slides/slide4.xml><?xml version="1.0" encoding="utf-8"?>
 <p:sld xmlns:a="http://schemas.openxmlformats.org/drawingml/2006/main" xmlns:r="http://schemas.openxmlformats.org/officeDocument/2006/relationships" xmlns:p="http://schemas.openxmlformats.org/presentationml/2006/main">
   <p:cSld>
     <p:spTree>
@@ -13513,7 +14024,7 @@
 </p:sld>
 </file>
 
-<file path=ppt/slides/slide4.xml><?xml version="1.0" encoding="utf-8"?>
+<file path=ppt/slides/slide5.xml><?xml version="1.0" encoding="utf-8"?>
 <p:sld xmlns:a="http://schemas.openxmlformats.org/drawingml/2006/main" xmlns:r="http://schemas.openxmlformats.org/officeDocument/2006/relationships" xmlns:p="http://schemas.openxmlformats.org/presentationml/2006/main">
   <p:cSld>
     <p:spTree>
@@ -13779,7 +14290,7 @@
 </p:sld>
 </file>
 
-<file path=ppt/slides/slide5.xml><?xml version="1.0" encoding="utf-8"?>
+<file path=ppt/slides/slide6.xml><?xml version="1.0" encoding="utf-8"?>
 <p:sld xmlns:a="http://schemas.openxmlformats.org/drawingml/2006/main" xmlns:r="http://schemas.openxmlformats.org/officeDocument/2006/relationships" xmlns:p="http://schemas.openxmlformats.org/presentationml/2006/main">
   <p:cSld>
     <p:spTree>
@@ -13998,7 +14509,7 @@
 </p:sld>
 </file>
 
-<file path=ppt/slides/slide6.xml><?xml version="1.0" encoding="utf-8"?>
+<file path=ppt/slides/slide7.xml><?xml version="1.0" encoding="utf-8"?>
 <p:sld xmlns:a="http://schemas.openxmlformats.org/drawingml/2006/main" xmlns:r="http://schemas.openxmlformats.org/officeDocument/2006/relationships" xmlns:p="http://schemas.openxmlformats.org/presentationml/2006/main">
   <p:cSld>
     <p:spTree>
@@ -14091,7 +14602,7 @@
 </p:sld>
 </file>
 
-<file path=ppt/slides/slide7.xml><?xml version="1.0" encoding="utf-8"?>
+<file path=ppt/slides/slide8.xml><?xml version="1.0" encoding="utf-8"?>
 <p:sld xmlns:a="http://schemas.openxmlformats.org/drawingml/2006/main" xmlns:r="http://schemas.openxmlformats.org/officeDocument/2006/relationships" xmlns:p="http://schemas.openxmlformats.org/presentationml/2006/main">
   <p:cSld>
     <p:spTree>
@@ -14180,7 +14691,7 @@
 </p:sld>
 </file>
 
-<file path=ppt/slides/slide8.xml><?xml version="1.0" encoding="utf-8"?>
+<file path=ppt/slides/slide9.xml><?xml version="1.0" encoding="utf-8"?>
 <p:sld xmlns:a="http://schemas.openxmlformats.org/drawingml/2006/main" xmlns:r="http://schemas.openxmlformats.org/officeDocument/2006/relationships" xmlns:p="http://schemas.openxmlformats.org/presentationml/2006/main">
   <p:cSld>
     <p:spTree>
@@ -14264,128 +14775,6 @@
     <p:extLst>
       <p:ext uri="{BB962C8B-B14F-4D97-AF65-F5344CB8AC3E}">
         <p14:creationId xmlns:p14="http://schemas.microsoft.com/office/powerpoint/2010/main" val="3448530304"/>
-      </p:ext>
-    </p:extLst>
-  </p:cSld>
-  <p:clrMapOvr>
-    <a:masterClrMapping/>
-  </p:clrMapOvr>
-</p:sld>
-</file>
-
-<file path=ppt/slides/slide9.xml><?xml version="1.0" encoding="utf-8"?>
-<p:sld xmlns:a="http://schemas.openxmlformats.org/drawingml/2006/main" xmlns:r="http://schemas.openxmlformats.org/officeDocument/2006/relationships" xmlns:p="http://schemas.openxmlformats.org/presentationml/2006/main">
-  <p:cSld>
-    <p:spTree>
-      <p:nvGrpSpPr>
-        <p:cNvPr id="1" name=""/>
-        <p:cNvGrpSpPr/>
-        <p:nvPr/>
-      </p:nvGrpSpPr>
-      <p:grpSpPr>
-        <a:xfrm>
-          <a:off x="0" y="0"/>
-          <a:ext cx="0" cy="0"/>
-          <a:chOff x="0" y="0"/>
-          <a:chExt cx="0" cy="0"/>
-        </a:xfrm>
-      </p:grpSpPr>
-      <p:sp>
-        <p:nvSpPr>
-          <p:cNvPr id="2" name="標題 1">
-            <a:extLst>
-              <a:ext uri="{FF2B5EF4-FFF2-40B4-BE49-F238E27FC236}">
-                <a16:creationId xmlns:a16="http://schemas.microsoft.com/office/drawing/2014/main" id="{1A19A397-BC6A-F52F-20FC-FB3EC17D1093}"/>
-              </a:ext>
-            </a:extLst>
-          </p:cNvPr>
-          <p:cNvSpPr>
-            <a:spLocks noGrp="1"/>
-          </p:cNvSpPr>
-          <p:nvPr>
-            <p:ph type="title"/>
-          </p:nvPr>
-        </p:nvSpPr>
-        <p:spPr/>
-        <p:txBody>
-          <a:bodyPr/>
-          <a:lstStyle/>
-          <a:p>
-            <a:pPr algn="ctr"/>
-            <a:r>
-              <a:rPr lang="zh-TW" altLang="en-US" dirty="0"/>
-              <a:t>離婚</a:t>
-            </a:r>
-            <a:r>
-              <a:rPr lang="en-US" altLang="zh-TW" dirty="0"/>
-              <a:t>-</a:t>
-            </a:r>
-            <a:r>
-              <a:rPr lang="zh-TW" altLang="en-US" dirty="0"/>
-              <a:t>條件為臺中市大甲區</a:t>
-            </a:r>
-          </a:p>
-        </p:txBody>
-      </p:sp>
-      <p:sp>
-        <p:nvSpPr>
-          <p:cNvPr id="7" name="內容版面配置區 6">
-            <a:extLst>
-              <a:ext uri="{FF2B5EF4-FFF2-40B4-BE49-F238E27FC236}">
-                <a16:creationId xmlns:a16="http://schemas.microsoft.com/office/drawing/2014/main" id="{D23F2302-F2DE-F7B0-6FA6-401BAD480B01}"/>
-              </a:ext>
-            </a:extLst>
-          </p:cNvPr>
-          <p:cNvSpPr>
-            <a:spLocks noGrp="1"/>
-          </p:cNvSpPr>
-          <p:nvPr>
-            <p:ph idx="1"/>
-          </p:nvPr>
-        </p:nvSpPr>
-        <p:spPr/>
-        <p:txBody>
-          <a:bodyPr/>
-          <a:lstStyle/>
-          <a:p>
-            <a:endParaRPr lang="zh-TW" altLang="en-US"/>
-          </a:p>
-        </p:txBody>
-      </p:sp>
-      <p:pic>
-        <p:nvPicPr>
-          <p:cNvPr id="8" name="圖片 7">
-            <a:extLst>
-              <a:ext uri="{FF2B5EF4-FFF2-40B4-BE49-F238E27FC236}">
-                <a16:creationId xmlns:a16="http://schemas.microsoft.com/office/drawing/2014/main" id="{3DBD2F39-9BDC-DFD8-044E-B47BA7AB0690}"/>
-              </a:ext>
-            </a:extLst>
-          </p:cNvPr>
-          <p:cNvPicPr>
-            <a:picLocks noChangeAspect="1"/>
-          </p:cNvPicPr>
-          <p:nvPr/>
-        </p:nvPicPr>
-        <p:blipFill>
-          <a:blip r:embed="rId2"/>
-          <a:stretch>
-            <a:fillRect/>
-          </a:stretch>
-        </p:blipFill>
-        <p:spPr>
-          <a:xfrm>
-            <a:off x="1905309" y="1611420"/>
-            <a:ext cx="8378206" cy="4767260"/>
-          </a:xfrm>
-          <a:prstGeom prst="rect">
-            <a:avLst/>
-          </a:prstGeom>
-        </p:spPr>
-      </p:pic>
-    </p:spTree>
-    <p:extLst>
-      <p:ext uri="{BB962C8B-B14F-4D97-AF65-F5344CB8AC3E}">
-        <p14:creationId xmlns:p14="http://schemas.microsoft.com/office/powerpoint/2010/main" val="1807351438"/>
       </p:ext>
     </p:extLst>
   </p:cSld>

--- a/那些人較易結婚或離婚.pptx
+++ b/那些人較易結婚或離婚.pptx
@@ -19,8 +19,10 @@
     <p:sldId id="266" r:id="rId13"/>
     <p:sldId id="267" r:id="rId14"/>
     <p:sldId id="268" r:id="rId15"/>
-    <p:sldId id="271" r:id="rId16"/>
-    <p:sldId id="269" r:id="rId17"/>
+    <p:sldId id="273" r:id="rId16"/>
+    <p:sldId id="272" r:id="rId17"/>
+    <p:sldId id="271" r:id="rId18"/>
+    <p:sldId id="269" r:id="rId19"/>
   </p:sldIdLst>
   <p:sldSz cx="12192000" cy="6858000"/>
   <p:notesSz cx="6858000" cy="9144000"/>
@@ -158,6 +160,8 @@
             <p14:sldId id="266"/>
             <p14:sldId id="267"/>
             <p14:sldId id="268"/>
+            <p14:sldId id="273"/>
+            <p14:sldId id="272"/>
           </p14:sldIdLst>
         </p14:section>
         <p14:section name="相關發現" id="{5B55F51C-A9B9-4D71-8E70-75811F1E4DBA}">
@@ -229,7 +233,7 @@
           <a:noFill/>
           <a:extLst>
             <a:ext uri="{909E8E84-426E-40dd-AFC4-6F175D3DCCD1}">
-              <a14:hiddenFill xmlns:a14="http://schemas.microsoft.com/office/drawing/2010/main" xmlns="">
+              <a14:hiddenFill xmlns="" xmlns:a14="http://schemas.microsoft.com/office/drawing/2010/main">
                 <a:solidFill>
                   <a:srgbClr val="FFFFFF"/>
                 </a:solidFill>
@@ -289,7 +293,7 @@
             </a:ln>
             <a:extLst>
               <a:ext uri="{91240B29-F687-4f45-9708-019B960494DF}">
-                <a14:hiddenLine xmlns:a14="http://schemas.microsoft.com/office/drawing/2010/main" xmlns="" w="9525">
+                <a14:hiddenLine xmlns="" xmlns:a14="http://schemas.microsoft.com/office/drawing/2010/main" w="9525">
                   <a:solidFill>
                     <a:srgbClr val="000000"/>
                   </a:solidFill>
@@ -379,7 +383,7 @@
             </a:ln>
             <a:extLst>
               <a:ext uri="{91240B29-F687-4f45-9708-019B960494DF}">
-                <a14:hiddenLine xmlns:a14="http://schemas.microsoft.com/office/drawing/2010/main" xmlns="" w="9525">
+                <a14:hiddenLine xmlns="" xmlns:a14="http://schemas.microsoft.com/office/drawing/2010/main" w="9525">
                   <a:solidFill>
                     <a:srgbClr val="000000"/>
                   </a:solidFill>
@@ -469,7 +473,7 @@
             </a:ln>
             <a:extLst>
               <a:ext uri="{91240B29-F687-4f45-9708-019B960494DF}">
-                <a14:hiddenLine xmlns:a14="http://schemas.microsoft.com/office/drawing/2010/main" xmlns="" w="9525">
+                <a14:hiddenLine xmlns="" xmlns:a14="http://schemas.microsoft.com/office/drawing/2010/main" w="9525">
                   <a:solidFill>
                     <a:srgbClr val="000000"/>
                   </a:solidFill>
@@ -503,7 +507,7 @@
             </a:ln>
             <a:extLst>
               <a:ext uri="{91240B29-F687-4f45-9708-019B960494DF}">
-                <a14:hiddenLine xmlns:a14="http://schemas.microsoft.com/office/drawing/2010/main" xmlns="" w="9525">
+                <a14:hiddenLine xmlns="" xmlns:a14="http://schemas.microsoft.com/office/drawing/2010/main" w="9525">
                   <a:solidFill>
                     <a:srgbClr val="000000"/>
                   </a:solidFill>
@@ -593,7 +597,7 @@
             </a:ln>
             <a:extLst>
               <a:ext uri="{91240B29-F687-4f45-9708-019B960494DF}">
-                <a14:hiddenLine xmlns:a14="http://schemas.microsoft.com/office/drawing/2010/main" xmlns="" w="9525">
+                <a14:hiddenLine xmlns="" xmlns:a14="http://schemas.microsoft.com/office/drawing/2010/main" w="9525">
                   <a:solidFill>
                     <a:srgbClr val="000000"/>
                   </a:solidFill>
@@ -655,7 +659,7 @@
             </a:ln>
             <a:extLst>
               <a:ext uri="{91240B29-F687-4f45-9708-019B960494DF}">
-                <a14:hiddenLine xmlns:a14="http://schemas.microsoft.com/office/drawing/2010/main" xmlns="" w="9525">
+                <a14:hiddenLine xmlns="" xmlns:a14="http://schemas.microsoft.com/office/drawing/2010/main" w="9525">
                   <a:solidFill>
                     <a:srgbClr val="000000"/>
                   </a:solidFill>
@@ -717,7 +721,7 @@
             </a:ln>
             <a:extLst>
               <a:ext uri="{91240B29-F687-4f45-9708-019B960494DF}">
-                <a14:hiddenLine xmlns:a14="http://schemas.microsoft.com/office/drawing/2010/main" xmlns="" w="9525">
+                <a14:hiddenLine xmlns="" xmlns:a14="http://schemas.microsoft.com/office/drawing/2010/main" w="9525">
                   <a:solidFill>
                     <a:srgbClr val="000000"/>
                   </a:solidFill>
@@ -807,7 +811,7 @@
             </a:ln>
             <a:extLst>
               <a:ext uri="{91240B29-F687-4f45-9708-019B960494DF}">
-                <a14:hiddenLine xmlns:a14="http://schemas.microsoft.com/office/drawing/2010/main" xmlns="" w="9525">
+                <a14:hiddenLine xmlns="" xmlns:a14="http://schemas.microsoft.com/office/drawing/2010/main" w="9525">
                   <a:solidFill>
                     <a:srgbClr val="000000"/>
                   </a:solidFill>
@@ -869,7 +873,7 @@
             </a:ln>
             <a:extLst>
               <a:ext uri="{91240B29-F687-4f45-9708-019B960494DF}">
-                <a14:hiddenLine xmlns:a14="http://schemas.microsoft.com/office/drawing/2010/main" xmlns="" w="9525">
+                <a14:hiddenLine xmlns="" xmlns:a14="http://schemas.microsoft.com/office/drawing/2010/main" w="9525">
                   <a:solidFill>
                     <a:srgbClr val="000000"/>
                   </a:solidFill>
@@ -931,7 +935,7 @@
             </a:ln>
             <a:extLst>
               <a:ext uri="{91240B29-F687-4f45-9708-019B960494DF}">
-                <a14:hiddenLine xmlns:a14="http://schemas.microsoft.com/office/drawing/2010/main" xmlns="" w="9525">
+                <a14:hiddenLine xmlns="" xmlns:a14="http://schemas.microsoft.com/office/drawing/2010/main" w="9525">
                   <a:solidFill>
                     <a:srgbClr val="000000"/>
                   </a:solidFill>
@@ -1021,7 +1025,7 @@
             </a:ln>
             <a:extLst>
               <a:ext uri="{91240B29-F687-4f45-9708-019B960494DF}">
-                <a14:hiddenLine xmlns:a14="http://schemas.microsoft.com/office/drawing/2010/main" xmlns="" w="9525">
+                <a14:hiddenLine xmlns="" xmlns:a14="http://schemas.microsoft.com/office/drawing/2010/main" w="9525">
                   <a:solidFill>
                     <a:srgbClr val="000000"/>
                   </a:solidFill>
@@ -1111,7 +1115,7 @@
             </a:ln>
             <a:extLst>
               <a:ext uri="{91240B29-F687-4f45-9708-019B960494DF}">
-                <a14:hiddenLine xmlns:a14="http://schemas.microsoft.com/office/drawing/2010/main" xmlns="" w="9525">
+                <a14:hiddenLine xmlns="" xmlns:a14="http://schemas.microsoft.com/office/drawing/2010/main" w="9525">
                   <a:solidFill>
                     <a:srgbClr val="000000"/>
                   </a:solidFill>
@@ -1173,7 +1177,7 @@
             </a:ln>
             <a:extLst>
               <a:ext uri="{91240B29-F687-4f45-9708-019B960494DF}">
-                <a14:hiddenLine xmlns:a14="http://schemas.microsoft.com/office/drawing/2010/main" xmlns="" w="9525">
+                <a14:hiddenLine xmlns="" xmlns:a14="http://schemas.microsoft.com/office/drawing/2010/main" w="9525">
                   <a:solidFill>
                     <a:srgbClr val="000000"/>
                   </a:solidFill>
@@ -1283,7 +1287,7 @@
             </a:ln>
             <a:extLst>
               <a:ext uri="{91240B29-F687-4f45-9708-019B960494DF}">
-                <a14:hiddenLine xmlns:a14="http://schemas.microsoft.com/office/drawing/2010/main" xmlns="" w="9525">
+                <a14:hiddenLine xmlns="" xmlns:a14="http://schemas.microsoft.com/office/drawing/2010/main" w="9525">
                   <a:solidFill>
                     <a:srgbClr val="000000"/>
                   </a:solidFill>
@@ -1345,7 +1349,7 @@
             </a:ln>
             <a:extLst>
               <a:ext uri="{91240B29-F687-4f45-9708-019B960494DF}">
-                <a14:hiddenLine xmlns:a14="http://schemas.microsoft.com/office/drawing/2010/main" xmlns="" w="9525">
+                <a14:hiddenLine xmlns="" xmlns:a14="http://schemas.microsoft.com/office/drawing/2010/main" w="9525">
                   <a:solidFill>
                     <a:srgbClr val="000000"/>
                   </a:solidFill>
@@ -1435,7 +1439,7 @@
             </a:ln>
             <a:extLst>
               <a:ext uri="{91240B29-F687-4f45-9708-019B960494DF}">
-                <a14:hiddenLine xmlns:a14="http://schemas.microsoft.com/office/drawing/2010/main" xmlns="" w="9525">
+                <a14:hiddenLine xmlns="" xmlns:a14="http://schemas.microsoft.com/office/drawing/2010/main" w="9525">
                   <a:solidFill>
                     <a:srgbClr val="000000"/>
                   </a:solidFill>
@@ -1525,7 +1529,7 @@
             </a:ln>
             <a:extLst>
               <a:ext uri="{91240B29-F687-4f45-9708-019B960494DF}">
-                <a14:hiddenLine xmlns:a14="http://schemas.microsoft.com/office/drawing/2010/main" xmlns="" w="9525">
+                <a14:hiddenLine xmlns="" xmlns:a14="http://schemas.microsoft.com/office/drawing/2010/main" w="9525">
                   <a:solidFill>
                     <a:srgbClr val="000000"/>
                   </a:solidFill>
@@ -1587,7 +1591,7 @@
             </a:ln>
             <a:extLst>
               <a:ext uri="{91240B29-F687-4f45-9708-019B960494DF}">
-                <a14:hiddenLine xmlns:a14="http://schemas.microsoft.com/office/drawing/2010/main" xmlns="" w="9525">
+                <a14:hiddenLine xmlns="" xmlns:a14="http://schemas.microsoft.com/office/drawing/2010/main" w="9525">
                   <a:solidFill>
                     <a:srgbClr val="000000"/>
                   </a:solidFill>
@@ -1677,7 +1681,7 @@
             </a:ln>
             <a:extLst>
               <a:ext uri="{91240B29-F687-4f45-9708-019B960494DF}">
-                <a14:hiddenLine xmlns:a14="http://schemas.microsoft.com/office/drawing/2010/main" xmlns="" w="9525">
+                <a14:hiddenLine xmlns="" xmlns:a14="http://schemas.microsoft.com/office/drawing/2010/main" w="9525">
                   <a:solidFill>
                     <a:srgbClr val="000000"/>
                   </a:solidFill>
@@ -1767,7 +1771,7 @@
             </a:ln>
             <a:extLst>
               <a:ext uri="{91240B29-F687-4f45-9708-019B960494DF}">
-                <a14:hiddenLine xmlns:a14="http://schemas.microsoft.com/office/drawing/2010/main" xmlns="" w="9525">
+                <a14:hiddenLine xmlns="" xmlns:a14="http://schemas.microsoft.com/office/drawing/2010/main" w="9525">
                   <a:solidFill>
                     <a:srgbClr val="000000"/>
                   </a:solidFill>
@@ -1823,7 +1827,7 @@
             </a:ln>
             <a:extLst>
               <a:ext uri="{91240B29-F687-4f45-9708-019B960494DF}">
-                <a14:hiddenLine xmlns:a14="http://schemas.microsoft.com/office/drawing/2010/main" xmlns="" w="9525">
+                <a14:hiddenLine xmlns="" xmlns:a14="http://schemas.microsoft.com/office/drawing/2010/main" w="9525">
                   <a:solidFill>
                     <a:srgbClr val="000000"/>
                   </a:solidFill>
@@ -1913,7 +1917,7 @@
             </a:ln>
             <a:extLst>
               <a:ext uri="{91240B29-F687-4f45-9708-019B960494DF}">
-                <a14:hiddenLine xmlns:a14="http://schemas.microsoft.com/office/drawing/2010/main" xmlns="" w="9525">
+                <a14:hiddenLine xmlns="" xmlns:a14="http://schemas.microsoft.com/office/drawing/2010/main" w="9525">
                   <a:solidFill>
                     <a:srgbClr val="000000"/>
                   </a:solidFill>
@@ -1969,7 +1973,7 @@
             </a:ln>
             <a:extLst>
               <a:ext uri="{91240B29-F687-4f45-9708-019B960494DF}">
-                <a14:hiddenLine xmlns:a14="http://schemas.microsoft.com/office/drawing/2010/main" xmlns="" w="9525">
+                <a14:hiddenLine xmlns="" xmlns:a14="http://schemas.microsoft.com/office/drawing/2010/main" w="9525">
                   <a:solidFill>
                     <a:srgbClr val="000000"/>
                   </a:solidFill>
@@ -2059,7 +2063,7 @@
             </a:ln>
             <a:extLst>
               <a:ext uri="{91240B29-F687-4f45-9708-019B960494DF}">
-                <a14:hiddenLine xmlns:a14="http://schemas.microsoft.com/office/drawing/2010/main" xmlns="" w="9525">
+                <a14:hiddenLine xmlns="" xmlns:a14="http://schemas.microsoft.com/office/drawing/2010/main" w="9525">
                   <a:solidFill>
                     <a:srgbClr val="000000"/>
                   </a:solidFill>
@@ -2127,7 +2131,7 @@
             </a:ln>
             <a:extLst>
               <a:ext uri="{91240B29-F687-4f45-9708-019B960494DF}">
-                <a14:hiddenLine xmlns:a14="http://schemas.microsoft.com/office/drawing/2010/main" xmlns="" w="9525">
+                <a14:hiddenLine xmlns="" xmlns:a14="http://schemas.microsoft.com/office/drawing/2010/main" w="9525">
                   <a:solidFill>
                     <a:srgbClr val="000000"/>
                   </a:solidFill>
@@ -2217,7 +2221,7 @@
             </a:ln>
             <a:extLst>
               <a:ext uri="{91240B29-F687-4f45-9708-019B960494DF}">
-                <a14:hiddenLine xmlns:a14="http://schemas.microsoft.com/office/drawing/2010/main" xmlns="" w="9525">
+                <a14:hiddenLine xmlns="" xmlns:a14="http://schemas.microsoft.com/office/drawing/2010/main" w="9525">
                   <a:solidFill>
                     <a:srgbClr val="000000"/>
                   </a:solidFill>
@@ -2285,7 +2289,7 @@
             </a:ln>
             <a:extLst>
               <a:ext uri="{91240B29-F687-4f45-9708-019B960494DF}">
-                <a14:hiddenLine xmlns:a14="http://schemas.microsoft.com/office/drawing/2010/main" xmlns="" w="9525">
+                <a14:hiddenLine xmlns="" xmlns:a14="http://schemas.microsoft.com/office/drawing/2010/main" w="9525">
                   <a:solidFill>
                     <a:srgbClr val="000000"/>
                   </a:solidFill>
@@ -2375,7 +2379,7 @@
             </a:ln>
             <a:extLst>
               <a:ext uri="{91240B29-F687-4f45-9708-019B960494DF}">
-                <a14:hiddenLine xmlns:a14="http://schemas.microsoft.com/office/drawing/2010/main" xmlns="" w="9525">
+                <a14:hiddenLine xmlns="" xmlns:a14="http://schemas.microsoft.com/office/drawing/2010/main" w="9525">
                   <a:solidFill>
                     <a:srgbClr val="000000"/>
                   </a:solidFill>
@@ -2409,7 +2413,7 @@
             </a:ln>
             <a:extLst>
               <a:ext uri="{91240B29-F687-4f45-9708-019B960494DF}">
-                <a14:hiddenLine xmlns:a14="http://schemas.microsoft.com/office/drawing/2010/main" xmlns="" w="9525">
+                <a14:hiddenLine xmlns="" xmlns:a14="http://schemas.microsoft.com/office/drawing/2010/main" w="9525">
                   <a:solidFill>
                     <a:srgbClr val="000000"/>
                   </a:solidFill>
@@ -2499,7 +2503,7 @@
             </a:ln>
             <a:extLst>
               <a:ext uri="{91240B29-F687-4f45-9708-019B960494DF}">
-                <a14:hiddenLine xmlns:a14="http://schemas.microsoft.com/office/drawing/2010/main" xmlns="" w="9525">
+                <a14:hiddenLine xmlns="" xmlns:a14="http://schemas.microsoft.com/office/drawing/2010/main" w="9525">
                   <a:solidFill>
                     <a:srgbClr val="000000"/>
                   </a:solidFill>
@@ -2561,7 +2565,7 @@
             </a:ln>
             <a:extLst>
               <a:ext uri="{91240B29-F687-4f45-9708-019B960494DF}">
-                <a14:hiddenLine xmlns:a14="http://schemas.microsoft.com/office/drawing/2010/main" xmlns="" w="9525">
+                <a14:hiddenLine xmlns="" xmlns:a14="http://schemas.microsoft.com/office/drawing/2010/main" w="9525">
                   <a:solidFill>
                     <a:srgbClr val="000000"/>
                   </a:solidFill>
@@ -2623,7 +2627,7 @@
             </a:ln>
             <a:extLst>
               <a:ext uri="{91240B29-F687-4f45-9708-019B960494DF}">
-                <a14:hiddenLine xmlns:a14="http://schemas.microsoft.com/office/drawing/2010/main" xmlns="" w="9525">
+                <a14:hiddenLine xmlns="" xmlns:a14="http://schemas.microsoft.com/office/drawing/2010/main" w="9525">
                   <a:solidFill>
                     <a:srgbClr val="000000"/>
                   </a:solidFill>
@@ -2713,7 +2717,7 @@
             </a:ln>
             <a:extLst>
               <a:ext uri="{91240B29-F687-4f45-9708-019B960494DF}">
-                <a14:hiddenLine xmlns:a14="http://schemas.microsoft.com/office/drawing/2010/main" xmlns="" w="9525">
+                <a14:hiddenLine xmlns="" xmlns:a14="http://schemas.microsoft.com/office/drawing/2010/main" w="9525">
                   <a:solidFill>
                     <a:srgbClr val="000000"/>
                   </a:solidFill>
@@ -2781,7 +2785,7 @@
             </a:ln>
             <a:extLst>
               <a:ext uri="{91240B29-F687-4f45-9708-019B960494DF}">
-                <a14:hiddenLine xmlns:a14="http://schemas.microsoft.com/office/drawing/2010/main" xmlns="" w="9525">
+                <a14:hiddenLine xmlns="" xmlns:a14="http://schemas.microsoft.com/office/drawing/2010/main" w="9525">
                   <a:solidFill>
                     <a:srgbClr val="000000"/>
                   </a:solidFill>
@@ -2843,7 +2847,7 @@
             </a:ln>
             <a:extLst>
               <a:ext uri="{91240B29-F687-4f45-9708-019B960494DF}">
-                <a14:hiddenLine xmlns:a14="http://schemas.microsoft.com/office/drawing/2010/main" xmlns="" w="9525">
+                <a14:hiddenLine xmlns="" xmlns:a14="http://schemas.microsoft.com/office/drawing/2010/main" w="9525">
                   <a:solidFill>
                     <a:srgbClr val="000000"/>
                   </a:solidFill>
@@ -2933,7 +2937,7 @@
             </a:ln>
             <a:extLst>
               <a:ext uri="{91240B29-F687-4f45-9708-019B960494DF}">
-                <a14:hiddenLine xmlns:a14="http://schemas.microsoft.com/office/drawing/2010/main" xmlns="" w="9525">
+                <a14:hiddenLine xmlns="" xmlns:a14="http://schemas.microsoft.com/office/drawing/2010/main" w="9525">
                   <a:solidFill>
                     <a:srgbClr val="000000"/>
                   </a:solidFill>
@@ -2995,7 +2999,7 @@
             </a:ln>
             <a:extLst>
               <a:ext uri="{91240B29-F687-4f45-9708-019B960494DF}">
-                <a14:hiddenLine xmlns:a14="http://schemas.microsoft.com/office/drawing/2010/main" xmlns="" w="9525">
+                <a14:hiddenLine xmlns="" xmlns:a14="http://schemas.microsoft.com/office/drawing/2010/main" w="9525">
                   <a:solidFill>
                     <a:srgbClr val="000000"/>
                   </a:solidFill>
@@ -3085,7 +3089,7 @@
             </a:ln>
             <a:extLst>
               <a:ext uri="{91240B29-F687-4f45-9708-019B960494DF}">
-                <a14:hiddenLine xmlns:a14="http://schemas.microsoft.com/office/drawing/2010/main" xmlns="" w="9525">
+                <a14:hiddenLine xmlns="" xmlns:a14="http://schemas.microsoft.com/office/drawing/2010/main" w="9525">
                   <a:solidFill>
                     <a:srgbClr val="000000"/>
                   </a:solidFill>
@@ -3147,7 +3151,7 @@
             </a:ln>
             <a:extLst>
               <a:ext uri="{91240B29-F687-4f45-9708-019B960494DF}">
-                <a14:hiddenLine xmlns:a14="http://schemas.microsoft.com/office/drawing/2010/main" xmlns="" w="9525">
+                <a14:hiddenLine xmlns="" xmlns:a14="http://schemas.microsoft.com/office/drawing/2010/main" w="9525">
                   <a:solidFill>
                     <a:srgbClr val="000000"/>
                   </a:solidFill>
@@ -3237,7 +3241,7 @@
             </a:ln>
             <a:extLst>
               <a:ext uri="{91240B29-F687-4f45-9708-019B960494DF}">
-                <a14:hiddenLine xmlns:a14="http://schemas.microsoft.com/office/drawing/2010/main" xmlns="" w="9525">
+                <a14:hiddenLine xmlns="" xmlns:a14="http://schemas.microsoft.com/office/drawing/2010/main" w="9525">
                   <a:solidFill>
                     <a:srgbClr val="000000"/>
                   </a:solidFill>
@@ -3271,7 +3275,7 @@
             </a:ln>
             <a:extLst>
               <a:ext uri="{91240B29-F687-4f45-9708-019B960494DF}">
-                <a14:hiddenLine xmlns:a14="http://schemas.microsoft.com/office/drawing/2010/main" xmlns="" w="9525">
+                <a14:hiddenLine xmlns="" xmlns:a14="http://schemas.microsoft.com/office/drawing/2010/main" w="9525">
                   <a:solidFill>
                     <a:srgbClr val="000000"/>
                   </a:solidFill>
@@ -3336,7 +3340,7 @@
             </a:ln>
             <a:extLst>
               <a:ext uri="{91240B29-F687-4f45-9708-019B960494DF}">
-                <a14:hiddenLine xmlns:a14="http://schemas.microsoft.com/office/drawing/2010/main" xmlns="" w="9525">
+                <a14:hiddenLine xmlns="" xmlns:a14="http://schemas.microsoft.com/office/drawing/2010/main" w="9525">
                   <a:solidFill>
                     <a:srgbClr val="000000"/>
                   </a:solidFill>
@@ -3426,7 +3430,7 @@
             </a:ln>
             <a:extLst>
               <a:ext uri="{91240B29-F687-4f45-9708-019B960494DF}">
-                <a14:hiddenLine xmlns:a14="http://schemas.microsoft.com/office/drawing/2010/main" xmlns="" w="9525">
+                <a14:hiddenLine xmlns="" xmlns:a14="http://schemas.microsoft.com/office/drawing/2010/main" w="9525">
                   <a:solidFill>
                     <a:srgbClr val="000000"/>
                   </a:solidFill>
@@ -3488,7 +3492,7 @@
             </a:ln>
             <a:extLst>
               <a:ext uri="{91240B29-F687-4f45-9708-019B960494DF}">
-                <a14:hiddenLine xmlns:a14="http://schemas.microsoft.com/office/drawing/2010/main" xmlns="" w="9525">
+                <a14:hiddenLine xmlns="" xmlns:a14="http://schemas.microsoft.com/office/drawing/2010/main" w="9525">
                   <a:solidFill>
                     <a:srgbClr val="000000"/>
                   </a:solidFill>
@@ -3578,7 +3582,7 @@
             </a:ln>
             <a:extLst>
               <a:ext uri="{91240B29-F687-4f45-9708-019B960494DF}">
-                <a14:hiddenLine xmlns:a14="http://schemas.microsoft.com/office/drawing/2010/main" xmlns="" w="9525">
+                <a14:hiddenLine xmlns="" xmlns:a14="http://schemas.microsoft.com/office/drawing/2010/main" w="9525">
                   <a:solidFill>
                     <a:srgbClr val="000000"/>
                   </a:solidFill>
@@ -3668,7 +3672,7 @@
             </a:ln>
             <a:extLst>
               <a:ext uri="{91240B29-F687-4f45-9708-019B960494DF}">
-                <a14:hiddenLine xmlns:a14="http://schemas.microsoft.com/office/drawing/2010/main" xmlns="" w="9525">
+                <a14:hiddenLine xmlns="" xmlns:a14="http://schemas.microsoft.com/office/drawing/2010/main" w="9525">
                   <a:solidFill>
                     <a:srgbClr val="000000"/>
                   </a:solidFill>
@@ -3733,7 +3737,7 @@
             </a:ln>
             <a:extLst>
               <a:ext uri="{91240B29-F687-4f45-9708-019B960494DF}">
-                <a14:hiddenLine xmlns:a14="http://schemas.microsoft.com/office/drawing/2010/main" xmlns="" w="9525">
+                <a14:hiddenLine xmlns="" xmlns:a14="http://schemas.microsoft.com/office/drawing/2010/main" w="9525">
                   <a:solidFill>
                     <a:srgbClr val="000000"/>
                   </a:solidFill>
@@ -3795,7 +3799,7 @@
             </a:ln>
             <a:extLst>
               <a:ext uri="{91240B29-F687-4f45-9708-019B960494DF}">
-                <a14:hiddenLine xmlns:a14="http://schemas.microsoft.com/office/drawing/2010/main" xmlns="" w="9525">
+                <a14:hiddenLine xmlns="" xmlns:a14="http://schemas.microsoft.com/office/drawing/2010/main" w="9525">
                   <a:solidFill>
                     <a:srgbClr val="000000"/>
                   </a:solidFill>
@@ -3885,7 +3889,7 @@
             </a:ln>
             <a:extLst>
               <a:ext uri="{91240B29-F687-4f45-9708-019B960494DF}">
-                <a14:hiddenLine xmlns:a14="http://schemas.microsoft.com/office/drawing/2010/main" xmlns="" w="9525">
+                <a14:hiddenLine xmlns="" xmlns:a14="http://schemas.microsoft.com/office/drawing/2010/main" w="9525">
                   <a:solidFill>
                     <a:srgbClr val="000000"/>
                   </a:solidFill>
@@ -3975,7 +3979,7 @@
             </a:ln>
             <a:extLst>
               <a:ext uri="{91240B29-F687-4f45-9708-019B960494DF}">
-                <a14:hiddenLine xmlns:a14="http://schemas.microsoft.com/office/drawing/2010/main" xmlns="" w="9525">
+                <a14:hiddenLine xmlns="" xmlns:a14="http://schemas.microsoft.com/office/drawing/2010/main" w="9525">
                   <a:solidFill>
                     <a:srgbClr val="000000"/>
                   </a:solidFill>
@@ -4037,7 +4041,7 @@
             </a:ln>
             <a:extLst>
               <a:ext uri="{91240B29-F687-4f45-9708-019B960494DF}">
-                <a14:hiddenLine xmlns:a14="http://schemas.microsoft.com/office/drawing/2010/main" xmlns="" w="9525">
+                <a14:hiddenLine xmlns="" xmlns:a14="http://schemas.microsoft.com/office/drawing/2010/main" w="9525">
                   <a:solidFill>
                     <a:srgbClr val="000000"/>
                   </a:solidFill>
@@ -4157,7 +4161,7 @@
             </a:ln>
             <a:extLst>
               <a:ext uri="{91240B29-F687-4f45-9708-019B960494DF}">
-                <a14:hiddenLine xmlns:a14="http://schemas.microsoft.com/office/drawing/2010/main" xmlns="" w="9525">
+                <a14:hiddenLine xmlns="" xmlns:a14="http://schemas.microsoft.com/office/drawing/2010/main" w="9525">
                   <a:solidFill>
                     <a:srgbClr val="000000"/>
                   </a:solidFill>
@@ -4225,7 +4229,7 @@
             </a:ln>
             <a:extLst>
               <a:ext uri="{91240B29-F687-4f45-9708-019B960494DF}">
-                <a14:hiddenLine xmlns:a14="http://schemas.microsoft.com/office/drawing/2010/main" xmlns="" w="9525">
+                <a14:hiddenLine xmlns="" xmlns:a14="http://schemas.microsoft.com/office/drawing/2010/main" w="9525">
                   <a:solidFill>
                     <a:srgbClr val="000000"/>
                   </a:solidFill>
@@ -4315,7 +4319,7 @@
             </a:ln>
             <a:extLst>
               <a:ext uri="{91240B29-F687-4f45-9708-019B960494DF}">
-                <a14:hiddenLine xmlns:a14="http://schemas.microsoft.com/office/drawing/2010/main" xmlns="" w="9525">
+                <a14:hiddenLine xmlns="" xmlns:a14="http://schemas.microsoft.com/office/drawing/2010/main" w="9525">
                   <a:solidFill>
                     <a:srgbClr val="000000"/>
                   </a:solidFill>
@@ -4455,7 +4459,7 @@
           <a:p>
             <a:fld id="{48A87A34-81AB-432B-8DAE-1953F412C126}" type="datetimeFigureOut">
               <a:rPr lang="en-US" dirty="0"/>
-              <a:t>4/14/2026</a:t>
+              <a:t>4/15/2026</a:t>
             </a:fld>
             <a:endParaRPr lang="en-US" dirty="0"/>
           </a:p>
@@ -4717,7 +4721,7 @@
           <a:p>
             <a:fld id="{48A87A34-81AB-432B-8DAE-1953F412C126}" type="datetimeFigureOut">
               <a:rPr lang="en-US" dirty="0"/>
-              <a:t>4/14/2026</a:t>
+              <a:t>4/15/2026</a:t>
             </a:fld>
             <a:endParaRPr lang="en-US" dirty="0"/>
           </a:p>
@@ -4908,7 +4912,7 @@
           <a:p>
             <a:fld id="{48A87A34-81AB-432B-8DAE-1953F412C126}" type="datetimeFigureOut">
               <a:rPr lang="en-US" dirty="0"/>
-              <a:t>4/14/2026</a:t>
+              <a:t>4/15/2026</a:t>
             </a:fld>
             <a:endParaRPr lang="en-US" dirty="0"/>
           </a:p>
@@ -5166,7 +5170,7 @@
           <a:p>
             <a:fld id="{48A87A34-81AB-432B-8DAE-1953F412C126}" type="datetimeFigureOut">
               <a:rPr lang="en-US" dirty="0"/>
-              <a:t>4/14/2026</a:t>
+              <a:t>4/15/2026</a:t>
             </a:fld>
             <a:endParaRPr lang="en-US" dirty="0"/>
           </a:p>
@@ -5595,7 +5599,7 @@
           <a:p>
             <a:fld id="{48A87A34-81AB-432B-8DAE-1953F412C126}" type="datetimeFigureOut">
               <a:rPr lang="en-US" dirty="0"/>
-              <a:t>4/14/2026</a:t>
+              <a:t>4/15/2026</a:t>
             </a:fld>
             <a:endParaRPr lang="en-US" dirty="0"/>
           </a:p>
@@ -6136,7 +6140,7 @@
           <a:p>
             <a:fld id="{48A87A34-81AB-432B-8DAE-1953F412C126}" type="datetimeFigureOut">
               <a:rPr lang="en-US" dirty="0"/>
-              <a:t>4/14/2026</a:t>
+              <a:t>4/15/2026</a:t>
             </a:fld>
             <a:endParaRPr lang="en-US" dirty="0"/>
           </a:p>
@@ -6851,7 +6855,7 @@
           <a:p>
             <a:fld id="{48A87A34-81AB-432B-8DAE-1953F412C126}" type="datetimeFigureOut">
               <a:rPr lang="en-US" dirty="0"/>
-              <a:t>4/14/2026</a:t>
+              <a:t>4/15/2026</a:t>
             </a:fld>
             <a:endParaRPr lang="en-US" dirty="0"/>
           </a:p>
@@ -7016,7 +7020,7 @@
           <a:p>
             <a:fld id="{48A87A34-81AB-432B-8DAE-1953F412C126}" type="datetimeFigureOut">
               <a:rPr lang="en-US" dirty="0"/>
-              <a:t>4/14/2026</a:t>
+              <a:t>4/15/2026</a:t>
             </a:fld>
             <a:endParaRPr lang="en-US" dirty="0"/>
           </a:p>
@@ -7191,7 +7195,7 @@
           <a:p>
             <a:fld id="{48A87A34-81AB-432B-8DAE-1953F412C126}" type="datetimeFigureOut">
               <a:rPr lang="en-US" dirty="0"/>
-              <a:t>4/14/2026</a:t>
+              <a:t>4/15/2026</a:t>
             </a:fld>
             <a:endParaRPr lang="en-US" dirty="0"/>
           </a:p>
@@ -7356,7 +7360,7 @@
           <a:p>
             <a:fld id="{48A87A34-81AB-432B-8DAE-1953F412C126}" type="datetimeFigureOut">
               <a:rPr lang="en-US" dirty="0"/>
-              <a:t>4/14/2026</a:t>
+              <a:t>4/15/2026</a:t>
             </a:fld>
             <a:endParaRPr lang="en-US" dirty="0"/>
           </a:p>
@@ -7601,7 +7605,7 @@
           <a:p>
             <a:fld id="{48A87A34-81AB-432B-8DAE-1953F412C126}" type="datetimeFigureOut">
               <a:rPr lang="en-US" dirty="0"/>
-              <a:t>4/14/2026</a:t>
+              <a:t>4/15/2026</a:t>
             </a:fld>
             <a:endParaRPr lang="en-US" dirty="0"/>
           </a:p>
@@ -7828,7 +7832,7 @@
           <a:p>
             <a:fld id="{48A87A34-81AB-432B-8DAE-1953F412C126}" type="datetimeFigureOut">
               <a:rPr lang="en-US" dirty="0"/>
-              <a:t>4/14/2026</a:t>
+              <a:t>4/15/2026</a:t>
             </a:fld>
             <a:endParaRPr lang="en-US" dirty="0"/>
           </a:p>
@@ -8204,7 +8208,7 @@
           <a:p>
             <a:fld id="{48A87A34-81AB-432B-8DAE-1953F412C126}" type="datetimeFigureOut">
               <a:rPr lang="en-US" dirty="0"/>
-              <a:t>4/14/2026</a:t>
+              <a:t>4/15/2026</a:t>
             </a:fld>
             <a:endParaRPr lang="en-US" dirty="0"/>
           </a:p>
@@ -8317,7 +8321,7 @@
           <a:p>
             <a:fld id="{48A87A34-81AB-432B-8DAE-1953F412C126}" type="datetimeFigureOut">
               <a:rPr lang="en-US" dirty="0"/>
-              <a:t>4/14/2026</a:t>
+              <a:t>4/15/2026</a:t>
             </a:fld>
             <a:endParaRPr lang="en-US" dirty="0"/>
           </a:p>
@@ -8407,7 +8411,7 @@
           <a:p>
             <a:fld id="{48A87A34-81AB-432B-8DAE-1953F412C126}" type="datetimeFigureOut">
               <a:rPr lang="en-US" dirty="0"/>
-              <a:t>4/14/2026</a:t>
+              <a:t>4/15/2026</a:t>
             </a:fld>
             <a:endParaRPr lang="en-US" dirty="0"/>
           </a:p>
@@ -8651,7 +8655,7 @@
           <a:p>
             <a:fld id="{48A87A34-81AB-432B-8DAE-1953F412C126}" type="datetimeFigureOut">
               <a:rPr lang="en-US" dirty="0"/>
-              <a:t>4/14/2026</a:t>
+              <a:t>4/15/2026</a:t>
             </a:fld>
             <a:endParaRPr lang="en-US" dirty="0"/>
           </a:p>
@@ -8926,7 +8930,7 @@
           <a:p>
             <a:fld id="{48A87A34-81AB-432B-8DAE-1953F412C126}" type="datetimeFigureOut">
               <a:rPr lang="en-US" dirty="0"/>
-              <a:t>4/14/2026</a:t>
+              <a:t>4/15/2026</a:t>
             </a:fld>
             <a:endParaRPr lang="en-US" dirty="0"/>
           </a:p>
@@ -9037,7 +9041,7 @@
           <a:noFill/>
           <a:extLst>
             <a:ext uri="{909E8E84-426E-40dd-AFC4-6F175D3DCCD1}">
-              <a14:hiddenFill xmlns:a14="http://schemas.microsoft.com/office/drawing/2010/main" xmlns="">
+              <a14:hiddenFill xmlns="" xmlns:a14="http://schemas.microsoft.com/office/drawing/2010/main">
                 <a:solidFill>
                   <a:srgbClr val="FFFFFF"/>
                 </a:solidFill>
@@ -9111,7 +9115,7 @@
               </a:ln>
               <a:extLst>
                 <a:ext uri="{91240B29-F687-4f45-9708-019B960494DF}">
-                  <a14:hiddenLine xmlns:a14="http://schemas.microsoft.com/office/drawing/2010/main" xmlns="" w="9525">
+                  <a14:hiddenLine xmlns="" xmlns:a14="http://schemas.microsoft.com/office/drawing/2010/main" w="9525">
                     <a:solidFill>
                       <a:srgbClr val="000000"/>
                     </a:solidFill>
@@ -9201,7 +9205,7 @@
               </a:ln>
               <a:extLst>
                 <a:ext uri="{91240B29-F687-4f45-9708-019B960494DF}">
-                  <a14:hiddenLine xmlns:a14="http://schemas.microsoft.com/office/drawing/2010/main" xmlns="" w="9525">
+                  <a14:hiddenLine xmlns="" xmlns:a14="http://schemas.microsoft.com/office/drawing/2010/main" w="9525">
                     <a:solidFill>
                       <a:srgbClr val="000000"/>
                     </a:solidFill>
@@ -9291,7 +9295,7 @@
               </a:ln>
               <a:extLst>
                 <a:ext uri="{91240B29-F687-4f45-9708-019B960494DF}">
-                  <a14:hiddenLine xmlns:a14="http://schemas.microsoft.com/office/drawing/2010/main" xmlns="" w="9525">
+                  <a14:hiddenLine xmlns="" xmlns:a14="http://schemas.microsoft.com/office/drawing/2010/main" w="9525">
                     <a:solidFill>
                       <a:srgbClr val="000000"/>
                     </a:solidFill>
@@ -9353,7 +9357,7 @@
               </a:ln>
               <a:extLst>
                 <a:ext uri="{91240B29-F687-4f45-9708-019B960494DF}">
-                  <a14:hiddenLine xmlns:a14="http://schemas.microsoft.com/office/drawing/2010/main" xmlns="" w="9525">
+                  <a14:hiddenLine xmlns="" xmlns:a14="http://schemas.microsoft.com/office/drawing/2010/main" w="9525">
                     <a:solidFill>
                       <a:srgbClr val="000000"/>
                     </a:solidFill>
@@ -9443,7 +9447,7 @@
               </a:ln>
               <a:extLst>
                 <a:ext uri="{91240B29-F687-4f45-9708-019B960494DF}">
-                  <a14:hiddenLine xmlns:a14="http://schemas.microsoft.com/office/drawing/2010/main" xmlns="" w="9525">
+                  <a14:hiddenLine xmlns="" xmlns:a14="http://schemas.microsoft.com/office/drawing/2010/main" w="9525">
                     <a:solidFill>
                       <a:srgbClr val="000000"/>
                     </a:solidFill>
@@ -9505,7 +9509,7 @@
               </a:ln>
               <a:extLst>
                 <a:ext uri="{91240B29-F687-4f45-9708-019B960494DF}">
-                  <a14:hiddenLine xmlns:a14="http://schemas.microsoft.com/office/drawing/2010/main" xmlns="" w="9525">
+                  <a14:hiddenLine xmlns="" xmlns:a14="http://schemas.microsoft.com/office/drawing/2010/main" w="9525">
                     <a:solidFill>
                       <a:srgbClr val="000000"/>
                     </a:solidFill>
@@ -9567,7 +9571,7 @@
               </a:ln>
               <a:extLst>
                 <a:ext uri="{91240B29-F687-4f45-9708-019B960494DF}">
-                  <a14:hiddenLine xmlns:a14="http://schemas.microsoft.com/office/drawing/2010/main" xmlns="" w="9525">
+                  <a14:hiddenLine xmlns="" xmlns:a14="http://schemas.microsoft.com/office/drawing/2010/main" w="9525">
                     <a:solidFill>
                       <a:srgbClr val="000000"/>
                     </a:solidFill>
@@ -9657,7 +9661,7 @@
               </a:ln>
               <a:extLst>
                 <a:ext uri="{91240B29-F687-4f45-9708-019B960494DF}">
-                  <a14:hiddenLine xmlns:a14="http://schemas.microsoft.com/office/drawing/2010/main" xmlns="" w="9525">
+                  <a14:hiddenLine xmlns="" xmlns:a14="http://schemas.microsoft.com/office/drawing/2010/main" w="9525">
                     <a:solidFill>
                       <a:srgbClr val="000000"/>
                     </a:solidFill>
@@ -9747,7 +9751,7 @@
               </a:ln>
               <a:extLst>
                 <a:ext uri="{91240B29-F687-4f45-9708-019B960494DF}">
-                  <a14:hiddenLine xmlns:a14="http://schemas.microsoft.com/office/drawing/2010/main" xmlns="" w="9525">
+                  <a14:hiddenLine xmlns="" xmlns:a14="http://schemas.microsoft.com/office/drawing/2010/main" w="9525">
                     <a:solidFill>
                       <a:srgbClr val="000000"/>
                     </a:solidFill>
@@ -9809,7 +9813,7 @@
               </a:ln>
               <a:extLst>
                 <a:ext uri="{91240B29-F687-4f45-9708-019B960494DF}">
-                  <a14:hiddenLine xmlns:a14="http://schemas.microsoft.com/office/drawing/2010/main" xmlns="" w="9525">
+                  <a14:hiddenLine xmlns="" xmlns:a14="http://schemas.microsoft.com/office/drawing/2010/main" w="9525">
                     <a:solidFill>
                       <a:srgbClr val="000000"/>
                     </a:solidFill>
@@ -9919,7 +9923,7 @@
               </a:ln>
               <a:extLst>
                 <a:ext uri="{91240B29-F687-4f45-9708-019B960494DF}">
-                  <a14:hiddenLine xmlns:a14="http://schemas.microsoft.com/office/drawing/2010/main" xmlns="" w="9525">
+                  <a14:hiddenLine xmlns="" xmlns:a14="http://schemas.microsoft.com/office/drawing/2010/main" w="9525">
                     <a:solidFill>
                       <a:srgbClr val="000000"/>
                     </a:solidFill>
@@ -10003,7 +10007,7 @@
               </a:ln>
               <a:extLst>
                 <a:ext uri="{91240B29-F687-4f45-9708-019B960494DF}">
-                  <a14:hiddenLine xmlns:a14="http://schemas.microsoft.com/office/drawing/2010/main" xmlns="" w="9525">
+                  <a14:hiddenLine xmlns="" xmlns:a14="http://schemas.microsoft.com/office/drawing/2010/main" w="9525">
                     <a:solidFill>
                       <a:srgbClr val="000000"/>
                     </a:solidFill>
@@ -10065,7 +10069,7 @@
               </a:ln>
               <a:extLst>
                 <a:ext uri="{91240B29-F687-4f45-9708-019B960494DF}">
-                  <a14:hiddenLine xmlns:a14="http://schemas.microsoft.com/office/drawing/2010/main" xmlns="" w="9525">
+                  <a14:hiddenLine xmlns="" xmlns:a14="http://schemas.microsoft.com/office/drawing/2010/main" w="9525">
                     <a:solidFill>
                       <a:srgbClr val="000000"/>
                     </a:solidFill>
@@ -10127,7 +10131,7 @@
               </a:ln>
               <a:extLst>
                 <a:ext uri="{91240B29-F687-4f45-9708-019B960494DF}">
-                  <a14:hiddenLine xmlns:a14="http://schemas.microsoft.com/office/drawing/2010/main" xmlns="" w="9525">
+                  <a14:hiddenLine xmlns="" xmlns:a14="http://schemas.microsoft.com/office/drawing/2010/main" w="9525">
                     <a:solidFill>
                       <a:srgbClr val="000000"/>
                     </a:solidFill>
@@ -10217,7 +10221,7 @@
               </a:ln>
               <a:extLst>
                 <a:ext uri="{91240B29-F687-4f45-9708-019B960494DF}">
-                  <a14:hiddenLine xmlns:a14="http://schemas.microsoft.com/office/drawing/2010/main" xmlns="" w="9525">
+                  <a14:hiddenLine xmlns="" xmlns:a14="http://schemas.microsoft.com/office/drawing/2010/main" w="9525">
                     <a:solidFill>
                       <a:srgbClr val="000000"/>
                     </a:solidFill>
@@ -10251,7 +10255,7 @@
               </a:ln>
               <a:extLst>
                 <a:ext uri="{91240B29-F687-4f45-9708-019B960494DF}">
-                  <a14:hiddenLine xmlns:a14="http://schemas.microsoft.com/office/drawing/2010/main" xmlns="" w="9525">
+                  <a14:hiddenLine xmlns="" xmlns:a14="http://schemas.microsoft.com/office/drawing/2010/main" w="9525">
                     <a:solidFill>
                       <a:srgbClr val="000000"/>
                     </a:solidFill>
@@ -10316,7 +10320,7 @@
               </a:ln>
               <a:extLst>
                 <a:ext uri="{91240B29-F687-4f45-9708-019B960494DF}">
-                  <a14:hiddenLine xmlns:a14="http://schemas.microsoft.com/office/drawing/2010/main" xmlns="" w="9525">
+                  <a14:hiddenLine xmlns="" xmlns:a14="http://schemas.microsoft.com/office/drawing/2010/main" w="9525">
                     <a:solidFill>
                       <a:srgbClr val="000000"/>
                     </a:solidFill>
@@ -10406,7 +10410,7 @@
               </a:ln>
               <a:extLst>
                 <a:ext uri="{91240B29-F687-4f45-9708-019B960494DF}">
-                  <a14:hiddenLine xmlns:a14="http://schemas.microsoft.com/office/drawing/2010/main" xmlns="" w="9525">
+                  <a14:hiddenLine xmlns="" xmlns:a14="http://schemas.microsoft.com/office/drawing/2010/main" w="9525">
                     <a:solidFill>
                       <a:srgbClr val="000000"/>
                     </a:solidFill>
@@ -10468,7 +10472,7 @@
               </a:ln>
               <a:extLst>
                 <a:ext uri="{91240B29-F687-4f45-9708-019B960494DF}">
-                  <a14:hiddenLine xmlns:a14="http://schemas.microsoft.com/office/drawing/2010/main" xmlns="" w="9525">
+                  <a14:hiddenLine xmlns="" xmlns:a14="http://schemas.microsoft.com/office/drawing/2010/main" w="9525">
                     <a:solidFill>
                       <a:srgbClr val="000000"/>
                     </a:solidFill>
@@ -10558,7 +10562,7 @@
               </a:ln>
               <a:extLst>
                 <a:ext uri="{91240B29-F687-4f45-9708-019B960494DF}">
-                  <a14:hiddenLine xmlns:a14="http://schemas.microsoft.com/office/drawing/2010/main" xmlns="" w="9525">
+                  <a14:hiddenLine xmlns="" xmlns:a14="http://schemas.microsoft.com/office/drawing/2010/main" w="9525">
                     <a:solidFill>
                       <a:srgbClr val="000000"/>
                     </a:solidFill>
@@ -10623,7 +10627,7 @@
               </a:ln>
               <a:extLst>
                 <a:ext uri="{91240B29-F687-4f45-9708-019B960494DF}">
-                  <a14:hiddenLine xmlns:a14="http://schemas.microsoft.com/office/drawing/2010/main" xmlns="" w="9525">
+                  <a14:hiddenLine xmlns="" xmlns:a14="http://schemas.microsoft.com/office/drawing/2010/main" w="9525">
                     <a:solidFill>
                       <a:srgbClr val="000000"/>
                     </a:solidFill>
@@ -10685,7 +10689,7 @@
               </a:ln>
               <a:extLst>
                 <a:ext uri="{91240B29-F687-4f45-9708-019B960494DF}">
-                  <a14:hiddenLine xmlns:a14="http://schemas.microsoft.com/office/drawing/2010/main" xmlns="" w="9525">
+                  <a14:hiddenLine xmlns="" xmlns:a14="http://schemas.microsoft.com/office/drawing/2010/main" w="9525">
                     <a:solidFill>
                       <a:srgbClr val="000000"/>
                     </a:solidFill>
@@ -10775,7 +10779,7 @@
               </a:ln>
               <a:extLst>
                 <a:ext uri="{91240B29-F687-4f45-9708-019B960494DF}">
-                  <a14:hiddenLine xmlns:a14="http://schemas.microsoft.com/office/drawing/2010/main" xmlns="" w="9525">
+                  <a14:hiddenLine xmlns="" xmlns:a14="http://schemas.microsoft.com/office/drawing/2010/main" w="9525">
                     <a:solidFill>
                       <a:srgbClr val="000000"/>
                     </a:solidFill>
@@ -10865,7 +10869,7 @@
               </a:ln>
               <a:extLst>
                 <a:ext uri="{91240B29-F687-4f45-9708-019B960494DF}">
-                  <a14:hiddenLine xmlns:a14="http://schemas.microsoft.com/office/drawing/2010/main" xmlns="" w="9525">
+                  <a14:hiddenLine xmlns="" xmlns:a14="http://schemas.microsoft.com/office/drawing/2010/main" w="9525">
                     <a:solidFill>
                       <a:srgbClr val="000000"/>
                     </a:solidFill>
@@ -10930,7 +10934,7 @@
               </a:ln>
               <a:extLst>
                 <a:ext uri="{91240B29-F687-4f45-9708-019B960494DF}">
-                  <a14:hiddenLine xmlns:a14="http://schemas.microsoft.com/office/drawing/2010/main" xmlns="" w="9525">
+                  <a14:hiddenLine xmlns="" xmlns:a14="http://schemas.microsoft.com/office/drawing/2010/main" w="9525">
                     <a:solidFill>
                       <a:srgbClr val="000000"/>
                     </a:solidFill>
@@ -11050,7 +11054,7 @@
               </a:ln>
               <a:extLst>
                 <a:ext uri="{91240B29-F687-4f45-9708-019B960494DF}">
-                  <a14:hiddenLine xmlns:a14="http://schemas.microsoft.com/office/drawing/2010/main" xmlns="" w="9525">
+                  <a14:hiddenLine xmlns="" xmlns:a14="http://schemas.microsoft.com/office/drawing/2010/main" w="9525">
                     <a:solidFill>
                       <a:srgbClr val="000000"/>
                     </a:solidFill>
@@ -11148,7 +11152,7 @@
               </a:ln>
               <a:extLst>
                 <a:ext uri="{91240B29-F687-4f45-9708-019B960494DF}">
-                  <a14:hiddenLine xmlns:a14="http://schemas.microsoft.com/office/drawing/2010/main" xmlns="" w="9525">
+                  <a14:hiddenLine xmlns="" xmlns:a14="http://schemas.microsoft.com/office/drawing/2010/main" w="9525">
                     <a:solidFill>
                       <a:srgbClr val="000000"/>
                     </a:solidFill>
@@ -11263,7 +11267,7 @@
               </a:ln>
               <a:extLst>
                 <a:ext uri="{91240B29-F687-4f45-9708-019B960494DF}">
-                  <a14:hiddenLine xmlns:a14="http://schemas.microsoft.com/office/drawing/2010/main" xmlns="" w="9525">
+                  <a14:hiddenLine xmlns="" xmlns:a14="http://schemas.microsoft.com/office/drawing/2010/main" w="9525">
                     <a:solidFill>
                       <a:srgbClr val="000000"/>
                     </a:solidFill>
@@ -11353,7 +11357,7 @@
               </a:ln>
               <a:extLst>
                 <a:ext uri="{91240B29-F687-4f45-9708-019B960494DF}">
-                  <a14:hiddenLine xmlns:a14="http://schemas.microsoft.com/office/drawing/2010/main" xmlns="" w="9525">
+                  <a14:hiddenLine xmlns="" xmlns:a14="http://schemas.microsoft.com/office/drawing/2010/main" w="9525">
                     <a:solidFill>
                       <a:srgbClr val="000000"/>
                     </a:solidFill>
@@ -11418,7 +11422,7 @@
               </a:ln>
               <a:extLst>
                 <a:ext uri="{91240B29-F687-4f45-9708-019B960494DF}">
-                  <a14:hiddenLine xmlns:a14="http://schemas.microsoft.com/office/drawing/2010/main" xmlns="" w="9525">
+                  <a14:hiddenLine xmlns="" xmlns:a14="http://schemas.microsoft.com/office/drawing/2010/main" w="9525">
                     <a:solidFill>
                       <a:srgbClr val="000000"/>
                     </a:solidFill>
@@ -11508,7 +11512,7 @@
               </a:ln>
               <a:extLst>
                 <a:ext uri="{91240B29-F687-4f45-9708-019B960494DF}">
-                  <a14:hiddenLine xmlns:a14="http://schemas.microsoft.com/office/drawing/2010/main" xmlns="" w="9525">
+                  <a14:hiddenLine xmlns="" xmlns:a14="http://schemas.microsoft.com/office/drawing/2010/main" w="9525">
                     <a:solidFill>
                       <a:srgbClr val="000000"/>
                     </a:solidFill>
@@ -11576,7 +11580,7 @@
               </a:ln>
               <a:extLst>
                 <a:ext uri="{91240B29-F687-4f45-9708-019B960494DF}">
-                  <a14:hiddenLine xmlns:a14="http://schemas.microsoft.com/office/drawing/2010/main" xmlns="" w="9525">
+                  <a14:hiddenLine xmlns="" xmlns:a14="http://schemas.microsoft.com/office/drawing/2010/main" w="9525">
                     <a:solidFill>
                       <a:srgbClr val="000000"/>
                     </a:solidFill>
@@ -11666,7 +11670,7 @@
               </a:ln>
               <a:extLst>
                 <a:ext uri="{91240B29-F687-4f45-9708-019B960494DF}">
-                  <a14:hiddenLine xmlns:a14="http://schemas.microsoft.com/office/drawing/2010/main" xmlns="" w="9525">
+                  <a14:hiddenLine xmlns="" xmlns:a14="http://schemas.microsoft.com/office/drawing/2010/main" w="9525">
                     <a:solidFill>
                       <a:srgbClr val="000000"/>
                     </a:solidFill>
@@ -11734,7 +11738,7 @@
               </a:ln>
               <a:extLst>
                 <a:ext uri="{91240B29-F687-4f45-9708-019B960494DF}">
-                  <a14:hiddenLine xmlns:a14="http://schemas.microsoft.com/office/drawing/2010/main" xmlns="" w="9525">
+                  <a14:hiddenLine xmlns="" xmlns:a14="http://schemas.microsoft.com/office/drawing/2010/main" w="9525">
                     <a:solidFill>
                       <a:srgbClr val="000000"/>
                     </a:solidFill>
@@ -11824,7 +11828,7 @@
               </a:ln>
               <a:extLst>
                 <a:ext uri="{91240B29-F687-4f45-9708-019B960494DF}">
-                  <a14:hiddenLine xmlns:a14="http://schemas.microsoft.com/office/drawing/2010/main" xmlns="" w="9525">
+                  <a14:hiddenLine xmlns="" xmlns:a14="http://schemas.microsoft.com/office/drawing/2010/main" w="9525">
                     <a:solidFill>
                       <a:srgbClr val="000000"/>
                     </a:solidFill>
@@ -11858,7 +11862,7 @@
               </a:ln>
               <a:extLst>
                 <a:ext uri="{91240B29-F687-4f45-9708-019B960494DF}">
-                  <a14:hiddenLine xmlns:a14="http://schemas.microsoft.com/office/drawing/2010/main" xmlns="" w="9525">
+                  <a14:hiddenLine xmlns="" xmlns:a14="http://schemas.microsoft.com/office/drawing/2010/main" w="9525">
                     <a:solidFill>
                       <a:srgbClr val="000000"/>
                     </a:solidFill>
@@ -11999,7 +12003,7 @@
             <a:fld id="{48A87A34-81AB-432B-8DAE-1953F412C126}" type="datetimeFigureOut">
               <a:rPr lang="en-US" dirty="0"/>
               <a:pPr/>
-              <a:t>4/14/2026</a:t>
+              <a:t>4/15/2026</a:t>
             </a:fld>
             <a:endParaRPr lang="en-US" dirty="0"/>
           </a:p>
@@ -13046,6 +13050,194 @@
           <p:cNvPr id="2" name="標題 1">
             <a:extLst>
               <a:ext uri="{FF2B5EF4-FFF2-40B4-BE49-F238E27FC236}">
+                <a16:creationId xmlns:a16="http://schemas.microsoft.com/office/drawing/2014/main" id="{3D64FFB7-036E-8305-4037-0C619D32E333}"/>
+              </a:ext>
+            </a:extLst>
+          </p:cNvPr>
+          <p:cNvSpPr>
+            <a:spLocks noGrp="1"/>
+          </p:cNvSpPr>
+          <p:nvPr>
+            <p:ph type="title"/>
+          </p:nvPr>
+        </p:nvSpPr>
+        <p:spPr/>
+        <p:txBody>
+          <a:bodyPr/>
+          <a:lstStyle/>
+          <a:p>
+            <a:pPr algn="ctr"/>
+            <a:r>
+              <a:rPr lang="zh-TW" altLang="en-US" dirty="0"/>
+              <a:t>結婚</a:t>
+            </a:r>
+            <a:r>
+              <a:rPr lang="en-US" altLang="zh-TW" dirty="0"/>
+              <a:t>/</a:t>
+            </a:r>
+            <a:r>
+              <a:rPr lang="zh-TW" altLang="en-US" dirty="0"/>
+              <a:t>離婚男女比例</a:t>
+            </a:r>
+          </a:p>
+        </p:txBody>
+      </p:sp>
+      <p:pic>
+        <p:nvPicPr>
+          <p:cNvPr id="13" name="圖片 12">
+            <a:extLst>
+              <a:ext uri="{FF2B5EF4-FFF2-40B4-BE49-F238E27FC236}">
+                <a16:creationId xmlns:a16="http://schemas.microsoft.com/office/drawing/2014/main" id="{C6AA866D-7868-F982-8600-BF0FA4DA5E1A}"/>
+              </a:ext>
+            </a:extLst>
+          </p:cNvPr>
+          <p:cNvPicPr>
+            <a:picLocks noChangeAspect="1"/>
+          </p:cNvPicPr>
+          <p:nvPr/>
+        </p:nvPicPr>
+        <p:blipFill>
+          <a:blip r:embed="rId2"/>
+          <a:stretch>
+            <a:fillRect/>
+          </a:stretch>
+        </p:blipFill>
+        <p:spPr>
+          <a:xfrm>
+            <a:off x="2140985" y="1694787"/>
+            <a:ext cx="7906853" cy="4439270"/>
+          </a:xfrm>
+          <a:prstGeom prst="rect">
+            <a:avLst/>
+          </a:prstGeom>
+        </p:spPr>
+      </p:pic>
+    </p:spTree>
+    <p:extLst>
+      <p:ext uri="{BB962C8B-B14F-4D97-AF65-F5344CB8AC3E}">
+        <p14:creationId xmlns:p14="http://schemas.microsoft.com/office/powerpoint/2010/main" val="3659670451"/>
+      </p:ext>
+    </p:extLst>
+  </p:cSld>
+  <p:clrMapOvr>
+    <a:masterClrMapping/>
+  </p:clrMapOvr>
+</p:sld>
+</file>
+
+<file path=ppt/slides/slide16.xml><?xml version="1.0" encoding="utf-8"?>
+<p:sld xmlns:a="http://schemas.openxmlformats.org/drawingml/2006/main" xmlns:r="http://schemas.openxmlformats.org/officeDocument/2006/relationships" xmlns:p="http://schemas.openxmlformats.org/presentationml/2006/main">
+  <p:cSld>
+    <p:spTree>
+      <p:nvGrpSpPr>
+        <p:cNvPr id="1" name=""/>
+        <p:cNvGrpSpPr/>
+        <p:nvPr/>
+      </p:nvGrpSpPr>
+      <p:grpSpPr>
+        <a:xfrm>
+          <a:off x="0" y="0"/>
+          <a:ext cx="0" cy="0"/>
+          <a:chOff x="0" y="0"/>
+          <a:chExt cx="0" cy="0"/>
+        </a:xfrm>
+      </p:grpSpPr>
+      <p:sp>
+        <p:nvSpPr>
+          <p:cNvPr id="2" name="標題 1">
+            <a:extLst>
+              <a:ext uri="{FF2B5EF4-FFF2-40B4-BE49-F238E27FC236}">
+                <a16:creationId xmlns:a16="http://schemas.microsoft.com/office/drawing/2014/main" id="{B6345C43-CC6E-CF95-407D-1219A4A17624}"/>
+              </a:ext>
+            </a:extLst>
+          </p:cNvPr>
+          <p:cNvSpPr>
+            <a:spLocks noGrp="1"/>
+          </p:cNvSpPr>
+          <p:nvPr>
+            <p:ph type="title"/>
+          </p:nvPr>
+        </p:nvSpPr>
+        <p:spPr/>
+        <p:txBody>
+          <a:bodyPr/>
+          <a:lstStyle/>
+          <a:p>
+            <a:pPr algn="ctr"/>
+            <a:r>
+              <a:rPr lang="zh-TW" altLang="en-US" dirty="0"/>
+              <a:t>結婚離婚統計</a:t>
+            </a:r>
+          </a:p>
+        </p:txBody>
+      </p:sp>
+      <p:pic>
+        <p:nvPicPr>
+          <p:cNvPr id="5" name="內容版面配置區 4">
+            <a:extLst>
+              <a:ext uri="{FF2B5EF4-FFF2-40B4-BE49-F238E27FC236}">
+                <a16:creationId xmlns:a16="http://schemas.microsoft.com/office/drawing/2014/main" id="{F9181839-74AF-BACF-BB4E-9A215FA2C11F}"/>
+              </a:ext>
+            </a:extLst>
+          </p:cNvPr>
+          <p:cNvPicPr>
+            <a:picLocks noGrp="1" noChangeAspect="1"/>
+          </p:cNvPicPr>
+          <p:nvPr>
+            <p:ph idx="1"/>
+          </p:nvPr>
+        </p:nvPicPr>
+        <p:blipFill>
+          <a:blip r:embed="rId2"/>
+          <a:stretch>
+            <a:fillRect/>
+          </a:stretch>
+        </p:blipFill>
+        <p:spPr>
+          <a:xfrm>
+            <a:off x="2928913" y="2249488"/>
+            <a:ext cx="6330999" cy="3541712"/>
+          </a:xfrm>
+          <a:prstGeom prst="rect">
+            <a:avLst/>
+          </a:prstGeom>
+        </p:spPr>
+      </p:pic>
+    </p:spTree>
+    <p:extLst>
+      <p:ext uri="{BB962C8B-B14F-4D97-AF65-F5344CB8AC3E}">
+        <p14:creationId xmlns:p14="http://schemas.microsoft.com/office/powerpoint/2010/main" val="2289140460"/>
+      </p:ext>
+    </p:extLst>
+  </p:cSld>
+  <p:clrMapOvr>
+    <a:masterClrMapping/>
+  </p:clrMapOvr>
+</p:sld>
+</file>
+
+<file path=ppt/slides/slide17.xml><?xml version="1.0" encoding="utf-8"?>
+<p:sld xmlns:a="http://schemas.openxmlformats.org/drawingml/2006/main" xmlns:r="http://schemas.openxmlformats.org/officeDocument/2006/relationships" xmlns:p="http://schemas.openxmlformats.org/presentationml/2006/main">
+  <p:cSld>
+    <p:spTree>
+      <p:nvGrpSpPr>
+        <p:cNvPr id="1" name=""/>
+        <p:cNvGrpSpPr/>
+        <p:nvPr/>
+      </p:nvGrpSpPr>
+      <p:grpSpPr>
+        <a:xfrm>
+          <a:off x="0" y="0"/>
+          <a:ext cx="0" cy="0"/>
+          <a:chOff x="0" y="0"/>
+          <a:chExt cx="0" cy="0"/>
+        </a:xfrm>
+      </p:grpSpPr>
+      <p:sp>
+        <p:nvSpPr>
+          <p:cNvPr id="2" name="標題 1">
+            <a:extLst>
+              <a:ext uri="{FF2B5EF4-FFF2-40B4-BE49-F238E27FC236}">
                 <a16:creationId xmlns:a16="http://schemas.microsoft.com/office/drawing/2014/main" id="{9842B3DD-4613-85DD-A677-946F669A69B9}"/>
               </a:ext>
             </a:extLst>
@@ -13100,11 +13292,23 @@
             </a:r>
             <a:r>
               <a:rPr lang="zh-TW" altLang="en-US" sz="3200" dirty="0"/>
-              <a:t>年恰逢同性婚姻合法化，可能造成同性結婚增加，能解釋為何</a:t>
+              <a:t>年恰逢同性婚姻合法化，可能造成同性結婚增加，同年出現</a:t>
             </a:r>
             <a:r>
               <a:rPr lang="zh-TW" altLang="en-US" sz="3200" b="1" u="sng" dirty="0"/>
-              <a:t>結婚男女比例不對稱</a:t>
+              <a:t>離婚男女比例不對稱，女生較多，</a:t>
+            </a:r>
+            <a:r>
+              <a:rPr lang="en-US" altLang="zh-TW" sz="3200" dirty="0"/>
+              <a:t>		</a:t>
+            </a:r>
+            <a:r>
+              <a:rPr lang="zh-TW" altLang="en-US" sz="3200" dirty="0"/>
+              <a:t>  </a:t>
+            </a:r>
+            <a:r>
+              <a:rPr lang="zh-TW" altLang="en-US" sz="3200" b="1" u="sng" dirty="0"/>
+              <a:t>但結婚男女比例對稱</a:t>
             </a:r>
             <a:r>
               <a:rPr lang="zh-TW" altLang="en-US" sz="3200" dirty="0"/>
@@ -13119,7 +13323,19 @@
             </a:r>
             <a:r>
               <a:rPr lang="zh-TW" altLang="en-US" sz="3200" dirty="0"/>
-              <a:t>年台中集體結婚樂成宮月老加持首屆集團結婚，可能導致結婚人數增加</a:t>
+              <a:t>年台中集體結婚樂成宮月老加持首屆集團結婚，可能導致結婚人數增加，解釋</a:t>
+            </a:r>
+            <a:r>
+              <a:rPr lang="zh-TW" altLang="en-US" sz="3200" b="1" u="sng" dirty="0"/>
+              <a:t>結婚人數是離婚人數</a:t>
+            </a:r>
+            <a:r>
+              <a:rPr lang="en-US" altLang="zh-TW" sz="3200" b="1" u="sng" dirty="0"/>
+              <a:t>3</a:t>
+            </a:r>
+            <a:r>
+              <a:rPr lang="zh-TW" altLang="en-US" sz="3200" b="1" u="sng" dirty="0"/>
+              <a:t>倍以上</a:t>
             </a:r>
           </a:p>
         </p:txBody>
@@ -13137,7 +13353,7 @@
 </p:sld>
 </file>
 
-<file path=ppt/slides/slide16.xml><?xml version="1.0" encoding="utf-8"?>
+<file path=ppt/slides/slide18.xml><?xml version="1.0" encoding="utf-8"?>
 <p:sld xmlns:a="http://schemas.openxmlformats.org/drawingml/2006/main" xmlns:r="http://schemas.openxmlformats.org/officeDocument/2006/relationships" xmlns:p="http://schemas.openxmlformats.org/presentationml/2006/main">
   <p:cSld>
     <p:spTree>
@@ -13203,7 +13419,7 @@
         <p:spPr/>
         <p:txBody>
           <a:bodyPr>
-            <a:normAutofit/>
+            <a:normAutofit fontScale="92500" lnSpcReduction="10000"/>
           </a:bodyPr>
           <a:lstStyle/>
           <a:p>
@@ -13351,6 +13567,62 @@
               <a:t>歲</a:t>
             </a:r>
             <a:endParaRPr lang="en-US" altLang="zh-TW" sz="2400" u="sng" dirty="0"/>
+          </a:p>
+          <a:p>
+            <a:pPr lvl="1"/>
+            <a:r>
+              <a:rPr lang="zh-TW" altLang="en-US" sz="2400" dirty="0"/>
+              <a:t>結婚人數是離婚人數</a:t>
+            </a:r>
+            <a:r>
+              <a:rPr lang="en-US" altLang="zh-TW" sz="2400" u="sng" dirty="0"/>
+              <a:t>3</a:t>
+            </a:r>
+            <a:r>
+              <a:rPr lang="zh-TW" altLang="en-US" sz="2400" u="sng" dirty="0"/>
+              <a:t>倍以上</a:t>
+            </a:r>
+            <a:endParaRPr lang="en-US" altLang="zh-TW" sz="2400" u="sng" dirty="0"/>
+          </a:p>
+          <a:p>
+            <a:pPr lvl="1"/>
+            <a:r>
+              <a:rPr lang="zh-TW" altLang="en-US" sz="2400" dirty="0"/>
+              <a:t>每月離婚中</a:t>
+            </a:r>
+            <a:r>
+              <a:rPr lang="en-US" altLang="zh-TW" sz="2400" u="sng" dirty="0"/>
+              <a:t>2</a:t>
+            </a:r>
+            <a:r>
+              <a:rPr lang="zh-TW" altLang="en-US" sz="2400" u="sng" dirty="0"/>
+              <a:t>月</a:t>
+            </a:r>
+            <a:r>
+              <a:rPr lang="zh-TW" altLang="en-US" sz="2400" dirty="0"/>
+              <a:t>及</a:t>
+            </a:r>
+            <a:r>
+              <a:rPr lang="en-US" altLang="zh-TW" sz="2400" u="sng" dirty="0"/>
+              <a:t>9</a:t>
+            </a:r>
+            <a:r>
+              <a:rPr lang="zh-TW" altLang="en-US" sz="2400" u="sng" dirty="0"/>
+              <a:t>月</a:t>
+            </a:r>
+            <a:r>
+              <a:rPr lang="zh-TW" altLang="en-US" sz="2400" dirty="0"/>
+              <a:t>離婚最少，剛好處於</a:t>
+            </a:r>
+            <a:r>
+              <a:rPr lang="zh-TW" altLang="en-US" sz="2400" u="sng" dirty="0"/>
+              <a:t>學生寒暑收假</a:t>
+            </a:r>
+            <a:r>
+              <a:rPr lang="zh-TW" altLang="en-US" sz="2400" dirty="0"/>
+              <a:t>。</a:t>
+            </a:r>
+            <a:endParaRPr lang="en-US" altLang="zh-TW" sz="2400" dirty="0"/>
           </a:p>
         </p:txBody>
       </p:sp>
@@ -13550,7 +13822,7 @@
             </a:r>
             <a:r>
               <a:rPr lang="en-US" altLang="zh-TW" sz="3200" dirty="0"/>
-              <a:t>15P</a:t>
+              <a:t>17P</a:t>
             </a:r>
           </a:p>
           <a:p>
@@ -13568,7 +13840,7 @@
             </a:r>
             <a:r>
               <a:rPr lang="en-US" altLang="zh-TW" sz="3200" dirty="0"/>
-              <a:t>16P</a:t>
+              <a:t>18P</a:t>
             </a:r>
             <a:endParaRPr lang="zh-TW" altLang="en-US" sz="3200" dirty="0"/>
           </a:p>
@@ -14431,7 +14703,22 @@
             </a:r>
             <a:r>
               <a:rPr lang="zh-TW" altLang="en-US" dirty="0"/>
-              <a:t>讀取即時資料進行分析</a:t>
+              <a:t>即時讀取資料進行分析</a:t>
+            </a:r>
+            <a:endParaRPr lang="en-US" altLang="zh-TW" dirty="0"/>
+          </a:p>
+          <a:p>
+            <a:r>
+              <a:rPr lang="zh-TW" altLang="en-US" dirty="0"/>
+              <a:t>統一再用</a:t>
+            </a:r>
+            <a:r>
+              <a:rPr lang="en-US" altLang="zh-TW" dirty="0"/>
+              <a:t>DAX</a:t>
+            </a:r>
+            <a:r>
+              <a:rPr lang="zh-TW" altLang="en-US" dirty="0"/>
+              <a:t>做額外統計</a:t>
             </a:r>
           </a:p>
         </p:txBody>
@@ -14488,7 +14775,7 @@
         </p:blipFill>
         <p:spPr>
           <a:xfrm>
-            <a:off x="3720211" y="4020344"/>
+            <a:off x="4779777" y="3817144"/>
             <a:ext cx="2629267" cy="2295845"/>
           </a:xfrm>
           <a:prstGeom prst="rect">
@@ -14650,10 +14937,10 @@
       </p:sp>
       <p:pic>
         <p:nvPicPr>
-          <p:cNvPr id="6" name="圖片 5">
+          <p:cNvPr id="7" name="圖片 6">
             <a:extLst>
               <a:ext uri="{FF2B5EF4-FFF2-40B4-BE49-F238E27FC236}">
-                <a16:creationId xmlns:a16="http://schemas.microsoft.com/office/drawing/2014/main" id="{A6B8B33F-63CA-9EB2-3B39-17B4ACF6662E}"/>
+                <a16:creationId xmlns:a16="http://schemas.microsoft.com/office/drawing/2014/main" id="{C90A880C-831A-3411-3375-D82DAB399137}"/>
               </a:ext>
             </a:extLst>
           </p:cNvPr>
@@ -14670,8 +14957,8 @@
         </p:blipFill>
         <p:spPr>
           <a:xfrm>
-            <a:off x="2136222" y="1800212"/>
-            <a:ext cx="7916380" cy="4439270"/>
+            <a:off x="2136222" y="1662683"/>
+            <a:ext cx="7916380" cy="4458322"/>
           </a:xfrm>
           <a:prstGeom prst="rect">
             <a:avLst/>

--- a/那些人較易結婚或離婚.pptx
+++ b/那些人較易結婚或離婚.pptx
@@ -23,6 +23,7 @@
     <p:sldId id="272" r:id="rId17"/>
     <p:sldId id="271" r:id="rId18"/>
     <p:sldId id="269" r:id="rId19"/>
+    <p:sldId id="274" r:id="rId20"/>
   </p:sldIdLst>
   <p:sldSz cx="12192000" cy="6858000"/>
   <p:notesSz cx="6858000" cy="9144000"/>
@@ -172,6 +173,7 @@
         <p14:section name="結論" id="{EEA2D8FB-8303-485E-814E-3F0759258812}">
           <p14:sldIdLst>
             <p14:sldId id="269"/>
+            <p14:sldId id="274"/>
           </p14:sldIdLst>
         </p14:section>
       </p14:sectionLst>
@@ -233,7 +235,7 @@
           <a:noFill/>
           <a:extLst>
             <a:ext uri="{909E8E84-426E-40dd-AFC4-6F175D3DCCD1}">
-              <a14:hiddenFill xmlns="" xmlns:a14="http://schemas.microsoft.com/office/drawing/2010/main">
+              <a14:hiddenFill xmlns:a14="http://schemas.microsoft.com/office/drawing/2010/main" xmlns="">
                 <a:solidFill>
                   <a:srgbClr val="FFFFFF"/>
                 </a:solidFill>
@@ -293,7 +295,7 @@
             </a:ln>
             <a:extLst>
               <a:ext uri="{91240B29-F687-4f45-9708-019B960494DF}">
-                <a14:hiddenLine xmlns="" xmlns:a14="http://schemas.microsoft.com/office/drawing/2010/main" w="9525">
+                <a14:hiddenLine xmlns:a14="http://schemas.microsoft.com/office/drawing/2010/main" xmlns="" w="9525">
                   <a:solidFill>
                     <a:srgbClr val="000000"/>
                   </a:solidFill>
@@ -383,7 +385,7 @@
             </a:ln>
             <a:extLst>
               <a:ext uri="{91240B29-F687-4f45-9708-019B960494DF}">
-                <a14:hiddenLine xmlns="" xmlns:a14="http://schemas.microsoft.com/office/drawing/2010/main" w="9525">
+                <a14:hiddenLine xmlns:a14="http://schemas.microsoft.com/office/drawing/2010/main" xmlns="" w="9525">
                   <a:solidFill>
                     <a:srgbClr val="000000"/>
                   </a:solidFill>
@@ -473,7 +475,7 @@
             </a:ln>
             <a:extLst>
               <a:ext uri="{91240B29-F687-4f45-9708-019B960494DF}">
-                <a14:hiddenLine xmlns="" xmlns:a14="http://schemas.microsoft.com/office/drawing/2010/main" w="9525">
+                <a14:hiddenLine xmlns:a14="http://schemas.microsoft.com/office/drawing/2010/main" xmlns="" w="9525">
                   <a:solidFill>
                     <a:srgbClr val="000000"/>
                   </a:solidFill>
@@ -507,7 +509,7 @@
             </a:ln>
             <a:extLst>
               <a:ext uri="{91240B29-F687-4f45-9708-019B960494DF}">
-                <a14:hiddenLine xmlns="" xmlns:a14="http://schemas.microsoft.com/office/drawing/2010/main" w="9525">
+                <a14:hiddenLine xmlns:a14="http://schemas.microsoft.com/office/drawing/2010/main" xmlns="" w="9525">
                   <a:solidFill>
                     <a:srgbClr val="000000"/>
                   </a:solidFill>
@@ -597,7 +599,7 @@
             </a:ln>
             <a:extLst>
               <a:ext uri="{91240B29-F687-4f45-9708-019B960494DF}">
-                <a14:hiddenLine xmlns="" xmlns:a14="http://schemas.microsoft.com/office/drawing/2010/main" w="9525">
+                <a14:hiddenLine xmlns:a14="http://schemas.microsoft.com/office/drawing/2010/main" xmlns="" w="9525">
                   <a:solidFill>
                     <a:srgbClr val="000000"/>
                   </a:solidFill>
@@ -659,7 +661,7 @@
             </a:ln>
             <a:extLst>
               <a:ext uri="{91240B29-F687-4f45-9708-019B960494DF}">
-                <a14:hiddenLine xmlns="" xmlns:a14="http://schemas.microsoft.com/office/drawing/2010/main" w="9525">
+                <a14:hiddenLine xmlns:a14="http://schemas.microsoft.com/office/drawing/2010/main" xmlns="" w="9525">
                   <a:solidFill>
                     <a:srgbClr val="000000"/>
                   </a:solidFill>
@@ -721,7 +723,7 @@
             </a:ln>
             <a:extLst>
               <a:ext uri="{91240B29-F687-4f45-9708-019B960494DF}">
-                <a14:hiddenLine xmlns="" xmlns:a14="http://schemas.microsoft.com/office/drawing/2010/main" w="9525">
+                <a14:hiddenLine xmlns:a14="http://schemas.microsoft.com/office/drawing/2010/main" xmlns="" w="9525">
                   <a:solidFill>
                     <a:srgbClr val="000000"/>
                   </a:solidFill>
@@ -811,7 +813,7 @@
             </a:ln>
             <a:extLst>
               <a:ext uri="{91240B29-F687-4f45-9708-019B960494DF}">
-                <a14:hiddenLine xmlns="" xmlns:a14="http://schemas.microsoft.com/office/drawing/2010/main" w="9525">
+                <a14:hiddenLine xmlns:a14="http://schemas.microsoft.com/office/drawing/2010/main" xmlns="" w="9525">
                   <a:solidFill>
                     <a:srgbClr val="000000"/>
                   </a:solidFill>
@@ -873,7 +875,7 @@
             </a:ln>
             <a:extLst>
               <a:ext uri="{91240B29-F687-4f45-9708-019B960494DF}">
-                <a14:hiddenLine xmlns="" xmlns:a14="http://schemas.microsoft.com/office/drawing/2010/main" w="9525">
+                <a14:hiddenLine xmlns:a14="http://schemas.microsoft.com/office/drawing/2010/main" xmlns="" w="9525">
                   <a:solidFill>
                     <a:srgbClr val="000000"/>
                   </a:solidFill>
@@ -935,7 +937,7 @@
             </a:ln>
             <a:extLst>
               <a:ext uri="{91240B29-F687-4f45-9708-019B960494DF}">
-                <a14:hiddenLine xmlns="" xmlns:a14="http://schemas.microsoft.com/office/drawing/2010/main" w="9525">
+                <a14:hiddenLine xmlns:a14="http://schemas.microsoft.com/office/drawing/2010/main" xmlns="" w="9525">
                   <a:solidFill>
                     <a:srgbClr val="000000"/>
                   </a:solidFill>
@@ -1025,7 +1027,7 @@
             </a:ln>
             <a:extLst>
               <a:ext uri="{91240B29-F687-4f45-9708-019B960494DF}">
-                <a14:hiddenLine xmlns="" xmlns:a14="http://schemas.microsoft.com/office/drawing/2010/main" w="9525">
+                <a14:hiddenLine xmlns:a14="http://schemas.microsoft.com/office/drawing/2010/main" xmlns="" w="9525">
                   <a:solidFill>
                     <a:srgbClr val="000000"/>
                   </a:solidFill>
@@ -1115,7 +1117,7 @@
             </a:ln>
             <a:extLst>
               <a:ext uri="{91240B29-F687-4f45-9708-019B960494DF}">
-                <a14:hiddenLine xmlns="" xmlns:a14="http://schemas.microsoft.com/office/drawing/2010/main" w="9525">
+                <a14:hiddenLine xmlns:a14="http://schemas.microsoft.com/office/drawing/2010/main" xmlns="" w="9525">
                   <a:solidFill>
                     <a:srgbClr val="000000"/>
                   </a:solidFill>
@@ -1177,7 +1179,7 @@
             </a:ln>
             <a:extLst>
               <a:ext uri="{91240B29-F687-4f45-9708-019B960494DF}">
-                <a14:hiddenLine xmlns="" xmlns:a14="http://schemas.microsoft.com/office/drawing/2010/main" w="9525">
+                <a14:hiddenLine xmlns:a14="http://schemas.microsoft.com/office/drawing/2010/main" xmlns="" w="9525">
                   <a:solidFill>
                     <a:srgbClr val="000000"/>
                   </a:solidFill>
@@ -1287,7 +1289,7 @@
             </a:ln>
             <a:extLst>
               <a:ext uri="{91240B29-F687-4f45-9708-019B960494DF}">
-                <a14:hiddenLine xmlns="" xmlns:a14="http://schemas.microsoft.com/office/drawing/2010/main" w="9525">
+                <a14:hiddenLine xmlns:a14="http://schemas.microsoft.com/office/drawing/2010/main" xmlns="" w="9525">
                   <a:solidFill>
                     <a:srgbClr val="000000"/>
                   </a:solidFill>
@@ -1349,7 +1351,7 @@
             </a:ln>
             <a:extLst>
               <a:ext uri="{91240B29-F687-4f45-9708-019B960494DF}">
-                <a14:hiddenLine xmlns="" xmlns:a14="http://schemas.microsoft.com/office/drawing/2010/main" w="9525">
+                <a14:hiddenLine xmlns:a14="http://schemas.microsoft.com/office/drawing/2010/main" xmlns="" w="9525">
                   <a:solidFill>
                     <a:srgbClr val="000000"/>
                   </a:solidFill>
@@ -1439,7 +1441,7 @@
             </a:ln>
             <a:extLst>
               <a:ext uri="{91240B29-F687-4f45-9708-019B960494DF}">
-                <a14:hiddenLine xmlns="" xmlns:a14="http://schemas.microsoft.com/office/drawing/2010/main" w="9525">
+                <a14:hiddenLine xmlns:a14="http://schemas.microsoft.com/office/drawing/2010/main" xmlns="" w="9525">
                   <a:solidFill>
                     <a:srgbClr val="000000"/>
                   </a:solidFill>
@@ -1529,7 +1531,7 @@
             </a:ln>
             <a:extLst>
               <a:ext uri="{91240B29-F687-4f45-9708-019B960494DF}">
-                <a14:hiddenLine xmlns="" xmlns:a14="http://schemas.microsoft.com/office/drawing/2010/main" w="9525">
+                <a14:hiddenLine xmlns:a14="http://schemas.microsoft.com/office/drawing/2010/main" xmlns="" w="9525">
                   <a:solidFill>
                     <a:srgbClr val="000000"/>
                   </a:solidFill>
@@ -1591,7 +1593,7 @@
             </a:ln>
             <a:extLst>
               <a:ext uri="{91240B29-F687-4f45-9708-019B960494DF}">
-                <a14:hiddenLine xmlns="" xmlns:a14="http://schemas.microsoft.com/office/drawing/2010/main" w="9525">
+                <a14:hiddenLine xmlns:a14="http://schemas.microsoft.com/office/drawing/2010/main" xmlns="" w="9525">
                   <a:solidFill>
                     <a:srgbClr val="000000"/>
                   </a:solidFill>
@@ -1681,7 +1683,7 @@
             </a:ln>
             <a:extLst>
               <a:ext uri="{91240B29-F687-4f45-9708-019B960494DF}">
-                <a14:hiddenLine xmlns="" xmlns:a14="http://schemas.microsoft.com/office/drawing/2010/main" w="9525">
+                <a14:hiddenLine xmlns:a14="http://schemas.microsoft.com/office/drawing/2010/main" xmlns="" w="9525">
                   <a:solidFill>
                     <a:srgbClr val="000000"/>
                   </a:solidFill>
@@ -1771,7 +1773,7 @@
             </a:ln>
             <a:extLst>
               <a:ext uri="{91240B29-F687-4f45-9708-019B960494DF}">
-                <a14:hiddenLine xmlns="" xmlns:a14="http://schemas.microsoft.com/office/drawing/2010/main" w="9525">
+                <a14:hiddenLine xmlns:a14="http://schemas.microsoft.com/office/drawing/2010/main" xmlns="" w="9525">
                   <a:solidFill>
                     <a:srgbClr val="000000"/>
                   </a:solidFill>
@@ -1827,7 +1829,7 @@
             </a:ln>
             <a:extLst>
               <a:ext uri="{91240B29-F687-4f45-9708-019B960494DF}">
-                <a14:hiddenLine xmlns="" xmlns:a14="http://schemas.microsoft.com/office/drawing/2010/main" w="9525">
+                <a14:hiddenLine xmlns:a14="http://schemas.microsoft.com/office/drawing/2010/main" xmlns="" w="9525">
                   <a:solidFill>
                     <a:srgbClr val="000000"/>
                   </a:solidFill>
@@ -1917,7 +1919,7 @@
             </a:ln>
             <a:extLst>
               <a:ext uri="{91240B29-F687-4f45-9708-019B960494DF}">
-                <a14:hiddenLine xmlns="" xmlns:a14="http://schemas.microsoft.com/office/drawing/2010/main" w="9525">
+                <a14:hiddenLine xmlns:a14="http://schemas.microsoft.com/office/drawing/2010/main" xmlns="" w="9525">
                   <a:solidFill>
                     <a:srgbClr val="000000"/>
                   </a:solidFill>
@@ -1973,7 +1975,7 @@
             </a:ln>
             <a:extLst>
               <a:ext uri="{91240B29-F687-4f45-9708-019B960494DF}">
-                <a14:hiddenLine xmlns="" xmlns:a14="http://schemas.microsoft.com/office/drawing/2010/main" w="9525">
+                <a14:hiddenLine xmlns:a14="http://schemas.microsoft.com/office/drawing/2010/main" xmlns="" w="9525">
                   <a:solidFill>
                     <a:srgbClr val="000000"/>
                   </a:solidFill>
@@ -2063,7 +2065,7 @@
             </a:ln>
             <a:extLst>
               <a:ext uri="{91240B29-F687-4f45-9708-019B960494DF}">
-                <a14:hiddenLine xmlns="" xmlns:a14="http://schemas.microsoft.com/office/drawing/2010/main" w="9525">
+                <a14:hiddenLine xmlns:a14="http://schemas.microsoft.com/office/drawing/2010/main" xmlns="" w="9525">
                   <a:solidFill>
                     <a:srgbClr val="000000"/>
                   </a:solidFill>
@@ -2131,7 +2133,7 @@
             </a:ln>
             <a:extLst>
               <a:ext uri="{91240B29-F687-4f45-9708-019B960494DF}">
-                <a14:hiddenLine xmlns="" xmlns:a14="http://schemas.microsoft.com/office/drawing/2010/main" w="9525">
+                <a14:hiddenLine xmlns:a14="http://schemas.microsoft.com/office/drawing/2010/main" xmlns="" w="9525">
                   <a:solidFill>
                     <a:srgbClr val="000000"/>
                   </a:solidFill>
@@ -2221,7 +2223,7 @@
             </a:ln>
             <a:extLst>
               <a:ext uri="{91240B29-F687-4f45-9708-019B960494DF}">
-                <a14:hiddenLine xmlns="" xmlns:a14="http://schemas.microsoft.com/office/drawing/2010/main" w="9525">
+                <a14:hiddenLine xmlns:a14="http://schemas.microsoft.com/office/drawing/2010/main" xmlns="" w="9525">
                   <a:solidFill>
                     <a:srgbClr val="000000"/>
                   </a:solidFill>
@@ -2289,7 +2291,7 @@
             </a:ln>
             <a:extLst>
               <a:ext uri="{91240B29-F687-4f45-9708-019B960494DF}">
-                <a14:hiddenLine xmlns="" xmlns:a14="http://schemas.microsoft.com/office/drawing/2010/main" w="9525">
+                <a14:hiddenLine xmlns:a14="http://schemas.microsoft.com/office/drawing/2010/main" xmlns="" w="9525">
                   <a:solidFill>
                     <a:srgbClr val="000000"/>
                   </a:solidFill>
@@ -2379,7 +2381,7 @@
             </a:ln>
             <a:extLst>
               <a:ext uri="{91240B29-F687-4f45-9708-019B960494DF}">
-                <a14:hiddenLine xmlns="" xmlns:a14="http://schemas.microsoft.com/office/drawing/2010/main" w="9525">
+                <a14:hiddenLine xmlns:a14="http://schemas.microsoft.com/office/drawing/2010/main" xmlns="" w="9525">
                   <a:solidFill>
                     <a:srgbClr val="000000"/>
                   </a:solidFill>
@@ -2413,7 +2415,7 @@
             </a:ln>
             <a:extLst>
               <a:ext uri="{91240B29-F687-4f45-9708-019B960494DF}">
-                <a14:hiddenLine xmlns="" xmlns:a14="http://schemas.microsoft.com/office/drawing/2010/main" w="9525">
+                <a14:hiddenLine xmlns:a14="http://schemas.microsoft.com/office/drawing/2010/main" xmlns="" w="9525">
                   <a:solidFill>
                     <a:srgbClr val="000000"/>
                   </a:solidFill>
@@ -2503,7 +2505,7 @@
             </a:ln>
             <a:extLst>
               <a:ext uri="{91240B29-F687-4f45-9708-019B960494DF}">
-                <a14:hiddenLine xmlns="" xmlns:a14="http://schemas.microsoft.com/office/drawing/2010/main" w="9525">
+                <a14:hiddenLine xmlns:a14="http://schemas.microsoft.com/office/drawing/2010/main" xmlns="" w="9525">
                   <a:solidFill>
                     <a:srgbClr val="000000"/>
                   </a:solidFill>
@@ -2565,7 +2567,7 @@
             </a:ln>
             <a:extLst>
               <a:ext uri="{91240B29-F687-4f45-9708-019B960494DF}">
-                <a14:hiddenLine xmlns="" xmlns:a14="http://schemas.microsoft.com/office/drawing/2010/main" w="9525">
+                <a14:hiddenLine xmlns:a14="http://schemas.microsoft.com/office/drawing/2010/main" xmlns="" w="9525">
                   <a:solidFill>
                     <a:srgbClr val="000000"/>
                   </a:solidFill>
@@ -2627,7 +2629,7 @@
             </a:ln>
             <a:extLst>
               <a:ext uri="{91240B29-F687-4f45-9708-019B960494DF}">
-                <a14:hiddenLine xmlns="" xmlns:a14="http://schemas.microsoft.com/office/drawing/2010/main" w="9525">
+                <a14:hiddenLine xmlns:a14="http://schemas.microsoft.com/office/drawing/2010/main" xmlns="" w="9525">
                   <a:solidFill>
                     <a:srgbClr val="000000"/>
                   </a:solidFill>
@@ -2717,7 +2719,7 @@
             </a:ln>
             <a:extLst>
               <a:ext uri="{91240B29-F687-4f45-9708-019B960494DF}">
-                <a14:hiddenLine xmlns="" xmlns:a14="http://schemas.microsoft.com/office/drawing/2010/main" w="9525">
+                <a14:hiddenLine xmlns:a14="http://schemas.microsoft.com/office/drawing/2010/main" xmlns="" w="9525">
                   <a:solidFill>
                     <a:srgbClr val="000000"/>
                   </a:solidFill>
@@ -2785,7 +2787,7 @@
             </a:ln>
             <a:extLst>
               <a:ext uri="{91240B29-F687-4f45-9708-019B960494DF}">
-                <a14:hiddenLine xmlns="" xmlns:a14="http://schemas.microsoft.com/office/drawing/2010/main" w="9525">
+                <a14:hiddenLine xmlns:a14="http://schemas.microsoft.com/office/drawing/2010/main" xmlns="" w="9525">
                   <a:solidFill>
                     <a:srgbClr val="000000"/>
                   </a:solidFill>
@@ -2847,7 +2849,7 @@
             </a:ln>
             <a:extLst>
               <a:ext uri="{91240B29-F687-4f45-9708-019B960494DF}">
-                <a14:hiddenLine xmlns="" xmlns:a14="http://schemas.microsoft.com/office/drawing/2010/main" w="9525">
+                <a14:hiddenLine xmlns:a14="http://schemas.microsoft.com/office/drawing/2010/main" xmlns="" w="9525">
                   <a:solidFill>
                     <a:srgbClr val="000000"/>
                   </a:solidFill>
@@ -2937,7 +2939,7 @@
             </a:ln>
             <a:extLst>
               <a:ext uri="{91240B29-F687-4f45-9708-019B960494DF}">
-                <a14:hiddenLine xmlns="" xmlns:a14="http://schemas.microsoft.com/office/drawing/2010/main" w="9525">
+                <a14:hiddenLine xmlns:a14="http://schemas.microsoft.com/office/drawing/2010/main" xmlns="" w="9525">
                   <a:solidFill>
                     <a:srgbClr val="000000"/>
                   </a:solidFill>
@@ -2999,7 +3001,7 @@
             </a:ln>
             <a:extLst>
               <a:ext uri="{91240B29-F687-4f45-9708-019B960494DF}">
-                <a14:hiddenLine xmlns="" xmlns:a14="http://schemas.microsoft.com/office/drawing/2010/main" w="9525">
+                <a14:hiddenLine xmlns:a14="http://schemas.microsoft.com/office/drawing/2010/main" xmlns="" w="9525">
                   <a:solidFill>
                     <a:srgbClr val="000000"/>
                   </a:solidFill>
@@ -3089,7 +3091,7 @@
             </a:ln>
             <a:extLst>
               <a:ext uri="{91240B29-F687-4f45-9708-019B960494DF}">
-                <a14:hiddenLine xmlns="" xmlns:a14="http://schemas.microsoft.com/office/drawing/2010/main" w="9525">
+                <a14:hiddenLine xmlns:a14="http://schemas.microsoft.com/office/drawing/2010/main" xmlns="" w="9525">
                   <a:solidFill>
                     <a:srgbClr val="000000"/>
                   </a:solidFill>
@@ -3151,7 +3153,7 @@
             </a:ln>
             <a:extLst>
               <a:ext uri="{91240B29-F687-4f45-9708-019B960494DF}">
-                <a14:hiddenLine xmlns="" xmlns:a14="http://schemas.microsoft.com/office/drawing/2010/main" w="9525">
+                <a14:hiddenLine xmlns:a14="http://schemas.microsoft.com/office/drawing/2010/main" xmlns="" w="9525">
                   <a:solidFill>
                     <a:srgbClr val="000000"/>
                   </a:solidFill>
@@ -3241,7 +3243,7 @@
             </a:ln>
             <a:extLst>
               <a:ext uri="{91240B29-F687-4f45-9708-019B960494DF}">
-                <a14:hiddenLine xmlns="" xmlns:a14="http://schemas.microsoft.com/office/drawing/2010/main" w="9525">
+                <a14:hiddenLine xmlns:a14="http://schemas.microsoft.com/office/drawing/2010/main" xmlns="" w="9525">
                   <a:solidFill>
                     <a:srgbClr val="000000"/>
                   </a:solidFill>
@@ -3275,7 +3277,7 @@
             </a:ln>
             <a:extLst>
               <a:ext uri="{91240B29-F687-4f45-9708-019B960494DF}">
-                <a14:hiddenLine xmlns="" xmlns:a14="http://schemas.microsoft.com/office/drawing/2010/main" w="9525">
+                <a14:hiddenLine xmlns:a14="http://schemas.microsoft.com/office/drawing/2010/main" xmlns="" w="9525">
                   <a:solidFill>
                     <a:srgbClr val="000000"/>
                   </a:solidFill>
@@ -3340,7 +3342,7 @@
             </a:ln>
             <a:extLst>
               <a:ext uri="{91240B29-F687-4f45-9708-019B960494DF}">
-                <a14:hiddenLine xmlns="" xmlns:a14="http://schemas.microsoft.com/office/drawing/2010/main" w="9525">
+                <a14:hiddenLine xmlns:a14="http://schemas.microsoft.com/office/drawing/2010/main" xmlns="" w="9525">
                   <a:solidFill>
                     <a:srgbClr val="000000"/>
                   </a:solidFill>
@@ -3430,7 +3432,7 @@
             </a:ln>
             <a:extLst>
               <a:ext uri="{91240B29-F687-4f45-9708-019B960494DF}">
-                <a14:hiddenLine xmlns="" xmlns:a14="http://schemas.microsoft.com/office/drawing/2010/main" w="9525">
+                <a14:hiddenLine xmlns:a14="http://schemas.microsoft.com/office/drawing/2010/main" xmlns="" w="9525">
                   <a:solidFill>
                     <a:srgbClr val="000000"/>
                   </a:solidFill>
@@ -3492,7 +3494,7 @@
             </a:ln>
             <a:extLst>
               <a:ext uri="{91240B29-F687-4f45-9708-019B960494DF}">
-                <a14:hiddenLine xmlns="" xmlns:a14="http://schemas.microsoft.com/office/drawing/2010/main" w="9525">
+                <a14:hiddenLine xmlns:a14="http://schemas.microsoft.com/office/drawing/2010/main" xmlns="" w="9525">
                   <a:solidFill>
                     <a:srgbClr val="000000"/>
                   </a:solidFill>
@@ -3582,7 +3584,7 @@
             </a:ln>
             <a:extLst>
               <a:ext uri="{91240B29-F687-4f45-9708-019B960494DF}">
-                <a14:hiddenLine xmlns="" xmlns:a14="http://schemas.microsoft.com/office/drawing/2010/main" w="9525">
+                <a14:hiddenLine xmlns:a14="http://schemas.microsoft.com/office/drawing/2010/main" xmlns="" w="9525">
                   <a:solidFill>
                     <a:srgbClr val="000000"/>
                   </a:solidFill>
@@ -3672,7 +3674,7 @@
             </a:ln>
             <a:extLst>
               <a:ext uri="{91240B29-F687-4f45-9708-019B960494DF}">
-                <a14:hiddenLine xmlns="" xmlns:a14="http://schemas.microsoft.com/office/drawing/2010/main" w="9525">
+                <a14:hiddenLine xmlns:a14="http://schemas.microsoft.com/office/drawing/2010/main" xmlns="" w="9525">
                   <a:solidFill>
                     <a:srgbClr val="000000"/>
                   </a:solidFill>
@@ -3737,7 +3739,7 @@
             </a:ln>
             <a:extLst>
               <a:ext uri="{91240B29-F687-4f45-9708-019B960494DF}">
-                <a14:hiddenLine xmlns="" xmlns:a14="http://schemas.microsoft.com/office/drawing/2010/main" w="9525">
+                <a14:hiddenLine xmlns:a14="http://schemas.microsoft.com/office/drawing/2010/main" xmlns="" w="9525">
                   <a:solidFill>
                     <a:srgbClr val="000000"/>
                   </a:solidFill>
@@ -3799,7 +3801,7 @@
             </a:ln>
             <a:extLst>
               <a:ext uri="{91240B29-F687-4f45-9708-019B960494DF}">
-                <a14:hiddenLine xmlns="" xmlns:a14="http://schemas.microsoft.com/office/drawing/2010/main" w="9525">
+                <a14:hiddenLine xmlns:a14="http://schemas.microsoft.com/office/drawing/2010/main" xmlns="" w="9525">
                   <a:solidFill>
                     <a:srgbClr val="000000"/>
                   </a:solidFill>
@@ -3889,7 +3891,7 @@
             </a:ln>
             <a:extLst>
               <a:ext uri="{91240B29-F687-4f45-9708-019B960494DF}">
-                <a14:hiddenLine xmlns="" xmlns:a14="http://schemas.microsoft.com/office/drawing/2010/main" w="9525">
+                <a14:hiddenLine xmlns:a14="http://schemas.microsoft.com/office/drawing/2010/main" xmlns="" w="9525">
                   <a:solidFill>
                     <a:srgbClr val="000000"/>
                   </a:solidFill>
@@ -3979,7 +3981,7 @@
             </a:ln>
             <a:extLst>
               <a:ext uri="{91240B29-F687-4f45-9708-019B960494DF}">
-                <a14:hiddenLine xmlns="" xmlns:a14="http://schemas.microsoft.com/office/drawing/2010/main" w="9525">
+                <a14:hiddenLine xmlns:a14="http://schemas.microsoft.com/office/drawing/2010/main" xmlns="" w="9525">
                   <a:solidFill>
                     <a:srgbClr val="000000"/>
                   </a:solidFill>
@@ -4041,7 +4043,7 @@
             </a:ln>
             <a:extLst>
               <a:ext uri="{91240B29-F687-4f45-9708-019B960494DF}">
-                <a14:hiddenLine xmlns="" xmlns:a14="http://schemas.microsoft.com/office/drawing/2010/main" w="9525">
+                <a14:hiddenLine xmlns:a14="http://schemas.microsoft.com/office/drawing/2010/main" xmlns="" w="9525">
                   <a:solidFill>
                     <a:srgbClr val="000000"/>
                   </a:solidFill>
@@ -4161,7 +4163,7 @@
             </a:ln>
             <a:extLst>
               <a:ext uri="{91240B29-F687-4f45-9708-019B960494DF}">
-                <a14:hiddenLine xmlns="" xmlns:a14="http://schemas.microsoft.com/office/drawing/2010/main" w="9525">
+                <a14:hiddenLine xmlns:a14="http://schemas.microsoft.com/office/drawing/2010/main" xmlns="" w="9525">
                   <a:solidFill>
                     <a:srgbClr val="000000"/>
                   </a:solidFill>
@@ -4229,7 +4231,7 @@
             </a:ln>
             <a:extLst>
               <a:ext uri="{91240B29-F687-4f45-9708-019B960494DF}">
-                <a14:hiddenLine xmlns="" xmlns:a14="http://schemas.microsoft.com/office/drawing/2010/main" w="9525">
+                <a14:hiddenLine xmlns:a14="http://schemas.microsoft.com/office/drawing/2010/main" xmlns="" w="9525">
                   <a:solidFill>
                     <a:srgbClr val="000000"/>
                   </a:solidFill>
@@ -4319,7 +4321,7 @@
             </a:ln>
             <a:extLst>
               <a:ext uri="{91240B29-F687-4f45-9708-019B960494DF}">
-                <a14:hiddenLine xmlns="" xmlns:a14="http://schemas.microsoft.com/office/drawing/2010/main" w="9525">
+                <a14:hiddenLine xmlns:a14="http://schemas.microsoft.com/office/drawing/2010/main" xmlns="" w="9525">
                   <a:solidFill>
                     <a:srgbClr val="000000"/>
                   </a:solidFill>
@@ -4459,7 +4461,7 @@
           <a:p>
             <a:fld id="{48A87A34-81AB-432B-8DAE-1953F412C126}" type="datetimeFigureOut">
               <a:rPr lang="en-US" dirty="0"/>
-              <a:t>4/15/2026</a:t>
+              <a:t>4/23/2026</a:t>
             </a:fld>
             <a:endParaRPr lang="en-US" dirty="0"/>
           </a:p>
@@ -4721,7 +4723,7 @@
           <a:p>
             <a:fld id="{48A87A34-81AB-432B-8DAE-1953F412C126}" type="datetimeFigureOut">
               <a:rPr lang="en-US" dirty="0"/>
-              <a:t>4/15/2026</a:t>
+              <a:t>4/23/2026</a:t>
             </a:fld>
             <a:endParaRPr lang="en-US" dirty="0"/>
           </a:p>
@@ -4912,7 +4914,7 @@
           <a:p>
             <a:fld id="{48A87A34-81AB-432B-8DAE-1953F412C126}" type="datetimeFigureOut">
               <a:rPr lang="en-US" dirty="0"/>
-              <a:t>4/15/2026</a:t>
+              <a:t>4/23/2026</a:t>
             </a:fld>
             <a:endParaRPr lang="en-US" dirty="0"/>
           </a:p>
@@ -5170,7 +5172,7 @@
           <a:p>
             <a:fld id="{48A87A34-81AB-432B-8DAE-1953F412C126}" type="datetimeFigureOut">
               <a:rPr lang="en-US" dirty="0"/>
-              <a:t>4/15/2026</a:t>
+              <a:t>4/23/2026</a:t>
             </a:fld>
             <a:endParaRPr lang="en-US" dirty="0"/>
           </a:p>
@@ -5599,7 +5601,7 @@
           <a:p>
             <a:fld id="{48A87A34-81AB-432B-8DAE-1953F412C126}" type="datetimeFigureOut">
               <a:rPr lang="en-US" dirty="0"/>
-              <a:t>4/15/2026</a:t>
+              <a:t>4/23/2026</a:t>
             </a:fld>
             <a:endParaRPr lang="en-US" dirty="0"/>
           </a:p>
@@ -6140,7 +6142,7 @@
           <a:p>
             <a:fld id="{48A87A34-81AB-432B-8DAE-1953F412C126}" type="datetimeFigureOut">
               <a:rPr lang="en-US" dirty="0"/>
-              <a:t>4/15/2026</a:t>
+              <a:t>4/23/2026</a:t>
             </a:fld>
             <a:endParaRPr lang="en-US" dirty="0"/>
           </a:p>
@@ -6855,7 +6857,7 @@
           <a:p>
             <a:fld id="{48A87A34-81AB-432B-8DAE-1953F412C126}" type="datetimeFigureOut">
               <a:rPr lang="en-US" dirty="0"/>
-              <a:t>4/15/2026</a:t>
+              <a:t>4/23/2026</a:t>
             </a:fld>
             <a:endParaRPr lang="en-US" dirty="0"/>
           </a:p>
@@ -7020,7 +7022,7 @@
           <a:p>
             <a:fld id="{48A87A34-81AB-432B-8DAE-1953F412C126}" type="datetimeFigureOut">
               <a:rPr lang="en-US" dirty="0"/>
-              <a:t>4/15/2026</a:t>
+              <a:t>4/23/2026</a:t>
             </a:fld>
             <a:endParaRPr lang="en-US" dirty="0"/>
           </a:p>
@@ -7195,7 +7197,7 @@
           <a:p>
             <a:fld id="{48A87A34-81AB-432B-8DAE-1953F412C126}" type="datetimeFigureOut">
               <a:rPr lang="en-US" dirty="0"/>
-              <a:t>4/15/2026</a:t>
+              <a:t>4/23/2026</a:t>
             </a:fld>
             <a:endParaRPr lang="en-US" dirty="0"/>
           </a:p>
@@ -7360,7 +7362,7 @@
           <a:p>
             <a:fld id="{48A87A34-81AB-432B-8DAE-1953F412C126}" type="datetimeFigureOut">
               <a:rPr lang="en-US" dirty="0"/>
-              <a:t>4/15/2026</a:t>
+              <a:t>4/23/2026</a:t>
             </a:fld>
             <a:endParaRPr lang="en-US" dirty="0"/>
           </a:p>
@@ -7605,7 +7607,7 @@
           <a:p>
             <a:fld id="{48A87A34-81AB-432B-8DAE-1953F412C126}" type="datetimeFigureOut">
               <a:rPr lang="en-US" dirty="0"/>
-              <a:t>4/15/2026</a:t>
+              <a:t>4/23/2026</a:t>
             </a:fld>
             <a:endParaRPr lang="en-US" dirty="0"/>
           </a:p>
@@ -7832,7 +7834,7 @@
           <a:p>
             <a:fld id="{48A87A34-81AB-432B-8DAE-1953F412C126}" type="datetimeFigureOut">
               <a:rPr lang="en-US" dirty="0"/>
-              <a:t>4/15/2026</a:t>
+              <a:t>4/23/2026</a:t>
             </a:fld>
             <a:endParaRPr lang="en-US" dirty="0"/>
           </a:p>
@@ -8208,7 +8210,7 @@
           <a:p>
             <a:fld id="{48A87A34-81AB-432B-8DAE-1953F412C126}" type="datetimeFigureOut">
               <a:rPr lang="en-US" dirty="0"/>
-              <a:t>4/15/2026</a:t>
+              <a:t>4/23/2026</a:t>
             </a:fld>
             <a:endParaRPr lang="en-US" dirty="0"/>
           </a:p>
@@ -8321,7 +8323,7 @@
           <a:p>
             <a:fld id="{48A87A34-81AB-432B-8DAE-1953F412C126}" type="datetimeFigureOut">
               <a:rPr lang="en-US" dirty="0"/>
-              <a:t>4/15/2026</a:t>
+              <a:t>4/23/2026</a:t>
             </a:fld>
             <a:endParaRPr lang="en-US" dirty="0"/>
           </a:p>
@@ -8411,7 +8413,7 @@
           <a:p>
             <a:fld id="{48A87A34-81AB-432B-8DAE-1953F412C126}" type="datetimeFigureOut">
               <a:rPr lang="en-US" dirty="0"/>
-              <a:t>4/15/2026</a:t>
+              <a:t>4/23/2026</a:t>
             </a:fld>
             <a:endParaRPr lang="en-US" dirty="0"/>
           </a:p>
@@ -8655,7 +8657,7 @@
           <a:p>
             <a:fld id="{48A87A34-81AB-432B-8DAE-1953F412C126}" type="datetimeFigureOut">
               <a:rPr lang="en-US" dirty="0"/>
-              <a:t>4/15/2026</a:t>
+              <a:t>4/23/2026</a:t>
             </a:fld>
             <a:endParaRPr lang="en-US" dirty="0"/>
           </a:p>
@@ -8930,7 +8932,7 @@
           <a:p>
             <a:fld id="{48A87A34-81AB-432B-8DAE-1953F412C126}" type="datetimeFigureOut">
               <a:rPr lang="en-US" dirty="0"/>
-              <a:t>4/15/2026</a:t>
+              <a:t>4/23/2026</a:t>
             </a:fld>
             <a:endParaRPr lang="en-US" dirty="0"/>
           </a:p>
@@ -9041,7 +9043,7 @@
           <a:noFill/>
           <a:extLst>
             <a:ext uri="{909E8E84-426E-40dd-AFC4-6F175D3DCCD1}">
-              <a14:hiddenFill xmlns="" xmlns:a14="http://schemas.microsoft.com/office/drawing/2010/main">
+              <a14:hiddenFill xmlns:a14="http://schemas.microsoft.com/office/drawing/2010/main" xmlns="">
                 <a:solidFill>
                   <a:srgbClr val="FFFFFF"/>
                 </a:solidFill>
@@ -9115,7 +9117,7 @@
               </a:ln>
               <a:extLst>
                 <a:ext uri="{91240B29-F687-4f45-9708-019B960494DF}">
-                  <a14:hiddenLine xmlns="" xmlns:a14="http://schemas.microsoft.com/office/drawing/2010/main" w="9525">
+                  <a14:hiddenLine xmlns:a14="http://schemas.microsoft.com/office/drawing/2010/main" xmlns="" w="9525">
                     <a:solidFill>
                       <a:srgbClr val="000000"/>
                     </a:solidFill>
@@ -9205,7 +9207,7 @@
               </a:ln>
               <a:extLst>
                 <a:ext uri="{91240B29-F687-4f45-9708-019B960494DF}">
-                  <a14:hiddenLine xmlns="" xmlns:a14="http://schemas.microsoft.com/office/drawing/2010/main" w="9525">
+                  <a14:hiddenLine xmlns:a14="http://schemas.microsoft.com/office/drawing/2010/main" xmlns="" w="9525">
                     <a:solidFill>
                       <a:srgbClr val="000000"/>
                     </a:solidFill>
@@ -9295,7 +9297,7 @@
               </a:ln>
               <a:extLst>
                 <a:ext uri="{91240B29-F687-4f45-9708-019B960494DF}">
-                  <a14:hiddenLine xmlns="" xmlns:a14="http://schemas.microsoft.com/office/drawing/2010/main" w="9525">
+                  <a14:hiddenLine xmlns:a14="http://schemas.microsoft.com/office/drawing/2010/main" xmlns="" w="9525">
                     <a:solidFill>
                       <a:srgbClr val="000000"/>
                     </a:solidFill>
@@ -9357,7 +9359,7 @@
               </a:ln>
               <a:extLst>
                 <a:ext uri="{91240B29-F687-4f45-9708-019B960494DF}">
-                  <a14:hiddenLine xmlns="" xmlns:a14="http://schemas.microsoft.com/office/drawing/2010/main" w="9525">
+                  <a14:hiddenLine xmlns:a14="http://schemas.microsoft.com/office/drawing/2010/main" xmlns="" w="9525">
                     <a:solidFill>
                       <a:srgbClr val="000000"/>
                     </a:solidFill>
@@ -9447,7 +9449,7 @@
               </a:ln>
               <a:extLst>
                 <a:ext uri="{91240B29-F687-4f45-9708-019B960494DF}">
-                  <a14:hiddenLine xmlns="" xmlns:a14="http://schemas.microsoft.com/office/drawing/2010/main" w="9525">
+                  <a14:hiddenLine xmlns:a14="http://schemas.microsoft.com/office/drawing/2010/main" xmlns="" w="9525">
                     <a:solidFill>
                       <a:srgbClr val="000000"/>
                     </a:solidFill>
@@ -9509,7 +9511,7 @@
               </a:ln>
               <a:extLst>
                 <a:ext uri="{91240B29-F687-4f45-9708-019B960494DF}">
-                  <a14:hiddenLine xmlns="" xmlns:a14="http://schemas.microsoft.com/office/drawing/2010/main" w="9525">
+                  <a14:hiddenLine xmlns:a14="http://schemas.microsoft.com/office/drawing/2010/main" xmlns="" w="9525">
                     <a:solidFill>
                       <a:srgbClr val="000000"/>
                     </a:solidFill>
@@ -9571,7 +9573,7 @@
               </a:ln>
               <a:extLst>
                 <a:ext uri="{91240B29-F687-4f45-9708-019B960494DF}">
-                  <a14:hiddenLine xmlns="" xmlns:a14="http://schemas.microsoft.com/office/drawing/2010/main" w="9525">
+                  <a14:hiddenLine xmlns:a14="http://schemas.microsoft.com/office/drawing/2010/main" xmlns="" w="9525">
                     <a:solidFill>
                       <a:srgbClr val="000000"/>
                     </a:solidFill>
@@ -9661,7 +9663,7 @@
               </a:ln>
               <a:extLst>
                 <a:ext uri="{91240B29-F687-4f45-9708-019B960494DF}">
-                  <a14:hiddenLine xmlns="" xmlns:a14="http://schemas.microsoft.com/office/drawing/2010/main" w="9525">
+                  <a14:hiddenLine xmlns:a14="http://schemas.microsoft.com/office/drawing/2010/main" xmlns="" w="9525">
                     <a:solidFill>
                       <a:srgbClr val="000000"/>
                     </a:solidFill>
@@ -9751,7 +9753,7 @@
               </a:ln>
               <a:extLst>
                 <a:ext uri="{91240B29-F687-4f45-9708-019B960494DF}">
-                  <a14:hiddenLine xmlns="" xmlns:a14="http://schemas.microsoft.com/office/drawing/2010/main" w="9525">
+                  <a14:hiddenLine xmlns:a14="http://schemas.microsoft.com/office/drawing/2010/main" xmlns="" w="9525">
                     <a:solidFill>
                       <a:srgbClr val="000000"/>
                     </a:solidFill>
@@ -9813,7 +9815,7 @@
               </a:ln>
               <a:extLst>
                 <a:ext uri="{91240B29-F687-4f45-9708-019B960494DF}">
-                  <a14:hiddenLine xmlns="" xmlns:a14="http://schemas.microsoft.com/office/drawing/2010/main" w="9525">
+                  <a14:hiddenLine xmlns:a14="http://schemas.microsoft.com/office/drawing/2010/main" xmlns="" w="9525">
                     <a:solidFill>
                       <a:srgbClr val="000000"/>
                     </a:solidFill>
@@ -9923,7 +9925,7 @@
               </a:ln>
               <a:extLst>
                 <a:ext uri="{91240B29-F687-4f45-9708-019B960494DF}">
-                  <a14:hiddenLine xmlns="" xmlns:a14="http://schemas.microsoft.com/office/drawing/2010/main" w="9525">
+                  <a14:hiddenLine xmlns:a14="http://schemas.microsoft.com/office/drawing/2010/main" xmlns="" w="9525">
                     <a:solidFill>
                       <a:srgbClr val="000000"/>
                     </a:solidFill>
@@ -10007,7 +10009,7 @@
               </a:ln>
               <a:extLst>
                 <a:ext uri="{91240B29-F687-4f45-9708-019B960494DF}">
-                  <a14:hiddenLine xmlns="" xmlns:a14="http://schemas.microsoft.com/office/drawing/2010/main" w="9525">
+                  <a14:hiddenLine xmlns:a14="http://schemas.microsoft.com/office/drawing/2010/main" xmlns="" w="9525">
                     <a:solidFill>
                       <a:srgbClr val="000000"/>
                     </a:solidFill>
@@ -10069,7 +10071,7 @@
               </a:ln>
               <a:extLst>
                 <a:ext uri="{91240B29-F687-4f45-9708-019B960494DF}">
-                  <a14:hiddenLine xmlns="" xmlns:a14="http://schemas.microsoft.com/office/drawing/2010/main" w="9525">
+                  <a14:hiddenLine xmlns:a14="http://schemas.microsoft.com/office/drawing/2010/main" xmlns="" w="9525">
                     <a:solidFill>
                       <a:srgbClr val="000000"/>
                     </a:solidFill>
@@ -10131,7 +10133,7 @@
               </a:ln>
               <a:extLst>
                 <a:ext uri="{91240B29-F687-4f45-9708-019B960494DF}">
-                  <a14:hiddenLine xmlns="" xmlns:a14="http://schemas.microsoft.com/office/drawing/2010/main" w="9525">
+                  <a14:hiddenLine xmlns:a14="http://schemas.microsoft.com/office/drawing/2010/main" xmlns="" w="9525">
                     <a:solidFill>
                       <a:srgbClr val="000000"/>
                     </a:solidFill>
@@ -10221,7 +10223,7 @@
               </a:ln>
               <a:extLst>
                 <a:ext uri="{91240B29-F687-4f45-9708-019B960494DF}">
-                  <a14:hiddenLine xmlns="" xmlns:a14="http://schemas.microsoft.com/office/drawing/2010/main" w="9525">
+                  <a14:hiddenLine xmlns:a14="http://schemas.microsoft.com/office/drawing/2010/main" xmlns="" w="9525">
                     <a:solidFill>
                       <a:srgbClr val="000000"/>
                     </a:solidFill>
@@ -10255,7 +10257,7 @@
               </a:ln>
               <a:extLst>
                 <a:ext uri="{91240B29-F687-4f45-9708-019B960494DF}">
-                  <a14:hiddenLine xmlns="" xmlns:a14="http://schemas.microsoft.com/office/drawing/2010/main" w="9525">
+                  <a14:hiddenLine xmlns:a14="http://schemas.microsoft.com/office/drawing/2010/main" xmlns="" w="9525">
                     <a:solidFill>
                       <a:srgbClr val="000000"/>
                     </a:solidFill>
@@ -10320,7 +10322,7 @@
               </a:ln>
               <a:extLst>
                 <a:ext uri="{91240B29-F687-4f45-9708-019B960494DF}">
-                  <a14:hiddenLine xmlns="" xmlns:a14="http://schemas.microsoft.com/office/drawing/2010/main" w="9525">
+                  <a14:hiddenLine xmlns:a14="http://schemas.microsoft.com/office/drawing/2010/main" xmlns="" w="9525">
                     <a:solidFill>
                       <a:srgbClr val="000000"/>
                     </a:solidFill>
@@ -10410,7 +10412,7 @@
               </a:ln>
               <a:extLst>
                 <a:ext uri="{91240B29-F687-4f45-9708-019B960494DF}">
-                  <a14:hiddenLine xmlns="" xmlns:a14="http://schemas.microsoft.com/office/drawing/2010/main" w="9525">
+                  <a14:hiddenLine xmlns:a14="http://schemas.microsoft.com/office/drawing/2010/main" xmlns="" w="9525">
                     <a:solidFill>
                       <a:srgbClr val="000000"/>
                     </a:solidFill>
@@ -10472,7 +10474,7 @@
               </a:ln>
               <a:extLst>
                 <a:ext uri="{91240B29-F687-4f45-9708-019B960494DF}">
-                  <a14:hiddenLine xmlns="" xmlns:a14="http://schemas.microsoft.com/office/drawing/2010/main" w="9525">
+                  <a14:hiddenLine xmlns:a14="http://schemas.microsoft.com/office/drawing/2010/main" xmlns="" w="9525">
                     <a:solidFill>
                       <a:srgbClr val="000000"/>
                     </a:solidFill>
@@ -10562,7 +10564,7 @@
               </a:ln>
               <a:extLst>
                 <a:ext uri="{91240B29-F687-4f45-9708-019B960494DF}">
-                  <a14:hiddenLine xmlns="" xmlns:a14="http://schemas.microsoft.com/office/drawing/2010/main" w="9525">
+                  <a14:hiddenLine xmlns:a14="http://schemas.microsoft.com/office/drawing/2010/main" xmlns="" w="9525">
                     <a:solidFill>
                       <a:srgbClr val="000000"/>
                     </a:solidFill>
@@ -10627,7 +10629,7 @@
               </a:ln>
               <a:extLst>
                 <a:ext uri="{91240B29-F687-4f45-9708-019B960494DF}">
-                  <a14:hiddenLine xmlns="" xmlns:a14="http://schemas.microsoft.com/office/drawing/2010/main" w="9525">
+                  <a14:hiddenLine xmlns:a14="http://schemas.microsoft.com/office/drawing/2010/main" xmlns="" w="9525">
                     <a:solidFill>
                       <a:srgbClr val="000000"/>
                     </a:solidFill>
@@ -10689,7 +10691,7 @@
               </a:ln>
               <a:extLst>
                 <a:ext uri="{91240B29-F687-4f45-9708-019B960494DF}">
-                  <a14:hiddenLine xmlns="" xmlns:a14="http://schemas.microsoft.com/office/drawing/2010/main" w="9525">
+                  <a14:hiddenLine xmlns:a14="http://schemas.microsoft.com/office/drawing/2010/main" xmlns="" w="9525">
                     <a:solidFill>
                       <a:srgbClr val="000000"/>
                     </a:solidFill>
@@ -10779,7 +10781,7 @@
               </a:ln>
               <a:extLst>
                 <a:ext uri="{91240B29-F687-4f45-9708-019B960494DF}">
-                  <a14:hiddenLine xmlns="" xmlns:a14="http://schemas.microsoft.com/office/drawing/2010/main" w="9525">
+                  <a14:hiddenLine xmlns:a14="http://schemas.microsoft.com/office/drawing/2010/main" xmlns="" w="9525">
                     <a:solidFill>
                       <a:srgbClr val="000000"/>
                     </a:solidFill>
@@ -10869,7 +10871,7 @@
               </a:ln>
               <a:extLst>
                 <a:ext uri="{91240B29-F687-4f45-9708-019B960494DF}">
-                  <a14:hiddenLine xmlns="" xmlns:a14="http://schemas.microsoft.com/office/drawing/2010/main" w="9525">
+                  <a14:hiddenLine xmlns:a14="http://schemas.microsoft.com/office/drawing/2010/main" xmlns="" w="9525">
                     <a:solidFill>
                       <a:srgbClr val="000000"/>
                     </a:solidFill>
@@ -10934,7 +10936,7 @@
               </a:ln>
               <a:extLst>
                 <a:ext uri="{91240B29-F687-4f45-9708-019B960494DF}">
-                  <a14:hiddenLine xmlns="" xmlns:a14="http://schemas.microsoft.com/office/drawing/2010/main" w="9525">
+                  <a14:hiddenLine xmlns:a14="http://schemas.microsoft.com/office/drawing/2010/main" xmlns="" w="9525">
                     <a:solidFill>
                       <a:srgbClr val="000000"/>
                     </a:solidFill>
@@ -11054,7 +11056,7 @@
               </a:ln>
               <a:extLst>
                 <a:ext uri="{91240B29-F687-4f45-9708-019B960494DF}">
-                  <a14:hiddenLine xmlns="" xmlns:a14="http://schemas.microsoft.com/office/drawing/2010/main" w="9525">
+                  <a14:hiddenLine xmlns:a14="http://schemas.microsoft.com/office/drawing/2010/main" xmlns="" w="9525">
                     <a:solidFill>
                       <a:srgbClr val="000000"/>
                     </a:solidFill>
@@ -11152,7 +11154,7 @@
               </a:ln>
               <a:extLst>
                 <a:ext uri="{91240B29-F687-4f45-9708-019B960494DF}">
-                  <a14:hiddenLine xmlns="" xmlns:a14="http://schemas.microsoft.com/office/drawing/2010/main" w="9525">
+                  <a14:hiddenLine xmlns:a14="http://schemas.microsoft.com/office/drawing/2010/main" xmlns="" w="9525">
                     <a:solidFill>
                       <a:srgbClr val="000000"/>
                     </a:solidFill>
@@ -11267,7 +11269,7 @@
               </a:ln>
               <a:extLst>
                 <a:ext uri="{91240B29-F687-4f45-9708-019B960494DF}">
-                  <a14:hiddenLine xmlns="" xmlns:a14="http://schemas.microsoft.com/office/drawing/2010/main" w="9525">
+                  <a14:hiddenLine xmlns:a14="http://schemas.microsoft.com/office/drawing/2010/main" xmlns="" w="9525">
                     <a:solidFill>
                       <a:srgbClr val="000000"/>
                     </a:solidFill>
@@ -11357,7 +11359,7 @@
               </a:ln>
               <a:extLst>
                 <a:ext uri="{91240B29-F687-4f45-9708-019B960494DF}">
-                  <a14:hiddenLine xmlns="" xmlns:a14="http://schemas.microsoft.com/office/drawing/2010/main" w="9525">
+                  <a14:hiddenLine xmlns:a14="http://schemas.microsoft.com/office/drawing/2010/main" xmlns="" w="9525">
                     <a:solidFill>
                       <a:srgbClr val="000000"/>
                     </a:solidFill>
@@ -11422,7 +11424,7 @@
               </a:ln>
               <a:extLst>
                 <a:ext uri="{91240B29-F687-4f45-9708-019B960494DF}">
-                  <a14:hiddenLine xmlns="" xmlns:a14="http://schemas.microsoft.com/office/drawing/2010/main" w="9525">
+                  <a14:hiddenLine xmlns:a14="http://schemas.microsoft.com/office/drawing/2010/main" xmlns="" w="9525">
                     <a:solidFill>
                       <a:srgbClr val="000000"/>
                     </a:solidFill>
@@ -11512,7 +11514,7 @@
               </a:ln>
               <a:extLst>
                 <a:ext uri="{91240B29-F687-4f45-9708-019B960494DF}">
-                  <a14:hiddenLine xmlns="" xmlns:a14="http://schemas.microsoft.com/office/drawing/2010/main" w="9525">
+                  <a14:hiddenLine xmlns:a14="http://schemas.microsoft.com/office/drawing/2010/main" xmlns="" w="9525">
                     <a:solidFill>
                       <a:srgbClr val="000000"/>
                     </a:solidFill>
@@ -11580,7 +11582,7 @@
               </a:ln>
               <a:extLst>
                 <a:ext uri="{91240B29-F687-4f45-9708-019B960494DF}">
-                  <a14:hiddenLine xmlns="" xmlns:a14="http://schemas.microsoft.com/office/drawing/2010/main" w="9525">
+                  <a14:hiddenLine xmlns:a14="http://schemas.microsoft.com/office/drawing/2010/main" xmlns="" w="9525">
                     <a:solidFill>
                       <a:srgbClr val="000000"/>
                     </a:solidFill>
@@ -11670,7 +11672,7 @@
               </a:ln>
               <a:extLst>
                 <a:ext uri="{91240B29-F687-4f45-9708-019B960494DF}">
-                  <a14:hiddenLine xmlns="" xmlns:a14="http://schemas.microsoft.com/office/drawing/2010/main" w="9525">
+                  <a14:hiddenLine xmlns:a14="http://schemas.microsoft.com/office/drawing/2010/main" xmlns="" w="9525">
                     <a:solidFill>
                       <a:srgbClr val="000000"/>
                     </a:solidFill>
@@ -11738,7 +11740,7 @@
               </a:ln>
               <a:extLst>
                 <a:ext uri="{91240B29-F687-4f45-9708-019B960494DF}">
-                  <a14:hiddenLine xmlns="" xmlns:a14="http://schemas.microsoft.com/office/drawing/2010/main" w="9525">
+                  <a14:hiddenLine xmlns:a14="http://schemas.microsoft.com/office/drawing/2010/main" xmlns="" w="9525">
                     <a:solidFill>
                       <a:srgbClr val="000000"/>
                     </a:solidFill>
@@ -11828,7 +11830,7 @@
               </a:ln>
               <a:extLst>
                 <a:ext uri="{91240B29-F687-4f45-9708-019B960494DF}">
-                  <a14:hiddenLine xmlns="" xmlns:a14="http://schemas.microsoft.com/office/drawing/2010/main" w="9525">
+                  <a14:hiddenLine xmlns:a14="http://schemas.microsoft.com/office/drawing/2010/main" xmlns="" w="9525">
                     <a:solidFill>
                       <a:srgbClr val="000000"/>
                     </a:solidFill>
@@ -11862,7 +11864,7 @@
               </a:ln>
               <a:extLst>
                 <a:ext uri="{91240B29-F687-4f45-9708-019B960494DF}">
-                  <a14:hiddenLine xmlns="" xmlns:a14="http://schemas.microsoft.com/office/drawing/2010/main" w="9525">
+                  <a14:hiddenLine xmlns:a14="http://schemas.microsoft.com/office/drawing/2010/main" xmlns="" w="9525">
                     <a:solidFill>
                       <a:srgbClr val="000000"/>
                     </a:solidFill>
@@ -12003,7 +12005,7 @@
             <a:fld id="{48A87A34-81AB-432B-8DAE-1953F412C126}" type="datetimeFigureOut">
               <a:rPr lang="en-US" dirty="0"/>
               <a:pPr/>
-              <a:t>4/15/2026</a:t>
+              <a:t>4/23/2026</a:t>
             </a:fld>
             <a:endParaRPr lang="en-US" dirty="0"/>
           </a:p>
@@ -13419,7 +13421,7 @@
         <p:spPr/>
         <p:txBody>
           <a:bodyPr>
-            <a:normAutofit fontScale="92500" lnSpcReduction="10000"/>
+            <a:normAutofit fontScale="77500" lnSpcReduction="20000"/>
           </a:bodyPr>
           <a:lstStyle/>
           <a:p>
@@ -13620,8 +13622,44 @@
             </a:r>
             <a:r>
               <a:rPr lang="zh-TW" altLang="en-US" sz="2400" dirty="0"/>
-              <a:t>。</a:t>
-            </a:r>
+              <a:t>，離婚最少可能原因是</a:t>
+            </a:r>
+            <a:r>
+              <a:rPr lang="en-US" altLang="zh-TW" sz="2400" dirty="0"/>
+              <a:t>2</a:t>
+            </a:r>
+            <a:r>
+              <a:rPr lang="zh-TW" altLang="en-US" sz="2400" dirty="0"/>
+              <a:t>月過年期間，不想打破團圓的氣氛，且</a:t>
+            </a:r>
+            <a:r>
+              <a:rPr lang="en-US" altLang="zh-TW" sz="2400" u="sng" dirty="0"/>
+              <a:t>2</a:t>
+            </a:r>
+            <a:r>
+              <a:rPr lang="zh-TW" altLang="en-US" sz="2400" u="sng" dirty="0"/>
+              <a:t>月</a:t>
+            </a:r>
+            <a:r>
+              <a:rPr lang="zh-TW" altLang="en-US" sz="2400" dirty="0"/>
+              <a:t>及</a:t>
+            </a:r>
+            <a:r>
+              <a:rPr lang="en-US" altLang="zh-TW" sz="2400" u="sng" dirty="0"/>
+              <a:t>9</a:t>
+            </a:r>
+            <a:r>
+              <a:rPr lang="zh-TW" altLang="en-US" sz="2400" u="sng" dirty="0"/>
+              <a:t>月</a:t>
+            </a:r>
+            <a:r>
+              <a:rPr lang="zh-TW" altLang="en-US" sz="2400" dirty="0"/>
+              <a:t>為孩子開學的照顧需求，所以離婚人數低。</a:t>
+            </a:r>
+            <a:endParaRPr lang="en-US" altLang="zh-TW" sz="2400" dirty="0"/>
+          </a:p>
+          <a:p>
+            <a:pPr lvl="1"/>
             <a:endParaRPr lang="en-US" altLang="zh-TW" sz="2400" dirty="0"/>
           </a:p>
         </p:txBody>
@@ -13630,6 +13668,146 @@
     <p:extLst>
       <p:ext uri="{BB962C8B-B14F-4D97-AF65-F5344CB8AC3E}">
         <p14:creationId xmlns:p14="http://schemas.microsoft.com/office/powerpoint/2010/main" val="3158195670"/>
+      </p:ext>
+    </p:extLst>
+  </p:cSld>
+  <p:clrMapOvr>
+    <a:masterClrMapping/>
+  </p:clrMapOvr>
+</p:sld>
+</file>
+
+<file path=ppt/slides/slide19.xml><?xml version="1.0" encoding="utf-8"?>
+<p:sld xmlns:a="http://schemas.openxmlformats.org/drawingml/2006/main" xmlns:r="http://schemas.openxmlformats.org/officeDocument/2006/relationships" xmlns:p="http://schemas.openxmlformats.org/presentationml/2006/main">
+  <p:cSld>
+    <p:spTree>
+      <p:nvGrpSpPr>
+        <p:cNvPr id="1" name=""/>
+        <p:cNvGrpSpPr/>
+        <p:nvPr/>
+      </p:nvGrpSpPr>
+      <p:grpSpPr>
+        <a:xfrm>
+          <a:off x="0" y="0"/>
+          <a:ext cx="0" cy="0"/>
+          <a:chOff x="0" y="0"/>
+          <a:chExt cx="0" cy="0"/>
+        </a:xfrm>
+      </p:grpSpPr>
+      <p:sp>
+        <p:nvSpPr>
+          <p:cNvPr id="2" name="標題 1">
+            <a:extLst>
+              <a:ext uri="{FF2B5EF4-FFF2-40B4-BE49-F238E27FC236}">
+                <a16:creationId xmlns:a16="http://schemas.microsoft.com/office/drawing/2014/main" id="{1E231C9E-F0A1-D3D1-E8C6-4DEF8283E1AD}"/>
+              </a:ext>
+            </a:extLst>
+          </p:cNvPr>
+          <p:cNvSpPr>
+            <a:spLocks noGrp="1"/>
+          </p:cNvSpPr>
+          <p:nvPr>
+            <p:ph type="title"/>
+          </p:nvPr>
+        </p:nvSpPr>
+        <p:spPr/>
+        <p:txBody>
+          <a:bodyPr/>
+          <a:lstStyle/>
+          <a:p>
+            <a:r>
+              <a:rPr lang="zh-TW" altLang="en-US" dirty="0"/>
+              <a:t>相關建議</a:t>
+            </a:r>
+          </a:p>
+        </p:txBody>
+      </p:sp>
+      <p:sp>
+        <p:nvSpPr>
+          <p:cNvPr id="3" name="內容版面配置區 2">
+            <a:extLst>
+              <a:ext uri="{FF2B5EF4-FFF2-40B4-BE49-F238E27FC236}">
+                <a16:creationId xmlns:a16="http://schemas.microsoft.com/office/drawing/2014/main" id="{4259B603-C80F-8BA1-49B4-EACBC07BD9C2}"/>
+              </a:ext>
+            </a:extLst>
+          </p:cNvPr>
+          <p:cNvSpPr>
+            <a:spLocks noGrp="1"/>
+          </p:cNvSpPr>
+          <p:nvPr>
+            <p:ph idx="1"/>
+          </p:nvPr>
+        </p:nvSpPr>
+        <p:spPr/>
+        <p:txBody>
+          <a:bodyPr/>
+          <a:lstStyle/>
+          <a:p>
+            <a:r>
+              <a:rPr lang="zh-TW" altLang="en-US" sz="3200" dirty="0"/>
+              <a:t>相親、交友組織可以對</a:t>
+            </a:r>
+            <a:r>
+              <a:rPr lang="en-US" altLang="zh-TW" sz="3200" u="sng" dirty="0"/>
+              <a:t>25~34</a:t>
+            </a:r>
+            <a:r>
+              <a:rPr lang="zh-TW" altLang="en-US" sz="3200" u="sng" dirty="0"/>
+              <a:t>歲且大學畢業</a:t>
+            </a:r>
+            <a:r>
+              <a:rPr lang="zh-TW" altLang="en-US" sz="3200" dirty="0"/>
+              <a:t>的人當成主力客群。</a:t>
+            </a:r>
+            <a:endParaRPr lang="en-US" altLang="zh-TW" sz="3200" dirty="0"/>
+          </a:p>
+          <a:p>
+            <a:r>
+              <a:rPr lang="zh-TW" altLang="en-US" sz="3200" dirty="0"/>
+              <a:t>婚姻諮詢組織可以對</a:t>
+            </a:r>
+            <a:r>
+              <a:rPr lang="en-US" altLang="zh-TW" sz="3200" u="sng" dirty="0"/>
+              <a:t>35~44</a:t>
+            </a:r>
+            <a:r>
+              <a:rPr lang="zh-TW" altLang="en-US" sz="3200" u="sng" dirty="0"/>
+              <a:t>歲或高中畢業</a:t>
+            </a:r>
+            <a:r>
+              <a:rPr lang="zh-TW" altLang="en-US" sz="3200" dirty="0"/>
+              <a:t>的人群當成主力客群，但最好避開</a:t>
+            </a:r>
+            <a:r>
+              <a:rPr lang="en-US" altLang="zh-TW" sz="3200" dirty="0"/>
+              <a:t>2</a:t>
+            </a:r>
+            <a:r>
+              <a:rPr lang="zh-TW" altLang="en-US" sz="3200" dirty="0"/>
+              <a:t>月及</a:t>
+            </a:r>
+            <a:r>
+              <a:rPr lang="en-US" altLang="zh-TW" sz="3200" dirty="0"/>
+              <a:t>9</a:t>
+            </a:r>
+            <a:r>
+              <a:rPr lang="zh-TW" altLang="en-US" sz="3200" dirty="0"/>
+              <a:t>月。</a:t>
+            </a:r>
+            <a:endParaRPr lang="en-US" altLang="zh-TW" sz="3200" dirty="0"/>
+          </a:p>
+          <a:p>
+            <a:endParaRPr lang="en-US" altLang="zh-TW" dirty="0"/>
+          </a:p>
+          <a:p>
+            <a:endParaRPr lang="zh-TW" altLang="en-US" dirty="0"/>
+          </a:p>
+        </p:txBody>
+      </p:sp>
+    </p:spTree>
+    <p:extLst>
+      <p:ext uri="{BB962C8B-B14F-4D97-AF65-F5344CB8AC3E}">
+        <p14:creationId xmlns:p14="http://schemas.microsoft.com/office/powerpoint/2010/main" val="1798785357"/>
       </p:ext>
     </p:extLst>
   </p:cSld>

--- a/那些人較易結婚或離婚.pptx
+++ b/那些人較易結婚或離婚.pptx
@@ -235,7 +235,7 @@
           <a:noFill/>
           <a:extLst>
             <a:ext uri="{909E8E84-426E-40dd-AFC4-6F175D3DCCD1}">
-              <a14:hiddenFill xmlns:a14="http://schemas.microsoft.com/office/drawing/2010/main" xmlns="">
+              <a14:hiddenFill xmlns="" xmlns:a14="http://schemas.microsoft.com/office/drawing/2010/main">
                 <a:solidFill>
                   <a:srgbClr val="FFFFFF"/>
                 </a:solidFill>
@@ -295,7 +295,7 @@
             </a:ln>
             <a:extLst>
               <a:ext uri="{91240B29-F687-4f45-9708-019B960494DF}">
-                <a14:hiddenLine xmlns:a14="http://schemas.microsoft.com/office/drawing/2010/main" xmlns="" w="9525">
+                <a14:hiddenLine xmlns="" xmlns:a14="http://schemas.microsoft.com/office/drawing/2010/main" w="9525">
                   <a:solidFill>
                     <a:srgbClr val="000000"/>
                   </a:solidFill>
@@ -385,7 +385,7 @@
             </a:ln>
             <a:extLst>
               <a:ext uri="{91240B29-F687-4f45-9708-019B960494DF}">
-                <a14:hiddenLine xmlns:a14="http://schemas.microsoft.com/office/drawing/2010/main" xmlns="" w="9525">
+                <a14:hiddenLine xmlns="" xmlns:a14="http://schemas.microsoft.com/office/drawing/2010/main" w="9525">
                   <a:solidFill>
                     <a:srgbClr val="000000"/>
                   </a:solidFill>
@@ -475,7 +475,7 @@
             </a:ln>
             <a:extLst>
               <a:ext uri="{91240B29-F687-4f45-9708-019B960494DF}">
-                <a14:hiddenLine xmlns:a14="http://schemas.microsoft.com/office/drawing/2010/main" xmlns="" w="9525">
+                <a14:hiddenLine xmlns="" xmlns:a14="http://schemas.microsoft.com/office/drawing/2010/main" w="9525">
                   <a:solidFill>
                     <a:srgbClr val="000000"/>
                   </a:solidFill>
@@ -509,7 +509,7 @@
             </a:ln>
             <a:extLst>
               <a:ext uri="{91240B29-F687-4f45-9708-019B960494DF}">
-                <a14:hiddenLine xmlns:a14="http://schemas.microsoft.com/office/drawing/2010/main" xmlns="" w="9525">
+                <a14:hiddenLine xmlns="" xmlns:a14="http://schemas.microsoft.com/office/drawing/2010/main" w="9525">
                   <a:solidFill>
                     <a:srgbClr val="000000"/>
                   </a:solidFill>
@@ -599,7 +599,7 @@
             </a:ln>
             <a:extLst>
               <a:ext uri="{91240B29-F687-4f45-9708-019B960494DF}">
-                <a14:hiddenLine xmlns:a14="http://schemas.microsoft.com/office/drawing/2010/main" xmlns="" w="9525">
+                <a14:hiddenLine xmlns="" xmlns:a14="http://schemas.microsoft.com/office/drawing/2010/main" w="9525">
                   <a:solidFill>
                     <a:srgbClr val="000000"/>
                   </a:solidFill>
@@ -661,7 +661,7 @@
             </a:ln>
             <a:extLst>
               <a:ext uri="{91240B29-F687-4f45-9708-019B960494DF}">
-                <a14:hiddenLine xmlns:a14="http://schemas.microsoft.com/office/drawing/2010/main" xmlns="" w="9525">
+                <a14:hiddenLine xmlns="" xmlns:a14="http://schemas.microsoft.com/office/drawing/2010/main" w="9525">
                   <a:solidFill>
                     <a:srgbClr val="000000"/>
                   </a:solidFill>
@@ -723,7 +723,7 @@
             </a:ln>
             <a:extLst>
               <a:ext uri="{91240B29-F687-4f45-9708-019B960494DF}">
-                <a14:hiddenLine xmlns:a14="http://schemas.microsoft.com/office/drawing/2010/main" xmlns="" w="9525">
+                <a14:hiddenLine xmlns="" xmlns:a14="http://schemas.microsoft.com/office/drawing/2010/main" w="9525">
                   <a:solidFill>
                     <a:srgbClr val="000000"/>
                   </a:solidFill>
@@ -813,7 +813,7 @@
             </a:ln>
             <a:extLst>
               <a:ext uri="{91240B29-F687-4f45-9708-019B960494DF}">
-                <a14:hiddenLine xmlns:a14="http://schemas.microsoft.com/office/drawing/2010/main" xmlns="" w="9525">
+                <a14:hiddenLine xmlns="" xmlns:a14="http://schemas.microsoft.com/office/drawing/2010/main" w="9525">
                   <a:solidFill>
                     <a:srgbClr val="000000"/>
                   </a:solidFill>
@@ -875,7 +875,7 @@
             </a:ln>
             <a:extLst>
               <a:ext uri="{91240B29-F687-4f45-9708-019B960494DF}">
-                <a14:hiddenLine xmlns:a14="http://schemas.microsoft.com/office/drawing/2010/main" xmlns="" w="9525">
+                <a14:hiddenLine xmlns="" xmlns:a14="http://schemas.microsoft.com/office/drawing/2010/main" w="9525">
                   <a:solidFill>
                     <a:srgbClr val="000000"/>
                   </a:solidFill>
@@ -937,7 +937,7 @@
             </a:ln>
             <a:extLst>
               <a:ext uri="{91240B29-F687-4f45-9708-019B960494DF}">
-                <a14:hiddenLine xmlns:a14="http://schemas.microsoft.com/office/drawing/2010/main" xmlns="" w="9525">
+                <a14:hiddenLine xmlns="" xmlns:a14="http://schemas.microsoft.com/office/drawing/2010/main" w="9525">
                   <a:solidFill>
                     <a:srgbClr val="000000"/>
                   </a:solidFill>
@@ -1027,7 +1027,7 @@
             </a:ln>
             <a:extLst>
               <a:ext uri="{91240B29-F687-4f45-9708-019B960494DF}">
-                <a14:hiddenLine xmlns:a14="http://schemas.microsoft.com/office/drawing/2010/main" xmlns="" w="9525">
+                <a14:hiddenLine xmlns="" xmlns:a14="http://schemas.microsoft.com/office/drawing/2010/main" w="9525">
                   <a:solidFill>
                     <a:srgbClr val="000000"/>
                   </a:solidFill>
@@ -1117,7 +1117,7 @@
             </a:ln>
             <a:extLst>
               <a:ext uri="{91240B29-F687-4f45-9708-019B960494DF}">
-                <a14:hiddenLine xmlns:a14="http://schemas.microsoft.com/office/drawing/2010/main" xmlns="" w="9525">
+                <a14:hiddenLine xmlns="" xmlns:a14="http://schemas.microsoft.com/office/drawing/2010/main" w="9525">
                   <a:solidFill>
                     <a:srgbClr val="000000"/>
                   </a:solidFill>
@@ -1179,7 +1179,7 @@
             </a:ln>
             <a:extLst>
               <a:ext uri="{91240B29-F687-4f45-9708-019B960494DF}">
-                <a14:hiddenLine xmlns:a14="http://schemas.microsoft.com/office/drawing/2010/main" xmlns="" w="9525">
+                <a14:hiddenLine xmlns="" xmlns:a14="http://schemas.microsoft.com/office/drawing/2010/main" w="9525">
                   <a:solidFill>
                     <a:srgbClr val="000000"/>
                   </a:solidFill>
@@ -1289,7 +1289,7 @@
             </a:ln>
             <a:extLst>
               <a:ext uri="{91240B29-F687-4f45-9708-019B960494DF}">
-                <a14:hiddenLine xmlns:a14="http://schemas.microsoft.com/office/drawing/2010/main" xmlns="" w="9525">
+                <a14:hiddenLine xmlns="" xmlns:a14="http://schemas.microsoft.com/office/drawing/2010/main" w="9525">
                   <a:solidFill>
                     <a:srgbClr val="000000"/>
                   </a:solidFill>
@@ -1351,7 +1351,7 @@
             </a:ln>
             <a:extLst>
               <a:ext uri="{91240B29-F687-4f45-9708-019B960494DF}">
-                <a14:hiddenLine xmlns:a14="http://schemas.microsoft.com/office/drawing/2010/main" xmlns="" w="9525">
+                <a14:hiddenLine xmlns="" xmlns:a14="http://schemas.microsoft.com/office/drawing/2010/main" w="9525">
                   <a:solidFill>
                     <a:srgbClr val="000000"/>
                   </a:solidFill>
@@ -1441,7 +1441,7 @@
             </a:ln>
             <a:extLst>
               <a:ext uri="{91240B29-F687-4f45-9708-019B960494DF}">
-                <a14:hiddenLine xmlns:a14="http://schemas.microsoft.com/office/drawing/2010/main" xmlns="" w="9525">
+                <a14:hiddenLine xmlns="" xmlns:a14="http://schemas.microsoft.com/office/drawing/2010/main" w="9525">
                   <a:solidFill>
                     <a:srgbClr val="000000"/>
                   </a:solidFill>
@@ -1531,7 +1531,7 @@
             </a:ln>
             <a:extLst>
               <a:ext uri="{91240B29-F687-4f45-9708-019B960494DF}">
-                <a14:hiddenLine xmlns:a14="http://schemas.microsoft.com/office/drawing/2010/main" xmlns="" w="9525">
+                <a14:hiddenLine xmlns="" xmlns:a14="http://schemas.microsoft.com/office/drawing/2010/main" w="9525">
                   <a:solidFill>
                     <a:srgbClr val="000000"/>
                   </a:solidFill>
@@ -1593,7 +1593,7 @@
             </a:ln>
             <a:extLst>
               <a:ext uri="{91240B29-F687-4f45-9708-019B960494DF}">
-                <a14:hiddenLine xmlns:a14="http://schemas.microsoft.com/office/drawing/2010/main" xmlns="" w="9525">
+                <a14:hiddenLine xmlns="" xmlns:a14="http://schemas.microsoft.com/office/drawing/2010/main" w="9525">
                   <a:solidFill>
                     <a:srgbClr val="000000"/>
                   </a:solidFill>
@@ -1683,7 +1683,7 @@
             </a:ln>
             <a:extLst>
               <a:ext uri="{91240B29-F687-4f45-9708-019B960494DF}">
-                <a14:hiddenLine xmlns:a14="http://schemas.microsoft.com/office/drawing/2010/main" xmlns="" w="9525">
+                <a14:hiddenLine xmlns="" xmlns:a14="http://schemas.microsoft.com/office/drawing/2010/main" w="9525">
                   <a:solidFill>
                     <a:srgbClr val="000000"/>
                   </a:solidFill>
@@ -1773,7 +1773,7 @@
             </a:ln>
             <a:extLst>
               <a:ext uri="{91240B29-F687-4f45-9708-019B960494DF}">
-                <a14:hiddenLine xmlns:a14="http://schemas.microsoft.com/office/drawing/2010/main" xmlns="" w="9525">
+                <a14:hiddenLine xmlns="" xmlns:a14="http://schemas.microsoft.com/office/drawing/2010/main" w="9525">
                   <a:solidFill>
                     <a:srgbClr val="000000"/>
                   </a:solidFill>
@@ -1829,7 +1829,7 @@
             </a:ln>
             <a:extLst>
               <a:ext uri="{91240B29-F687-4f45-9708-019B960494DF}">
-                <a14:hiddenLine xmlns:a14="http://schemas.microsoft.com/office/drawing/2010/main" xmlns="" w="9525">
+                <a14:hiddenLine xmlns="" xmlns:a14="http://schemas.microsoft.com/office/drawing/2010/main" w="9525">
                   <a:solidFill>
                     <a:srgbClr val="000000"/>
                   </a:solidFill>
@@ -1919,7 +1919,7 @@
             </a:ln>
             <a:extLst>
               <a:ext uri="{91240B29-F687-4f45-9708-019B960494DF}">
-                <a14:hiddenLine xmlns:a14="http://schemas.microsoft.com/office/drawing/2010/main" xmlns="" w="9525">
+                <a14:hiddenLine xmlns="" xmlns:a14="http://schemas.microsoft.com/office/drawing/2010/main" w="9525">
                   <a:solidFill>
                     <a:srgbClr val="000000"/>
                   </a:solidFill>
@@ -1975,7 +1975,7 @@
             </a:ln>
             <a:extLst>
               <a:ext uri="{91240B29-F687-4f45-9708-019B960494DF}">
-                <a14:hiddenLine xmlns:a14="http://schemas.microsoft.com/office/drawing/2010/main" xmlns="" w="9525">
+                <a14:hiddenLine xmlns="" xmlns:a14="http://schemas.microsoft.com/office/drawing/2010/main" w="9525">
                   <a:solidFill>
                     <a:srgbClr val="000000"/>
                   </a:solidFill>
@@ -2065,7 +2065,7 @@
             </a:ln>
             <a:extLst>
               <a:ext uri="{91240B29-F687-4f45-9708-019B960494DF}">
-                <a14:hiddenLine xmlns:a14="http://schemas.microsoft.com/office/drawing/2010/main" xmlns="" w="9525">
+                <a14:hiddenLine xmlns="" xmlns:a14="http://schemas.microsoft.com/office/drawing/2010/main" w="9525">
                   <a:solidFill>
                     <a:srgbClr val="000000"/>
                   </a:solidFill>
@@ -2133,7 +2133,7 @@
             </a:ln>
             <a:extLst>
               <a:ext uri="{91240B29-F687-4f45-9708-019B960494DF}">
-                <a14:hiddenLine xmlns:a14="http://schemas.microsoft.com/office/drawing/2010/main" xmlns="" w="9525">
+                <a14:hiddenLine xmlns="" xmlns:a14="http://schemas.microsoft.com/office/drawing/2010/main" w="9525">
                   <a:solidFill>
                     <a:srgbClr val="000000"/>
                   </a:solidFill>
@@ -2223,7 +2223,7 @@
             </a:ln>
             <a:extLst>
               <a:ext uri="{91240B29-F687-4f45-9708-019B960494DF}">
-                <a14:hiddenLine xmlns:a14="http://schemas.microsoft.com/office/drawing/2010/main" xmlns="" w="9525">
+                <a14:hiddenLine xmlns="" xmlns:a14="http://schemas.microsoft.com/office/drawing/2010/main" w="9525">
                   <a:solidFill>
                     <a:srgbClr val="000000"/>
                   </a:solidFill>
@@ -2291,7 +2291,7 @@
             </a:ln>
             <a:extLst>
               <a:ext uri="{91240B29-F687-4f45-9708-019B960494DF}">
-                <a14:hiddenLine xmlns:a14="http://schemas.microsoft.com/office/drawing/2010/main" xmlns="" w="9525">
+                <a14:hiddenLine xmlns="" xmlns:a14="http://schemas.microsoft.com/office/drawing/2010/main" w="9525">
                   <a:solidFill>
                     <a:srgbClr val="000000"/>
                   </a:solidFill>
@@ -2381,7 +2381,7 @@
             </a:ln>
             <a:extLst>
               <a:ext uri="{91240B29-F687-4f45-9708-019B960494DF}">
-                <a14:hiddenLine xmlns:a14="http://schemas.microsoft.com/office/drawing/2010/main" xmlns="" w="9525">
+                <a14:hiddenLine xmlns="" xmlns:a14="http://schemas.microsoft.com/office/drawing/2010/main" w="9525">
                   <a:solidFill>
                     <a:srgbClr val="000000"/>
                   </a:solidFill>
@@ -2415,7 +2415,7 @@
             </a:ln>
             <a:extLst>
               <a:ext uri="{91240B29-F687-4f45-9708-019B960494DF}">
-                <a14:hiddenLine xmlns:a14="http://schemas.microsoft.com/office/drawing/2010/main" xmlns="" w="9525">
+                <a14:hiddenLine xmlns="" xmlns:a14="http://schemas.microsoft.com/office/drawing/2010/main" w="9525">
                   <a:solidFill>
                     <a:srgbClr val="000000"/>
                   </a:solidFill>
@@ -2505,7 +2505,7 @@
             </a:ln>
             <a:extLst>
               <a:ext uri="{91240B29-F687-4f45-9708-019B960494DF}">
-                <a14:hiddenLine xmlns:a14="http://schemas.microsoft.com/office/drawing/2010/main" xmlns="" w="9525">
+                <a14:hiddenLine xmlns="" xmlns:a14="http://schemas.microsoft.com/office/drawing/2010/main" w="9525">
                   <a:solidFill>
                     <a:srgbClr val="000000"/>
                   </a:solidFill>
@@ -2567,7 +2567,7 @@
             </a:ln>
             <a:extLst>
               <a:ext uri="{91240B29-F687-4f45-9708-019B960494DF}">
-                <a14:hiddenLine xmlns:a14="http://schemas.microsoft.com/office/drawing/2010/main" xmlns="" w="9525">
+                <a14:hiddenLine xmlns="" xmlns:a14="http://schemas.microsoft.com/office/drawing/2010/main" w="9525">
                   <a:solidFill>
                     <a:srgbClr val="000000"/>
                   </a:solidFill>
@@ -2629,7 +2629,7 @@
             </a:ln>
             <a:extLst>
               <a:ext uri="{91240B29-F687-4f45-9708-019B960494DF}">
-                <a14:hiddenLine xmlns:a14="http://schemas.microsoft.com/office/drawing/2010/main" xmlns="" w="9525">
+                <a14:hiddenLine xmlns="" xmlns:a14="http://schemas.microsoft.com/office/drawing/2010/main" w="9525">
                   <a:solidFill>
                     <a:srgbClr val="000000"/>
                   </a:solidFill>
@@ -2719,7 +2719,7 @@
             </a:ln>
             <a:extLst>
               <a:ext uri="{91240B29-F687-4f45-9708-019B960494DF}">
-                <a14:hiddenLine xmlns:a14="http://schemas.microsoft.com/office/drawing/2010/main" xmlns="" w="9525">
+                <a14:hiddenLine xmlns="" xmlns:a14="http://schemas.microsoft.com/office/drawing/2010/main" w="9525">
                   <a:solidFill>
                     <a:srgbClr val="000000"/>
                   </a:solidFill>
@@ -2787,7 +2787,7 @@
             </a:ln>
             <a:extLst>
               <a:ext uri="{91240B29-F687-4f45-9708-019B960494DF}">
-                <a14:hiddenLine xmlns:a14="http://schemas.microsoft.com/office/drawing/2010/main" xmlns="" w="9525">
+                <a14:hiddenLine xmlns="" xmlns:a14="http://schemas.microsoft.com/office/drawing/2010/main" w="9525">
                   <a:solidFill>
                     <a:srgbClr val="000000"/>
                   </a:solidFill>
@@ -2849,7 +2849,7 @@
             </a:ln>
             <a:extLst>
               <a:ext uri="{91240B29-F687-4f45-9708-019B960494DF}">
-                <a14:hiddenLine xmlns:a14="http://schemas.microsoft.com/office/drawing/2010/main" xmlns="" w="9525">
+                <a14:hiddenLine xmlns="" xmlns:a14="http://schemas.microsoft.com/office/drawing/2010/main" w="9525">
                   <a:solidFill>
                     <a:srgbClr val="000000"/>
                   </a:solidFill>
@@ -2939,7 +2939,7 @@
             </a:ln>
             <a:extLst>
               <a:ext uri="{91240B29-F687-4f45-9708-019B960494DF}">
-                <a14:hiddenLine xmlns:a14="http://schemas.microsoft.com/office/drawing/2010/main" xmlns="" w="9525">
+                <a14:hiddenLine xmlns="" xmlns:a14="http://schemas.microsoft.com/office/drawing/2010/main" w="9525">
                   <a:solidFill>
                     <a:srgbClr val="000000"/>
                   </a:solidFill>
@@ -3001,7 +3001,7 @@
             </a:ln>
             <a:extLst>
               <a:ext uri="{91240B29-F687-4f45-9708-019B960494DF}">
-                <a14:hiddenLine xmlns:a14="http://schemas.microsoft.com/office/drawing/2010/main" xmlns="" w="9525">
+                <a14:hiddenLine xmlns="" xmlns:a14="http://schemas.microsoft.com/office/drawing/2010/main" w="9525">
                   <a:solidFill>
                     <a:srgbClr val="000000"/>
                   </a:solidFill>
@@ -3091,7 +3091,7 @@
             </a:ln>
             <a:extLst>
               <a:ext uri="{91240B29-F687-4f45-9708-019B960494DF}">
-                <a14:hiddenLine xmlns:a14="http://schemas.microsoft.com/office/drawing/2010/main" xmlns="" w="9525">
+                <a14:hiddenLine xmlns="" xmlns:a14="http://schemas.microsoft.com/office/drawing/2010/main" w="9525">
                   <a:solidFill>
                     <a:srgbClr val="000000"/>
                   </a:solidFill>
@@ -3153,7 +3153,7 @@
             </a:ln>
             <a:extLst>
               <a:ext uri="{91240B29-F687-4f45-9708-019B960494DF}">
-                <a14:hiddenLine xmlns:a14="http://schemas.microsoft.com/office/drawing/2010/main" xmlns="" w="9525">
+                <a14:hiddenLine xmlns="" xmlns:a14="http://schemas.microsoft.com/office/drawing/2010/main" w="9525">
                   <a:solidFill>
                     <a:srgbClr val="000000"/>
                   </a:solidFill>
@@ -3243,7 +3243,7 @@
             </a:ln>
             <a:extLst>
               <a:ext uri="{91240B29-F687-4f45-9708-019B960494DF}">
-                <a14:hiddenLine xmlns:a14="http://schemas.microsoft.com/office/drawing/2010/main" xmlns="" w="9525">
+                <a14:hiddenLine xmlns="" xmlns:a14="http://schemas.microsoft.com/office/drawing/2010/main" w="9525">
                   <a:solidFill>
                     <a:srgbClr val="000000"/>
                   </a:solidFill>
@@ -3277,7 +3277,7 @@
             </a:ln>
             <a:extLst>
               <a:ext uri="{91240B29-F687-4f45-9708-019B960494DF}">
-                <a14:hiddenLine xmlns:a14="http://schemas.microsoft.com/office/drawing/2010/main" xmlns="" w="9525">
+                <a14:hiddenLine xmlns="" xmlns:a14="http://schemas.microsoft.com/office/drawing/2010/main" w="9525">
                   <a:solidFill>
                     <a:srgbClr val="000000"/>
                   </a:solidFill>
@@ -3342,7 +3342,7 @@
             </a:ln>
             <a:extLst>
               <a:ext uri="{91240B29-F687-4f45-9708-019B960494DF}">
-                <a14:hiddenLine xmlns:a14="http://schemas.microsoft.com/office/drawing/2010/main" xmlns="" w="9525">
+                <a14:hiddenLine xmlns="" xmlns:a14="http://schemas.microsoft.com/office/drawing/2010/main" w="9525">
                   <a:solidFill>
                     <a:srgbClr val="000000"/>
                   </a:solidFill>
@@ -3432,7 +3432,7 @@
             </a:ln>
             <a:extLst>
               <a:ext uri="{91240B29-F687-4f45-9708-019B960494DF}">
-                <a14:hiddenLine xmlns:a14="http://schemas.microsoft.com/office/drawing/2010/main" xmlns="" w="9525">
+                <a14:hiddenLine xmlns="" xmlns:a14="http://schemas.microsoft.com/office/drawing/2010/main" w="9525">
                   <a:solidFill>
                     <a:srgbClr val="000000"/>
                   </a:solidFill>
@@ -3494,7 +3494,7 @@
             </a:ln>
             <a:extLst>
               <a:ext uri="{91240B29-F687-4f45-9708-019B960494DF}">
-                <a14:hiddenLine xmlns:a14="http://schemas.microsoft.com/office/drawing/2010/main" xmlns="" w="9525">
+                <a14:hiddenLine xmlns="" xmlns:a14="http://schemas.microsoft.com/office/drawing/2010/main" w="9525">
                   <a:solidFill>
                     <a:srgbClr val="000000"/>
                   </a:solidFill>
@@ -3584,7 +3584,7 @@
             </a:ln>
             <a:extLst>
               <a:ext uri="{91240B29-F687-4f45-9708-019B960494DF}">
-                <a14:hiddenLine xmlns:a14="http://schemas.microsoft.com/office/drawing/2010/main" xmlns="" w="9525">
+                <a14:hiddenLine xmlns="" xmlns:a14="http://schemas.microsoft.com/office/drawing/2010/main" w="9525">
                   <a:solidFill>
                     <a:srgbClr val="000000"/>
                   </a:solidFill>
@@ -3674,7 +3674,7 @@
             </a:ln>
             <a:extLst>
               <a:ext uri="{91240B29-F687-4f45-9708-019B960494DF}">
-                <a14:hiddenLine xmlns:a14="http://schemas.microsoft.com/office/drawing/2010/main" xmlns="" w="9525">
+                <a14:hiddenLine xmlns="" xmlns:a14="http://schemas.microsoft.com/office/drawing/2010/main" w="9525">
                   <a:solidFill>
                     <a:srgbClr val="000000"/>
                   </a:solidFill>
@@ -3739,7 +3739,7 @@
             </a:ln>
             <a:extLst>
               <a:ext uri="{91240B29-F687-4f45-9708-019B960494DF}">
-                <a14:hiddenLine xmlns:a14="http://schemas.microsoft.com/office/drawing/2010/main" xmlns="" w="9525">
+                <a14:hiddenLine xmlns="" xmlns:a14="http://schemas.microsoft.com/office/drawing/2010/main" w="9525">
                   <a:solidFill>
                     <a:srgbClr val="000000"/>
                   </a:solidFill>
@@ -3801,7 +3801,7 @@
             </a:ln>
             <a:extLst>
               <a:ext uri="{91240B29-F687-4f45-9708-019B960494DF}">
-                <a14:hiddenLine xmlns:a14="http://schemas.microsoft.com/office/drawing/2010/main" xmlns="" w="9525">
+                <a14:hiddenLine xmlns="" xmlns:a14="http://schemas.microsoft.com/office/drawing/2010/main" w="9525">
                   <a:solidFill>
                     <a:srgbClr val="000000"/>
                   </a:solidFill>
@@ -3891,7 +3891,7 @@
             </a:ln>
             <a:extLst>
               <a:ext uri="{91240B29-F687-4f45-9708-019B960494DF}">
-                <a14:hiddenLine xmlns:a14="http://schemas.microsoft.com/office/drawing/2010/main" xmlns="" w="9525">
+                <a14:hiddenLine xmlns="" xmlns:a14="http://schemas.microsoft.com/office/drawing/2010/main" w="9525">
                   <a:solidFill>
                     <a:srgbClr val="000000"/>
                   </a:solidFill>
@@ -3981,7 +3981,7 @@
             </a:ln>
             <a:extLst>
               <a:ext uri="{91240B29-F687-4f45-9708-019B960494DF}">
-                <a14:hiddenLine xmlns:a14="http://schemas.microsoft.com/office/drawing/2010/main" xmlns="" w="9525">
+                <a14:hiddenLine xmlns="" xmlns:a14="http://schemas.microsoft.com/office/drawing/2010/main" w="9525">
                   <a:solidFill>
                     <a:srgbClr val="000000"/>
                   </a:solidFill>
@@ -4043,7 +4043,7 @@
             </a:ln>
             <a:extLst>
               <a:ext uri="{91240B29-F687-4f45-9708-019B960494DF}">
-                <a14:hiddenLine xmlns:a14="http://schemas.microsoft.com/office/drawing/2010/main" xmlns="" w="9525">
+                <a14:hiddenLine xmlns="" xmlns:a14="http://schemas.microsoft.com/office/drawing/2010/main" w="9525">
                   <a:solidFill>
                     <a:srgbClr val="000000"/>
                   </a:solidFill>
@@ -4163,7 +4163,7 @@
             </a:ln>
             <a:extLst>
               <a:ext uri="{91240B29-F687-4f45-9708-019B960494DF}">
-                <a14:hiddenLine xmlns:a14="http://schemas.microsoft.com/office/drawing/2010/main" xmlns="" w="9525">
+                <a14:hiddenLine xmlns="" xmlns:a14="http://schemas.microsoft.com/office/drawing/2010/main" w="9525">
                   <a:solidFill>
                     <a:srgbClr val="000000"/>
                   </a:solidFill>
@@ -4231,7 +4231,7 @@
             </a:ln>
             <a:extLst>
               <a:ext uri="{91240B29-F687-4f45-9708-019B960494DF}">
-                <a14:hiddenLine xmlns:a14="http://schemas.microsoft.com/office/drawing/2010/main" xmlns="" w="9525">
+                <a14:hiddenLine xmlns="" xmlns:a14="http://schemas.microsoft.com/office/drawing/2010/main" w="9525">
                   <a:solidFill>
                     <a:srgbClr val="000000"/>
                   </a:solidFill>
@@ -4321,7 +4321,7 @@
             </a:ln>
             <a:extLst>
               <a:ext uri="{91240B29-F687-4f45-9708-019B960494DF}">
-                <a14:hiddenLine xmlns:a14="http://schemas.microsoft.com/office/drawing/2010/main" xmlns="" w="9525">
+                <a14:hiddenLine xmlns="" xmlns:a14="http://schemas.microsoft.com/office/drawing/2010/main" w="9525">
                   <a:solidFill>
                     <a:srgbClr val="000000"/>
                   </a:solidFill>
@@ -9043,7 +9043,7 @@
           <a:noFill/>
           <a:extLst>
             <a:ext uri="{909E8E84-426E-40dd-AFC4-6F175D3DCCD1}">
-              <a14:hiddenFill xmlns:a14="http://schemas.microsoft.com/office/drawing/2010/main" xmlns="">
+              <a14:hiddenFill xmlns="" xmlns:a14="http://schemas.microsoft.com/office/drawing/2010/main">
                 <a:solidFill>
                   <a:srgbClr val="FFFFFF"/>
                 </a:solidFill>
@@ -9117,7 +9117,7 @@
               </a:ln>
               <a:extLst>
                 <a:ext uri="{91240B29-F687-4f45-9708-019B960494DF}">
-                  <a14:hiddenLine xmlns:a14="http://schemas.microsoft.com/office/drawing/2010/main" xmlns="" w="9525">
+                  <a14:hiddenLine xmlns="" xmlns:a14="http://schemas.microsoft.com/office/drawing/2010/main" w="9525">
                     <a:solidFill>
                       <a:srgbClr val="000000"/>
                     </a:solidFill>
@@ -9207,7 +9207,7 @@
               </a:ln>
               <a:extLst>
                 <a:ext uri="{91240B29-F687-4f45-9708-019B960494DF}">
-                  <a14:hiddenLine xmlns:a14="http://schemas.microsoft.com/office/drawing/2010/main" xmlns="" w="9525">
+                  <a14:hiddenLine xmlns="" xmlns:a14="http://schemas.microsoft.com/office/drawing/2010/main" w="9525">
                     <a:solidFill>
                       <a:srgbClr val="000000"/>
                     </a:solidFill>
@@ -9297,7 +9297,7 @@
               </a:ln>
               <a:extLst>
                 <a:ext uri="{91240B29-F687-4f45-9708-019B960494DF}">
-                  <a14:hiddenLine xmlns:a14="http://schemas.microsoft.com/office/drawing/2010/main" xmlns="" w="9525">
+                  <a14:hiddenLine xmlns="" xmlns:a14="http://schemas.microsoft.com/office/drawing/2010/main" w="9525">
                     <a:solidFill>
                       <a:srgbClr val="000000"/>
                     </a:solidFill>
@@ -9359,7 +9359,7 @@
               </a:ln>
               <a:extLst>
                 <a:ext uri="{91240B29-F687-4f45-9708-019B960494DF}">
-                  <a14:hiddenLine xmlns:a14="http://schemas.microsoft.com/office/drawing/2010/main" xmlns="" w="9525">
+                  <a14:hiddenLine xmlns="" xmlns:a14="http://schemas.microsoft.com/office/drawing/2010/main" w="9525">
                     <a:solidFill>
                       <a:srgbClr val="000000"/>
                     </a:solidFill>
@@ -9449,7 +9449,7 @@
               </a:ln>
               <a:extLst>
                 <a:ext uri="{91240B29-F687-4f45-9708-019B960494DF}">
-                  <a14:hiddenLine xmlns:a14="http://schemas.microsoft.com/office/drawing/2010/main" xmlns="" w="9525">
+                  <a14:hiddenLine xmlns="" xmlns:a14="http://schemas.microsoft.com/office/drawing/2010/main" w="9525">
                     <a:solidFill>
                       <a:srgbClr val="000000"/>
                     </a:solidFill>
@@ -9511,7 +9511,7 @@
               </a:ln>
               <a:extLst>
                 <a:ext uri="{91240B29-F687-4f45-9708-019B960494DF}">
-                  <a14:hiddenLine xmlns:a14="http://schemas.microsoft.com/office/drawing/2010/main" xmlns="" w="9525">
+                  <a14:hiddenLine xmlns="" xmlns:a14="http://schemas.microsoft.com/office/drawing/2010/main" w="9525">
                     <a:solidFill>
                       <a:srgbClr val="000000"/>
                     </a:solidFill>
@@ -9573,7 +9573,7 @@
               </a:ln>
               <a:extLst>
                 <a:ext uri="{91240B29-F687-4f45-9708-019B960494DF}">
-                  <a14:hiddenLine xmlns:a14="http://schemas.microsoft.com/office/drawing/2010/main" xmlns="" w="9525">
+                  <a14:hiddenLine xmlns="" xmlns:a14="http://schemas.microsoft.com/office/drawing/2010/main" w="9525">
                     <a:solidFill>
                       <a:srgbClr val="000000"/>
                     </a:solidFill>
@@ -9663,7 +9663,7 @@
               </a:ln>
               <a:extLst>
                 <a:ext uri="{91240B29-F687-4f45-9708-019B960494DF}">
-                  <a14:hiddenLine xmlns:a14="http://schemas.microsoft.com/office/drawing/2010/main" xmlns="" w="9525">
+                  <a14:hiddenLine xmlns="" xmlns:a14="http://schemas.microsoft.com/office/drawing/2010/main" w="9525">
                     <a:solidFill>
                       <a:srgbClr val="000000"/>
                     </a:solidFill>
@@ -9753,7 +9753,7 @@
               </a:ln>
               <a:extLst>
                 <a:ext uri="{91240B29-F687-4f45-9708-019B960494DF}">
-                  <a14:hiddenLine xmlns:a14="http://schemas.microsoft.com/office/drawing/2010/main" xmlns="" w="9525">
+                  <a14:hiddenLine xmlns="" xmlns:a14="http://schemas.microsoft.com/office/drawing/2010/main" w="9525">
                     <a:solidFill>
                       <a:srgbClr val="000000"/>
                     </a:solidFill>
@@ -9815,7 +9815,7 @@
               </a:ln>
               <a:extLst>
                 <a:ext uri="{91240B29-F687-4f45-9708-019B960494DF}">
-                  <a14:hiddenLine xmlns:a14="http://schemas.microsoft.com/office/drawing/2010/main" xmlns="" w="9525">
+                  <a14:hiddenLine xmlns="" xmlns:a14="http://schemas.microsoft.com/office/drawing/2010/main" w="9525">
                     <a:solidFill>
                       <a:srgbClr val="000000"/>
                     </a:solidFill>
@@ -9925,7 +9925,7 @@
               </a:ln>
               <a:extLst>
                 <a:ext uri="{91240B29-F687-4f45-9708-019B960494DF}">
-                  <a14:hiddenLine xmlns:a14="http://schemas.microsoft.com/office/drawing/2010/main" xmlns="" w="9525">
+                  <a14:hiddenLine xmlns="" xmlns:a14="http://schemas.microsoft.com/office/drawing/2010/main" w="9525">
                     <a:solidFill>
                       <a:srgbClr val="000000"/>
                     </a:solidFill>
@@ -10009,7 +10009,7 @@
               </a:ln>
               <a:extLst>
                 <a:ext uri="{91240B29-F687-4f45-9708-019B960494DF}">
-                  <a14:hiddenLine xmlns:a14="http://schemas.microsoft.com/office/drawing/2010/main" xmlns="" w="9525">
+                  <a14:hiddenLine xmlns="" xmlns:a14="http://schemas.microsoft.com/office/drawing/2010/main" w="9525">
                     <a:solidFill>
                       <a:srgbClr val="000000"/>
                     </a:solidFill>
@@ -10071,7 +10071,7 @@
               </a:ln>
               <a:extLst>
                 <a:ext uri="{91240B29-F687-4f45-9708-019B960494DF}">
-                  <a14:hiddenLine xmlns:a14="http://schemas.microsoft.com/office/drawing/2010/main" xmlns="" w="9525">
+                  <a14:hiddenLine xmlns="" xmlns:a14="http://schemas.microsoft.com/office/drawing/2010/main" w="9525">
                     <a:solidFill>
                       <a:srgbClr val="000000"/>
                     </a:solidFill>
@@ -10133,7 +10133,7 @@
               </a:ln>
               <a:extLst>
                 <a:ext uri="{91240B29-F687-4f45-9708-019B960494DF}">
-                  <a14:hiddenLine xmlns:a14="http://schemas.microsoft.com/office/drawing/2010/main" xmlns="" w="9525">
+                  <a14:hiddenLine xmlns="" xmlns:a14="http://schemas.microsoft.com/office/drawing/2010/main" w="9525">
                     <a:solidFill>
                       <a:srgbClr val="000000"/>
                     </a:solidFill>
@@ -10223,7 +10223,7 @@
               </a:ln>
               <a:extLst>
                 <a:ext uri="{91240B29-F687-4f45-9708-019B960494DF}">
-                  <a14:hiddenLine xmlns:a14="http://schemas.microsoft.com/office/drawing/2010/main" xmlns="" w="9525">
+                  <a14:hiddenLine xmlns="" xmlns:a14="http://schemas.microsoft.com/office/drawing/2010/main" w="9525">
                     <a:solidFill>
                       <a:srgbClr val="000000"/>
                     </a:solidFill>
@@ -10257,7 +10257,7 @@
               </a:ln>
               <a:extLst>
                 <a:ext uri="{91240B29-F687-4f45-9708-019B960494DF}">
-                  <a14:hiddenLine xmlns:a14="http://schemas.microsoft.com/office/drawing/2010/main" xmlns="" w="9525">
+                  <a14:hiddenLine xmlns="" xmlns:a14="http://schemas.microsoft.com/office/drawing/2010/main" w="9525">
                     <a:solidFill>
                       <a:srgbClr val="000000"/>
                     </a:solidFill>
@@ -10322,7 +10322,7 @@
               </a:ln>
               <a:extLst>
                 <a:ext uri="{91240B29-F687-4f45-9708-019B960494DF}">
-                  <a14:hiddenLine xmlns:a14="http://schemas.microsoft.com/office/drawing/2010/main" xmlns="" w="9525">
+                  <a14:hiddenLine xmlns="" xmlns:a14="http://schemas.microsoft.com/office/drawing/2010/main" w="9525">
                     <a:solidFill>
                       <a:srgbClr val="000000"/>
                     </a:solidFill>
@@ -10412,7 +10412,7 @@
               </a:ln>
               <a:extLst>
                 <a:ext uri="{91240B29-F687-4f45-9708-019B960494DF}">
-                  <a14:hiddenLine xmlns:a14="http://schemas.microsoft.com/office/drawing/2010/main" xmlns="" w="9525">
+                  <a14:hiddenLine xmlns="" xmlns:a14="http://schemas.microsoft.com/office/drawing/2010/main" w="9525">
                     <a:solidFill>
                       <a:srgbClr val="000000"/>
                     </a:solidFill>
@@ -10474,7 +10474,7 @@
               </a:ln>
               <a:extLst>
                 <a:ext uri="{91240B29-F687-4f45-9708-019B960494DF}">
-                  <a14:hiddenLine xmlns:a14="http://schemas.microsoft.com/office/drawing/2010/main" xmlns="" w="9525">
+                  <a14:hiddenLine xmlns="" xmlns:a14="http://schemas.microsoft.com/office/drawing/2010/main" w="9525">
                     <a:solidFill>
                       <a:srgbClr val="000000"/>
                     </a:solidFill>
@@ -10564,7 +10564,7 @@
               </a:ln>
               <a:extLst>
                 <a:ext uri="{91240B29-F687-4f45-9708-019B960494DF}">
-                  <a14:hiddenLine xmlns:a14="http://schemas.microsoft.com/office/drawing/2010/main" xmlns="" w="9525">
+                  <a14:hiddenLine xmlns="" xmlns:a14="http://schemas.microsoft.com/office/drawing/2010/main" w="9525">
                     <a:solidFill>
                       <a:srgbClr val="000000"/>
                     </a:solidFill>
@@ -10629,7 +10629,7 @@
               </a:ln>
               <a:extLst>
                 <a:ext uri="{91240B29-F687-4f45-9708-019B960494DF}">
-                  <a14:hiddenLine xmlns:a14="http://schemas.microsoft.com/office/drawing/2010/main" xmlns="" w="9525">
+                  <a14:hiddenLine xmlns="" xmlns:a14="http://schemas.microsoft.com/office/drawing/2010/main" w="9525">
                     <a:solidFill>
                       <a:srgbClr val="000000"/>
                     </a:solidFill>
@@ -10691,7 +10691,7 @@
               </a:ln>
               <a:extLst>
                 <a:ext uri="{91240B29-F687-4f45-9708-019B960494DF}">
-                  <a14:hiddenLine xmlns:a14="http://schemas.microsoft.com/office/drawing/2010/main" xmlns="" w="9525">
+                  <a14:hiddenLine xmlns="" xmlns:a14="http://schemas.microsoft.com/office/drawing/2010/main" w="9525">
                     <a:solidFill>
                       <a:srgbClr val="000000"/>
                     </a:solidFill>
@@ -10781,7 +10781,7 @@
               </a:ln>
               <a:extLst>
                 <a:ext uri="{91240B29-F687-4f45-9708-019B960494DF}">
-                  <a14:hiddenLine xmlns:a14="http://schemas.microsoft.com/office/drawing/2010/main" xmlns="" w="9525">
+                  <a14:hiddenLine xmlns="" xmlns:a14="http://schemas.microsoft.com/office/drawing/2010/main" w="9525">
                     <a:solidFill>
                       <a:srgbClr val="000000"/>
                     </a:solidFill>
@@ -10871,7 +10871,7 @@
               </a:ln>
               <a:extLst>
                 <a:ext uri="{91240B29-F687-4f45-9708-019B960494DF}">
-                  <a14:hiddenLine xmlns:a14="http://schemas.microsoft.com/office/drawing/2010/main" xmlns="" w="9525">
+                  <a14:hiddenLine xmlns="" xmlns:a14="http://schemas.microsoft.com/office/drawing/2010/main" w="9525">
                     <a:solidFill>
                       <a:srgbClr val="000000"/>
                     </a:solidFill>
@@ -10936,7 +10936,7 @@
               </a:ln>
               <a:extLst>
                 <a:ext uri="{91240B29-F687-4f45-9708-019B960494DF}">
-                  <a14:hiddenLine xmlns:a14="http://schemas.microsoft.com/office/drawing/2010/main" xmlns="" w="9525">
+                  <a14:hiddenLine xmlns="" xmlns:a14="http://schemas.microsoft.com/office/drawing/2010/main" w="9525">
                     <a:solidFill>
                       <a:srgbClr val="000000"/>
                     </a:solidFill>
@@ -11056,7 +11056,7 @@
               </a:ln>
               <a:extLst>
                 <a:ext uri="{91240B29-F687-4f45-9708-019B960494DF}">
-                  <a14:hiddenLine xmlns:a14="http://schemas.microsoft.com/office/drawing/2010/main" xmlns="" w="9525">
+                  <a14:hiddenLine xmlns="" xmlns:a14="http://schemas.microsoft.com/office/drawing/2010/main" w="9525">
                     <a:solidFill>
                       <a:srgbClr val="000000"/>
                     </a:solidFill>
@@ -11154,7 +11154,7 @@
               </a:ln>
               <a:extLst>
                 <a:ext uri="{91240B29-F687-4f45-9708-019B960494DF}">
-                  <a14:hiddenLine xmlns:a14="http://schemas.microsoft.com/office/drawing/2010/main" xmlns="" w="9525">
+                  <a14:hiddenLine xmlns="" xmlns:a14="http://schemas.microsoft.com/office/drawing/2010/main" w="9525">
                     <a:solidFill>
                       <a:srgbClr val="000000"/>
                     </a:solidFill>
@@ -11269,7 +11269,7 @@
               </a:ln>
               <a:extLst>
                 <a:ext uri="{91240B29-F687-4f45-9708-019B960494DF}">
-                  <a14:hiddenLine xmlns:a14="http://schemas.microsoft.com/office/drawing/2010/main" xmlns="" w="9525">
+                  <a14:hiddenLine xmlns="" xmlns:a14="http://schemas.microsoft.com/office/drawing/2010/main" w="9525">
                     <a:solidFill>
                       <a:srgbClr val="000000"/>
                     </a:solidFill>
@@ -11359,7 +11359,7 @@
               </a:ln>
               <a:extLst>
                 <a:ext uri="{91240B29-F687-4f45-9708-019B960494DF}">
-                  <a14:hiddenLine xmlns:a14="http://schemas.microsoft.com/office/drawing/2010/main" xmlns="" w="9525">
+                  <a14:hiddenLine xmlns="" xmlns:a14="http://schemas.microsoft.com/office/drawing/2010/main" w="9525">
                     <a:solidFill>
                       <a:srgbClr val="000000"/>
                     </a:solidFill>
@@ -11424,7 +11424,7 @@
               </a:ln>
               <a:extLst>
                 <a:ext uri="{91240B29-F687-4f45-9708-019B960494DF}">
-                  <a14:hiddenLine xmlns:a14="http://schemas.microsoft.com/office/drawing/2010/main" xmlns="" w="9525">
+                  <a14:hiddenLine xmlns="" xmlns:a14="http://schemas.microsoft.com/office/drawing/2010/main" w="9525">
                     <a:solidFill>
                       <a:srgbClr val="000000"/>
                     </a:solidFill>
@@ -11514,7 +11514,7 @@
               </a:ln>
               <a:extLst>
                 <a:ext uri="{91240B29-F687-4f45-9708-019B960494DF}">
-                  <a14:hiddenLine xmlns:a14="http://schemas.microsoft.com/office/drawing/2010/main" xmlns="" w="9525">
+                  <a14:hiddenLine xmlns="" xmlns:a14="http://schemas.microsoft.com/office/drawing/2010/main" w="9525">
                     <a:solidFill>
                       <a:srgbClr val="000000"/>
                     </a:solidFill>
@@ -11582,7 +11582,7 @@
               </a:ln>
               <a:extLst>
                 <a:ext uri="{91240B29-F687-4f45-9708-019B960494DF}">
-                  <a14:hiddenLine xmlns:a14="http://schemas.microsoft.com/office/drawing/2010/main" xmlns="" w="9525">
+                  <a14:hiddenLine xmlns="" xmlns:a14="http://schemas.microsoft.com/office/drawing/2010/main" w="9525">
                     <a:solidFill>
                       <a:srgbClr val="000000"/>
                     </a:solidFill>
@@ -11672,7 +11672,7 @@
               </a:ln>
               <a:extLst>
                 <a:ext uri="{91240B29-F687-4f45-9708-019B960494DF}">
-                  <a14:hiddenLine xmlns:a14="http://schemas.microsoft.com/office/drawing/2010/main" xmlns="" w="9525">
+                  <a14:hiddenLine xmlns="" xmlns:a14="http://schemas.microsoft.com/office/drawing/2010/main" w="9525">
                     <a:solidFill>
                       <a:srgbClr val="000000"/>
                     </a:solidFill>
@@ -11740,7 +11740,7 @@
               </a:ln>
               <a:extLst>
                 <a:ext uri="{91240B29-F687-4f45-9708-019B960494DF}">
-                  <a14:hiddenLine xmlns:a14="http://schemas.microsoft.com/office/drawing/2010/main" xmlns="" w="9525">
+                  <a14:hiddenLine xmlns="" xmlns:a14="http://schemas.microsoft.com/office/drawing/2010/main" w="9525">
                     <a:solidFill>
                       <a:srgbClr val="000000"/>
                     </a:solidFill>
@@ -11830,7 +11830,7 @@
               </a:ln>
               <a:extLst>
                 <a:ext uri="{91240B29-F687-4f45-9708-019B960494DF}">
-                  <a14:hiddenLine xmlns:a14="http://schemas.microsoft.com/office/drawing/2010/main" xmlns="" w="9525">
+                  <a14:hiddenLine xmlns="" xmlns:a14="http://schemas.microsoft.com/office/drawing/2010/main" w="9525">
                     <a:solidFill>
                       <a:srgbClr val="000000"/>
                     </a:solidFill>
@@ -11864,7 +11864,7 @@
               </a:ln>
               <a:extLst>
                 <a:ext uri="{91240B29-F687-4f45-9708-019B960494DF}">
-                  <a14:hiddenLine xmlns:a14="http://schemas.microsoft.com/office/drawing/2010/main" xmlns="" w="9525">
+                  <a14:hiddenLine xmlns="" xmlns:a14="http://schemas.microsoft.com/office/drawing/2010/main" w="9525">
                     <a:solidFill>
                       <a:srgbClr val="000000"/>
                     </a:solidFill>
@@ -13421,7 +13421,7 @@
         <p:spPr/>
         <p:txBody>
           <a:bodyPr>
-            <a:normAutofit fontScale="77500" lnSpcReduction="20000"/>
+            <a:normAutofit fontScale="92500" lnSpcReduction="20000"/>
           </a:bodyPr>
           <a:lstStyle/>
           <a:p>
@@ -13568,26 +13568,6 @@
               <a:rPr lang="zh-TW" altLang="en-US" sz="2400" u="sng" dirty="0"/>
               <a:t>歲</a:t>
             </a:r>
-            <a:endParaRPr lang="en-US" altLang="zh-TW" sz="2400" u="sng" dirty="0"/>
-          </a:p>
-          <a:p>
-            <a:pPr lvl="1"/>
-            <a:r>
-              <a:rPr lang="zh-TW" altLang="en-US" sz="2400" dirty="0"/>
-              <a:t>結婚人數是離婚人數</a:t>
-            </a:r>
-            <a:r>
-              <a:rPr lang="en-US" altLang="zh-TW" sz="2400" u="sng" dirty="0"/>
-              <a:t>3</a:t>
-            </a:r>
-            <a:r>
-              <a:rPr lang="zh-TW" altLang="en-US" sz="2400" u="sng" dirty="0"/>
-              <a:t>倍以上</a:t>
-            </a:r>
-            <a:endParaRPr lang="en-US" altLang="zh-TW" sz="2400" u="sng" dirty="0"/>
-          </a:p>
-          <a:p>
-            <a:pPr lvl="1"/>
             <a:r>
               <a:rPr lang="zh-TW" altLang="en-US" sz="2400" dirty="0"/>
               <a:t>每月離婚中</a:t>
@@ -13757,7 +13737,7 @@
             </a:r>
             <a:r>
               <a:rPr lang="zh-TW" altLang="en-US" sz="3200" dirty="0"/>
-              <a:t>的人當成主力客群。</a:t>
+              <a:t>的人當成主力客群推銷。</a:t>
             </a:r>
             <a:endParaRPr lang="en-US" altLang="zh-TW" sz="3200" dirty="0"/>
           </a:p>
@@ -13776,7 +13756,7 @@
             </a:r>
             <a:r>
               <a:rPr lang="zh-TW" altLang="en-US" sz="3200" dirty="0"/>
-              <a:t>的人群當成主力客群，但最好避開</a:t>
+              <a:t>的人群當成主力客群推銷，但最好避開</a:t>
             </a:r>
             <a:r>
               <a:rPr lang="en-US" altLang="zh-TW" sz="3200" dirty="0"/>
